--- a/20_Projects/海音_心体の調律/タマラ/髙瀨三由紀さん/20261102_髙瀨三由紀さん_胸の奥の痛みをほどく単発セッション.pptx
+++ b/20_Projects/海音_心体の調律/タマラ/髙瀨三由紀さん/20261102_髙瀨三由紀さん_胸の奥の痛みをほどく単発セッション.pptx
@@ -160,14 +160,14 @@
   <p:extLst>
     <p:ext uri="{521415D9-36F7-43E2-AB2F-B90AF26B5E84}">
       <p14:sectionLst xmlns:p14="http://schemas.microsoft.com/office/powerpoint/2010/main">
-        <p14:section name="はじめに" id="{a3eefdb9-ca32-5dfb-3902-992df616b985}">
+        <p14:section name="はじめに" id="{03aa1b8d-5c6b-f15c-e63d-b5b16c213cd6}">
           <p14:sldIdLst>
             <p14:sldId id="256"/>
             <p14:sldId id="257"/>
             <p14:sldId id="258"/>
           </p14:sldIdLst>
         </p14:section>
-        <p14:section name="第1部 魂の傷を聴く" id="{47f9b7b2-3533-102a-93ec-f6ee8ce09072}">
+        <p14:section name="第1部 魂の傷を聴く" id="{cdb1e530-9ca5-19d0-2f6b-2b1e2c05a6f0}">
           <p14:sldIdLst>
             <p14:sldId id="259"/>
             <p14:sldId id="260"/>
@@ -186,7 +186,7 @@
             <p14:sldId id="273"/>
           </p14:sldIdLst>
         </p14:section>
-        <p14:section name="第2部 頭の構造を知る" id="{6e58fa80-43bb-a50f-31ae-a97437bd42c2}">
+        <p14:section name="第2部 頭の構造を知る" id="{6fb0b37e-758e-bc43-a4b4-33fa8396429e}">
           <p14:sldIdLst>
             <p14:sldId id="274"/>
             <p14:sldId id="275"/>
@@ -200,7 +200,7 @@
             <p14:sldId id="283"/>
           </p14:sldIdLst>
         </p14:section>
-        <p14:section name="ワーク 思い込みを書き換える" id="{94040206-608f-49a5-98c2-5b07a6d629cf}">
+        <p14:section name="ワーク 思い込みを書き換える" id="{2cc51895-41fe-dfec-9729-eeeeb91d5670}">
           <p14:sldIdLst>
             <p14:sldId id="284"/>
             <p14:sldId id="285"/>
@@ -223,12 +223,12 @@
             <p14:sldId id="302"/>
           </p14:sldIdLst>
         </p14:section>
-        <p14:section name="エネルギー" id="{22d51db1-1266-c2c9-9cde-d305d8d9036b}">
+        <p14:section name="エネルギー" id="{d01206d7-db2d-9d6a-027e-0f4acae84898}">
           <p14:sldIdLst>
             <p14:sldId id="303"/>
           </p14:sldIdLst>
         </p14:section>
-        <p14:section name="まとめ" id="{43d20810-09f8-bd6e-07a7-e7368c1e3c15}">
+        <p14:section name="まとめ" id="{ad69bd18-5418-93ac-6e7c-1cac7b167f64}">
           <p14:sldIdLst>
             <p14:sldId id="304"/>
             <p14:sldId id="305"/>
@@ -2402,7 +2402,7 @@
           <a:p>
             <a:r>
               <a:rPr lang="en-US" dirty="0"/>
-              <a:t>焦り・無価値観→嫉妬・怒り→悲しみ→絶対的安心感。「だから、今から感じ切るワークをしましょう」とワークへ。スキップせずに順番に感じることで癒える。無理にポジティブに変えない（ポジ変禁止）。</a:t>
+              <a:t>ホーキンズ博士の意識のマップ。200（勇気）より下は人から奪う・押す力（フォース）、上は生かす力（パワー）。恥20・罪悪感30・無気力50・深い悲しみ75・恐怖100は、エネルギーがとても低い。胸の奥にしまってきた感情がこのあたりにあると、自分ではヒーリングしようにも痛すぎて触れられない。出てきた感情を否定せず、順番に感じ切って統合していくと、上へ上がっていく。怒り150は悲しみ75より上＝怒りが出てきたら上がってきたサイン。「だから、今から感情を統合するワークをしましょう」とワークへ。無理にポジティブに変えない（ポジ変禁止）。</a:t>
             </a:r>
             <a:endParaRPr lang="en-US" dirty="0"/>
           </a:p>
@@ -12055,50 +12055,2562 @@
                 <a:ea typeface="Yu Mincho" pitchFamily="34" charset="-122"/>
                 <a:cs typeface="Yu Mincho" pitchFamily="34" charset="-120"/>
               </a:rPr>
-              <a:t>入れ替えるには、感情を順番に感じ切る</a:t>
+              <a:t>感情には「エネルギーの高さ」がある</a:t>
             </a:r>
             <a:endParaRPr lang="en-US" sz="2400" dirty="0"/>
           </a:p>
         </p:txBody>
       </p:sp>
-      <p:pic>
-        <p:nvPicPr>
-          <p:cNvPr id="4" name="Image 0" descr="講座スライド">    </p:cNvPr>
-          <p:cNvPicPr>
-            <a:picLocks noChangeAspect="1"/>
-          </p:cNvPicPr>
-          <p:nvPr/>
-        </p:nvPicPr>
-        <p:blipFill>
-          <a:blip r:embed="rId1"/>
-          <a:stretch>
-            <a:fillRect/>
-          </a:stretch>
-        </p:blipFill>
-        <p:spPr>
-          <a:xfrm>
-            <a:off x="457200" y="1234440"/>
-            <a:ext cx="5120640" cy="2857957"/>
-          </a:xfrm>
-          <a:prstGeom prst="rect">
-            <a:avLst/>
-          </a:prstGeom>
-        </p:spPr>
-      </p:pic>
-      <p:sp>
-        <p:nvSpPr>
-          <p:cNvPr id="5" name="money_card"/>
+      <p:sp>
+        <p:nvSpPr>
+          <p:cNvPr id="4" name="lv_head0"/>
+          <p:cNvSpPr txBox="1"/>
+          <p:nvPr/>
+        </p:nvSpPr>
+        <p:spPr>
+          <a:xfrm>
+            <a:off x="457200" y="1097280"/>
+            <a:ext cx="1051560" cy="201168"/>
+          </a:xfrm>
+          <a:prstGeom prst="rect">
+            <a:avLst/>
+          </a:prstGeom>
+          <a:noFill/>
+          <a:ln/>
+        </p:spPr>
+        <p:txBody>
+          <a:bodyPr wrap="square" lIns="0" tIns="0" rIns="0" bIns="0" rtlCol="0" anchor="ctr"/>
+          <a:lstStyle/>
+          <a:p>
+            <a:pPr algn="ctr" indent="0" marL="0">
+              <a:buNone/>
+            </a:pPr>
+            <a:r>
+              <a:rPr lang="en-US" sz="900" b="1" dirty="0">
+                <a:solidFill>
+                  <a:schemeClr val="accent2"/>
+                </a:solidFill>
+              </a:rPr>
+              <a:t>エネルギー値</a:t>
+            </a:r>
+            <a:endParaRPr lang="en-US" sz="900" dirty="0"/>
+          </a:p>
+        </p:txBody>
+      </p:sp>
+      <p:sp>
+        <p:nvSpPr>
+          <p:cNvPr id="5" name="lv_head1"/>
+          <p:cNvSpPr txBox="1"/>
+          <p:nvPr/>
+        </p:nvSpPr>
+        <p:spPr>
+          <a:xfrm>
+            <a:off x="1508760" y="1097280"/>
+            <a:ext cx="1554480" cy="201168"/>
+          </a:xfrm>
+          <a:prstGeom prst="rect">
+            <a:avLst/>
+          </a:prstGeom>
+          <a:noFill/>
+          <a:ln/>
+        </p:spPr>
+        <p:txBody>
+          <a:bodyPr wrap="square" lIns="0" tIns="0" rIns="0" bIns="0" rtlCol="0" anchor="ctr"/>
+          <a:lstStyle/>
+          <a:p>
+            <a:pPr algn="ctr" indent="0" marL="0">
+              <a:buNone/>
+            </a:pPr>
+            <a:r>
+              <a:rPr lang="en-US" sz="900" b="1" dirty="0">
+                <a:solidFill>
+                  <a:schemeClr val="accent2"/>
+                </a:solidFill>
+              </a:rPr>
+              <a:t>意識のレベル</a:t>
+            </a:r>
+            <a:endParaRPr lang="en-US" sz="900" dirty="0"/>
+          </a:p>
+        </p:txBody>
+      </p:sp>
+      <p:sp>
+        <p:nvSpPr>
+          <p:cNvPr id="6" name="lv_head2"/>
+          <p:cNvSpPr txBox="1"/>
+          <p:nvPr/>
+        </p:nvSpPr>
+        <p:spPr>
+          <a:xfrm>
+            <a:off x="3063240" y="1097280"/>
+            <a:ext cx="1371600" cy="201168"/>
+          </a:xfrm>
+          <a:prstGeom prst="rect">
+            <a:avLst/>
+          </a:prstGeom>
+          <a:noFill/>
+          <a:ln/>
+        </p:spPr>
+        <p:txBody>
+          <a:bodyPr wrap="square" lIns="0" tIns="0" rIns="0" bIns="0" rtlCol="0" anchor="ctr"/>
+          <a:lstStyle/>
+          <a:p>
+            <a:pPr algn="ctr" indent="0" marL="0">
+              <a:buNone/>
+            </a:pPr>
+            <a:r>
+              <a:rPr lang="en-US" sz="900" b="1" dirty="0">
+                <a:solidFill>
+                  <a:schemeClr val="accent2"/>
+                </a:solidFill>
+              </a:rPr>
+              <a:t>感情</a:t>
+            </a:r>
+            <a:endParaRPr lang="en-US" sz="900" dirty="0"/>
+          </a:p>
+        </p:txBody>
+      </p:sp>
+      <p:sp>
+        <p:nvSpPr>
+          <p:cNvPr id="7" name="lv_row0"/>
           <p:cNvSpPr/>
           <p:nvPr/>
         </p:nvSpPr>
         <p:spPr>
           <a:xfrm>
-            <a:off x="5806440" y="1234440"/>
-            <a:ext cx="2880360" cy="2857957"/>
+            <a:off x="457200" y="1298448"/>
+            <a:ext cx="5120640" cy="192024"/>
+          </a:xfrm>
+          <a:prstGeom prst="rect">
+            <a:avLst/>
+          </a:prstGeom>
+          <a:solidFill>
+            <a:srgbClr val="F0CC6A"/>
+          </a:solidFill>
+          <a:ln w="9525">
+            <a:solidFill>
+              <a:srgbClr val="FFFFFF"/>
+            </a:solidFill>
+            <a:prstDash val="solid"/>
+          </a:ln>
+        </p:spPr>
+        <p:txBody>
+          <a:bodyPr/>
+          <a:p/>
+        </p:txBody>
+      </p:sp>
+      <p:sp>
+        <p:nvSpPr>
+          <p:cNvPr id="8" name="lv_0_0"/>
+          <p:cNvSpPr txBox="1"/>
+          <p:nvPr/>
+        </p:nvSpPr>
+        <p:spPr>
+          <a:xfrm>
+            <a:off x="457200" y="1298448"/>
+            <a:ext cx="1051560" cy="192024"/>
+          </a:xfrm>
+          <a:prstGeom prst="rect">
+            <a:avLst/>
+          </a:prstGeom>
+          <a:noFill/>
+          <a:ln/>
+        </p:spPr>
+        <p:txBody>
+          <a:bodyPr wrap="square" lIns="0" tIns="0" rIns="0" bIns="0" rtlCol="0" anchor="ctr"/>
+          <a:lstStyle/>
+          <a:p>
+            <a:pPr algn="ctr" indent="0" marL="0">
+              <a:buNone/>
+            </a:pPr>
+            <a:r>
+              <a:rPr lang="en-US" sz="1000" dirty="0">
+                <a:solidFill>
+                  <a:schemeClr val="tx2"/>
+                </a:solidFill>
+              </a:rPr>
+              <a:t>700〜1000</a:t>
+            </a:r>
+            <a:endParaRPr lang="en-US" sz="1000" dirty="0"/>
+          </a:p>
+        </p:txBody>
+      </p:sp>
+      <p:sp>
+        <p:nvSpPr>
+          <p:cNvPr id="9" name="lv_0_1"/>
+          <p:cNvSpPr txBox="1"/>
+          <p:nvPr/>
+        </p:nvSpPr>
+        <p:spPr>
+          <a:xfrm>
+            <a:off x="1508760" y="1298448"/>
+            <a:ext cx="1554480" cy="192024"/>
+          </a:xfrm>
+          <a:prstGeom prst="rect">
+            <a:avLst/>
+          </a:prstGeom>
+          <a:noFill/>
+          <a:ln/>
+        </p:spPr>
+        <p:txBody>
+          <a:bodyPr wrap="square" lIns="0" tIns="0" rIns="0" bIns="0" rtlCol="0" anchor="ctr"/>
+          <a:lstStyle/>
+          <a:p>
+            <a:pPr algn="ctr" indent="0" marL="0">
+              <a:buNone/>
+            </a:pPr>
+            <a:r>
+              <a:rPr lang="en-US" sz="1000" b="1" dirty="0">
+                <a:solidFill>
+                  <a:schemeClr val="tx2"/>
+                </a:solidFill>
+              </a:rPr>
+              <a:t>悟り</a:t>
+            </a:r>
+            <a:endParaRPr lang="en-US" sz="1000" dirty="0"/>
+          </a:p>
+        </p:txBody>
+      </p:sp>
+      <p:sp>
+        <p:nvSpPr>
+          <p:cNvPr id="10" name="lv_0_2"/>
+          <p:cNvSpPr txBox="1"/>
+          <p:nvPr/>
+        </p:nvSpPr>
+        <p:spPr>
+          <a:xfrm>
+            <a:off x="3063240" y="1298448"/>
+            <a:ext cx="1371600" cy="192024"/>
+          </a:xfrm>
+          <a:prstGeom prst="rect">
+            <a:avLst/>
+          </a:prstGeom>
+          <a:noFill/>
+          <a:ln/>
+        </p:spPr>
+        <p:txBody>
+          <a:bodyPr wrap="square" lIns="0" tIns="0" rIns="0" bIns="0" rtlCol="0" anchor="ctr"/>
+          <a:lstStyle/>
+          <a:p>
+            <a:pPr algn="ctr" indent="0" marL="0">
+              <a:buNone/>
+            </a:pPr>
+            <a:r>
+              <a:rPr lang="en-US" sz="1000" dirty="0">
+                <a:solidFill>
+                  <a:schemeClr val="tx2"/>
+                </a:solidFill>
+              </a:rPr>
+              <a:t>言語に絶する</a:t>
+            </a:r>
+            <a:endParaRPr lang="en-US" sz="1000" dirty="0"/>
+          </a:p>
+        </p:txBody>
+      </p:sp>
+      <p:sp>
+        <p:nvSpPr>
+          <p:cNvPr id="11" name="lv_row1"/>
+          <p:cNvSpPr/>
+          <p:nvPr/>
+        </p:nvSpPr>
+        <p:spPr>
+          <a:xfrm>
+            <a:off x="457200" y="1490472"/>
+            <a:ext cx="5120640" cy="192024"/>
+          </a:xfrm>
+          <a:prstGeom prst="rect">
+            <a:avLst/>
+          </a:prstGeom>
+          <a:solidFill>
+            <a:srgbClr val="F0CC6A"/>
+          </a:solidFill>
+          <a:ln w="9525">
+            <a:solidFill>
+              <a:srgbClr val="FFFFFF"/>
+            </a:solidFill>
+            <a:prstDash val="solid"/>
+          </a:ln>
+        </p:spPr>
+        <p:txBody>
+          <a:bodyPr/>
+          <a:p/>
+        </p:txBody>
+      </p:sp>
+      <p:sp>
+        <p:nvSpPr>
+          <p:cNvPr id="12" name="lv_1_0"/>
+          <p:cNvSpPr txBox="1"/>
+          <p:nvPr/>
+        </p:nvSpPr>
+        <p:spPr>
+          <a:xfrm>
+            <a:off x="457200" y="1490472"/>
+            <a:ext cx="1051560" cy="192024"/>
+          </a:xfrm>
+          <a:prstGeom prst="rect">
+            <a:avLst/>
+          </a:prstGeom>
+          <a:noFill/>
+          <a:ln/>
+        </p:spPr>
+        <p:txBody>
+          <a:bodyPr wrap="square" lIns="0" tIns="0" rIns="0" bIns="0" rtlCol="0" anchor="ctr"/>
+          <a:lstStyle/>
+          <a:p>
+            <a:pPr algn="ctr" indent="0" marL="0">
+              <a:buNone/>
+            </a:pPr>
+            <a:r>
+              <a:rPr lang="en-US" sz="1000" dirty="0">
+                <a:solidFill>
+                  <a:schemeClr val="tx2"/>
+                </a:solidFill>
+              </a:rPr>
+              <a:t>600</a:t>
+            </a:r>
+            <a:endParaRPr lang="en-US" sz="1000" dirty="0"/>
+          </a:p>
+        </p:txBody>
+      </p:sp>
+      <p:sp>
+        <p:nvSpPr>
+          <p:cNvPr id="13" name="lv_1_1"/>
+          <p:cNvSpPr txBox="1"/>
+          <p:nvPr/>
+        </p:nvSpPr>
+        <p:spPr>
+          <a:xfrm>
+            <a:off x="1508760" y="1490472"/>
+            <a:ext cx="1554480" cy="192024"/>
+          </a:xfrm>
+          <a:prstGeom prst="rect">
+            <a:avLst/>
+          </a:prstGeom>
+          <a:noFill/>
+          <a:ln/>
+        </p:spPr>
+        <p:txBody>
+          <a:bodyPr wrap="square" lIns="0" tIns="0" rIns="0" bIns="0" rtlCol="0" anchor="ctr"/>
+          <a:lstStyle/>
+          <a:p>
+            <a:pPr algn="ctr" indent="0" marL="0">
+              <a:buNone/>
+            </a:pPr>
+            <a:r>
+              <a:rPr lang="en-US" sz="1000" b="1" dirty="0">
+                <a:solidFill>
+                  <a:schemeClr val="tx2"/>
+                </a:solidFill>
+              </a:rPr>
+              <a:t>平和</a:t>
+            </a:r>
+            <a:endParaRPr lang="en-US" sz="1000" dirty="0"/>
+          </a:p>
+        </p:txBody>
+      </p:sp>
+      <p:sp>
+        <p:nvSpPr>
+          <p:cNvPr id="14" name="lv_1_2"/>
+          <p:cNvSpPr txBox="1"/>
+          <p:nvPr/>
+        </p:nvSpPr>
+        <p:spPr>
+          <a:xfrm>
+            <a:off x="3063240" y="1490472"/>
+            <a:ext cx="1371600" cy="192024"/>
+          </a:xfrm>
+          <a:prstGeom prst="rect">
+            <a:avLst/>
+          </a:prstGeom>
+          <a:noFill/>
+          <a:ln/>
+        </p:spPr>
+        <p:txBody>
+          <a:bodyPr wrap="square" lIns="0" tIns="0" rIns="0" bIns="0" rtlCol="0" anchor="ctr"/>
+          <a:lstStyle/>
+          <a:p>
+            <a:pPr algn="ctr" indent="0" marL="0">
+              <a:buNone/>
+            </a:pPr>
+            <a:r>
+              <a:rPr lang="en-US" sz="1000" dirty="0">
+                <a:solidFill>
+                  <a:schemeClr val="tx2"/>
+                </a:solidFill>
+              </a:rPr>
+              <a:t>至福</a:t>
+            </a:r>
+            <a:endParaRPr lang="en-US" sz="1000" dirty="0"/>
+          </a:p>
+        </p:txBody>
+      </p:sp>
+      <p:sp>
+        <p:nvSpPr>
+          <p:cNvPr id="15" name="lv_row2"/>
+          <p:cNvSpPr/>
+          <p:nvPr/>
+        </p:nvSpPr>
+        <p:spPr>
+          <a:xfrm>
+            <a:off x="457200" y="1682496"/>
+            <a:ext cx="5120640" cy="192024"/>
+          </a:xfrm>
+          <a:prstGeom prst="rect">
+            <a:avLst/>
+          </a:prstGeom>
+          <a:solidFill>
+            <a:srgbClr val="F3D98B"/>
+          </a:solidFill>
+          <a:ln w="9525">
+            <a:solidFill>
+              <a:srgbClr val="FFFFFF"/>
+            </a:solidFill>
+            <a:prstDash val="solid"/>
+          </a:ln>
+        </p:spPr>
+        <p:txBody>
+          <a:bodyPr/>
+          <a:p/>
+        </p:txBody>
+      </p:sp>
+      <p:sp>
+        <p:nvSpPr>
+          <p:cNvPr id="16" name="lv_2_0"/>
+          <p:cNvSpPr txBox="1"/>
+          <p:nvPr/>
+        </p:nvSpPr>
+        <p:spPr>
+          <a:xfrm>
+            <a:off x="457200" y="1682496"/>
+            <a:ext cx="1051560" cy="192024"/>
+          </a:xfrm>
+          <a:prstGeom prst="rect">
+            <a:avLst/>
+          </a:prstGeom>
+          <a:noFill/>
+          <a:ln/>
+        </p:spPr>
+        <p:txBody>
+          <a:bodyPr wrap="square" lIns="0" tIns="0" rIns="0" bIns="0" rtlCol="0" anchor="ctr"/>
+          <a:lstStyle/>
+          <a:p>
+            <a:pPr algn="ctr" indent="0" marL="0">
+              <a:buNone/>
+            </a:pPr>
+            <a:r>
+              <a:rPr lang="en-US" sz="1000" dirty="0">
+                <a:solidFill>
+                  <a:schemeClr val="tx2"/>
+                </a:solidFill>
+              </a:rPr>
+              <a:t>540</a:t>
+            </a:r>
+            <a:endParaRPr lang="en-US" sz="1000" dirty="0"/>
+          </a:p>
+        </p:txBody>
+      </p:sp>
+      <p:sp>
+        <p:nvSpPr>
+          <p:cNvPr id="17" name="lv_2_1"/>
+          <p:cNvSpPr txBox="1"/>
+          <p:nvPr/>
+        </p:nvSpPr>
+        <p:spPr>
+          <a:xfrm>
+            <a:off x="1508760" y="1682496"/>
+            <a:ext cx="1554480" cy="192024"/>
+          </a:xfrm>
+          <a:prstGeom prst="rect">
+            <a:avLst/>
+          </a:prstGeom>
+          <a:noFill/>
+          <a:ln/>
+        </p:spPr>
+        <p:txBody>
+          <a:bodyPr wrap="square" lIns="0" tIns="0" rIns="0" bIns="0" rtlCol="0" anchor="ctr"/>
+          <a:lstStyle/>
+          <a:p>
+            <a:pPr algn="ctr" indent="0" marL="0">
+              <a:buNone/>
+            </a:pPr>
+            <a:r>
+              <a:rPr lang="en-US" sz="1000" b="1" dirty="0">
+                <a:solidFill>
+                  <a:schemeClr val="tx2"/>
+                </a:solidFill>
+              </a:rPr>
+              <a:t>喜び</a:t>
+            </a:r>
+            <a:endParaRPr lang="en-US" sz="1000" dirty="0"/>
+          </a:p>
+        </p:txBody>
+      </p:sp>
+      <p:sp>
+        <p:nvSpPr>
+          <p:cNvPr id="18" name="lv_2_2"/>
+          <p:cNvSpPr txBox="1"/>
+          <p:nvPr/>
+        </p:nvSpPr>
+        <p:spPr>
+          <a:xfrm>
+            <a:off x="3063240" y="1682496"/>
+            <a:ext cx="1371600" cy="192024"/>
+          </a:xfrm>
+          <a:prstGeom prst="rect">
+            <a:avLst/>
+          </a:prstGeom>
+          <a:noFill/>
+          <a:ln/>
+        </p:spPr>
+        <p:txBody>
+          <a:bodyPr wrap="square" lIns="0" tIns="0" rIns="0" bIns="0" rtlCol="0" anchor="ctr"/>
+          <a:lstStyle/>
+          <a:p>
+            <a:pPr algn="ctr" indent="0" marL="0">
+              <a:buNone/>
+            </a:pPr>
+            <a:r>
+              <a:rPr lang="en-US" sz="1000" dirty="0">
+                <a:solidFill>
+                  <a:schemeClr val="tx2"/>
+                </a:solidFill>
+              </a:rPr>
+              <a:t>静穏</a:t>
+            </a:r>
+            <a:endParaRPr lang="en-US" sz="1000" dirty="0"/>
+          </a:p>
+        </p:txBody>
+      </p:sp>
+      <p:sp>
+        <p:nvSpPr>
+          <p:cNvPr id="19" name="lv_row3"/>
+          <p:cNvSpPr/>
+          <p:nvPr/>
+        </p:nvSpPr>
+        <p:spPr>
+          <a:xfrm>
+            <a:off x="457200" y="1874520"/>
+            <a:ext cx="5120640" cy="192024"/>
+          </a:xfrm>
+          <a:prstGeom prst="rect">
+            <a:avLst/>
+          </a:prstGeom>
+          <a:solidFill>
+            <a:srgbClr val="F3D98B"/>
+          </a:solidFill>
+          <a:ln w="9525">
+            <a:solidFill>
+              <a:srgbClr val="FFFFFF"/>
+            </a:solidFill>
+            <a:prstDash val="solid"/>
+          </a:ln>
+        </p:spPr>
+        <p:txBody>
+          <a:bodyPr/>
+          <a:p/>
+        </p:txBody>
+      </p:sp>
+      <p:sp>
+        <p:nvSpPr>
+          <p:cNvPr id="20" name="lv_3_0"/>
+          <p:cNvSpPr txBox="1"/>
+          <p:nvPr/>
+        </p:nvSpPr>
+        <p:spPr>
+          <a:xfrm>
+            <a:off x="457200" y="1874520"/>
+            <a:ext cx="1051560" cy="192024"/>
+          </a:xfrm>
+          <a:prstGeom prst="rect">
+            <a:avLst/>
+          </a:prstGeom>
+          <a:noFill/>
+          <a:ln/>
+        </p:spPr>
+        <p:txBody>
+          <a:bodyPr wrap="square" lIns="0" tIns="0" rIns="0" bIns="0" rtlCol="0" anchor="ctr"/>
+          <a:lstStyle/>
+          <a:p>
+            <a:pPr algn="ctr" indent="0" marL="0">
+              <a:buNone/>
+            </a:pPr>
+            <a:r>
+              <a:rPr lang="en-US" sz="1000" dirty="0">
+                <a:solidFill>
+                  <a:schemeClr val="tx2"/>
+                </a:solidFill>
+              </a:rPr>
+              <a:t>500</a:t>
+            </a:r>
+            <a:endParaRPr lang="en-US" sz="1000" dirty="0"/>
+          </a:p>
+        </p:txBody>
+      </p:sp>
+      <p:sp>
+        <p:nvSpPr>
+          <p:cNvPr id="21" name="lv_3_1"/>
+          <p:cNvSpPr txBox="1"/>
+          <p:nvPr/>
+        </p:nvSpPr>
+        <p:spPr>
+          <a:xfrm>
+            <a:off x="1508760" y="1874520"/>
+            <a:ext cx="1554480" cy="192024"/>
+          </a:xfrm>
+          <a:prstGeom prst="rect">
+            <a:avLst/>
+          </a:prstGeom>
+          <a:noFill/>
+          <a:ln/>
+        </p:spPr>
+        <p:txBody>
+          <a:bodyPr wrap="square" lIns="0" tIns="0" rIns="0" bIns="0" rtlCol="0" anchor="ctr"/>
+          <a:lstStyle/>
+          <a:p>
+            <a:pPr algn="ctr" indent="0" marL="0">
+              <a:buNone/>
+            </a:pPr>
+            <a:r>
+              <a:rPr lang="en-US" sz="1000" b="1" dirty="0">
+                <a:solidFill>
+                  <a:schemeClr val="tx2"/>
+                </a:solidFill>
+              </a:rPr>
+              <a:t>愛</a:t>
+            </a:r>
+            <a:endParaRPr lang="en-US" sz="1000" dirty="0"/>
+          </a:p>
+        </p:txBody>
+      </p:sp>
+      <p:sp>
+        <p:nvSpPr>
+          <p:cNvPr id="22" name="lv_3_2"/>
+          <p:cNvSpPr txBox="1"/>
+          <p:nvPr/>
+        </p:nvSpPr>
+        <p:spPr>
+          <a:xfrm>
+            <a:off x="3063240" y="1874520"/>
+            <a:ext cx="1371600" cy="192024"/>
+          </a:xfrm>
+          <a:prstGeom prst="rect">
+            <a:avLst/>
+          </a:prstGeom>
+          <a:noFill/>
+          <a:ln/>
+        </p:spPr>
+        <p:txBody>
+          <a:bodyPr wrap="square" lIns="0" tIns="0" rIns="0" bIns="0" rtlCol="0" anchor="ctr"/>
+          <a:lstStyle/>
+          <a:p>
+            <a:pPr algn="ctr" indent="0" marL="0">
+              <a:buNone/>
+            </a:pPr>
+            <a:r>
+              <a:rPr lang="en-US" sz="1000" dirty="0">
+                <a:solidFill>
+                  <a:schemeClr val="tx2"/>
+                </a:solidFill>
+              </a:rPr>
+              <a:t>尊敬</a:t>
+            </a:r>
+            <a:endParaRPr lang="en-US" sz="1000" dirty="0"/>
+          </a:p>
+        </p:txBody>
+      </p:sp>
+      <p:sp>
+        <p:nvSpPr>
+          <p:cNvPr id="23" name="lv_row4"/>
+          <p:cNvSpPr/>
+          <p:nvPr/>
+        </p:nvSpPr>
+        <p:spPr>
+          <a:xfrm>
+            <a:off x="457200" y="2066544"/>
+            <a:ext cx="5120640" cy="192024"/>
+          </a:xfrm>
+          <a:prstGeom prst="rect">
+            <a:avLst/>
+          </a:prstGeom>
+          <a:solidFill>
+            <a:srgbClr val="F3D98B"/>
+          </a:solidFill>
+          <a:ln w="9525">
+            <a:solidFill>
+              <a:srgbClr val="FFFFFF"/>
+            </a:solidFill>
+            <a:prstDash val="solid"/>
+          </a:ln>
+        </p:spPr>
+        <p:txBody>
+          <a:bodyPr/>
+          <a:p/>
+        </p:txBody>
+      </p:sp>
+      <p:sp>
+        <p:nvSpPr>
+          <p:cNvPr id="24" name="lv_4_0"/>
+          <p:cNvSpPr txBox="1"/>
+          <p:nvPr/>
+        </p:nvSpPr>
+        <p:spPr>
+          <a:xfrm>
+            <a:off x="457200" y="2066544"/>
+            <a:ext cx="1051560" cy="192024"/>
+          </a:xfrm>
+          <a:prstGeom prst="rect">
+            <a:avLst/>
+          </a:prstGeom>
+          <a:noFill/>
+          <a:ln/>
+        </p:spPr>
+        <p:txBody>
+          <a:bodyPr wrap="square" lIns="0" tIns="0" rIns="0" bIns="0" rtlCol="0" anchor="ctr"/>
+          <a:lstStyle/>
+          <a:p>
+            <a:pPr algn="ctr" indent="0" marL="0">
+              <a:buNone/>
+            </a:pPr>
+            <a:r>
+              <a:rPr lang="en-US" sz="1000" dirty="0">
+                <a:solidFill>
+                  <a:schemeClr val="tx2"/>
+                </a:solidFill>
+              </a:rPr>
+              <a:t>400</a:t>
+            </a:r>
+            <a:endParaRPr lang="en-US" sz="1000" dirty="0"/>
+          </a:p>
+        </p:txBody>
+      </p:sp>
+      <p:sp>
+        <p:nvSpPr>
+          <p:cNvPr id="25" name="lv_4_1"/>
+          <p:cNvSpPr txBox="1"/>
+          <p:nvPr/>
+        </p:nvSpPr>
+        <p:spPr>
+          <a:xfrm>
+            <a:off x="1508760" y="2066544"/>
+            <a:ext cx="1554480" cy="192024"/>
+          </a:xfrm>
+          <a:prstGeom prst="rect">
+            <a:avLst/>
+          </a:prstGeom>
+          <a:noFill/>
+          <a:ln/>
+        </p:spPr>
+        <p:txBody>
+          <a:bodyPr wrap="square" lIns="0" tIns="0" rIns="0" bIns="0" rtlCol="0" anchor="ctr"/>
+          <a:lstStyle/>
+          <a:p>
+            <a:pPr algn="ctr" indent="0" marL="0">
+              <a:buNone/>
+            </a:pPr>
+            <a:r>
+              <a:rPr lang="en-US" sz="1000" b="1" dirty="0">
+                <a:solidFill>
+                  <a:schemeClr val="tx2"/>
+                </a:solidFill>
+              </a:rPr>
+              <a:t>理性</a:t>
+            </a:r>
+            <a:endParaRPr lang="en-US" sz="1000" dirty="0"/>
+          </a:p>
+        </p:txBody>
+      </p:sp>
+      <p:sp>
+        <p:nvSpPr>
+          <p:cNvPr id="26" name="lv_4_2"/>
+          <p:cNvSpPr txBox="1"/>
+          <p:nvPr/>
+        </p:nvSpPr>
+        <p:spPr>
+          <a:xfrm>
+            <a:off x="3063240" y="2066544"/>
+            <a:ext cx="1371600" cy="192024"/>
+          </a:xfrm>
+          <a:prstGeom prst="rect">
+            <a:avLst/>
+          </a:prstGeom>
+          <a:noFill/>
+          <a:ln/>
+        </p:spPr>
+        <p:txBody>
+          <a:bodyPr wrap="square" lIns="0" tIns="0" rIns="0" bIns="0" rtlCol="0" anchor="ctr"/>
+          <a:lstStyle/>
+          <a:p>
+            <a:pPr algn="ctr" indent="0" marL="0">
+              <a:buNone/>
+            </a:pPr>
+            <a:r>
+              <a:rPr lang="en-US" sz="1000" dirty="0">
+                <a:solidFill>
+                  <a:schemeClr val="tx2"/>
+                </a:solidFill>
+              </a:rPr>
+              <a:t>理解</a:t>
+            </a:r>
+            <a:endParaRPr lang="en-US" sz="1000" dirty="0"/>
+          </a:p>
+        </p:txBody>
+      </p:sp>
+      <p:sp>
+        <p:nvSpPr>
+          <p:cNvPr id="27" name="lv_row5"/>
+          <p:cNvSpPr/>
+          <p:nvPr/>
+        </p:nvSpPr>
+        <p:spPr>
+          <a:xfrm>
+            <a:off x="457200" y="2258568"/>
+            <a:ext cx="5120640" cy="192024"/>
+          </a:xfrm>
+          <a:prstGeom prst="rect">
+            <a:avLst/>
+          </a:prstGeom>
+          <a:solidFill>
+            <a:srgbClr val="F8EBC8"/>
+          </a:solidFill>
+          <a:ln w="9525">
+            <a:solidFill>
+              <a:srgbClr val="FFFFFF"/>
+            </a:solidFill>
+            <a:prstDash val="solid"/>
+          </a:ln>
+        </p:spPr>
+        <p:txBody>
+          <a:bodyPr/>
+          <a:p/>
+        </p:txBody>
+      </p:sp>
+      <p:sp>
+        <p:nvSpPr>
+          <p:cNvPr id="28" name="lv_5_0"/>
+          <p:cNvSpPr txBox="1"/>
+          <p:nvPr/>
+        </p:nvSpPr>
+        <p:spPr>
+          <a:xfrm>
+            <a:off x="457200" y="2258568"/>
+            <a:ext cx="1051560" cy="192024"/>
+          </a:xfrm>
+          <a:prstGeom prst="rect">
+            <a:avLst/>
+          </a:prstGeom>
+          <a:noFill/>
+          <a:ln/>
+        </p:spPr>
+        <p:txBody>
+          <a:bodyPr wrap="square" lIns="0" tIns="0" rIns="0" bIns="0" rtlCol="0" anchor="ctr"/>
+          <a:lstStyle/>
+          <a:p>
+            <a:pPr algn="ctr" indent="0" marL="0">
+              <a:buNone/>
+            </a:pPr>
+            <a:r>
+              <a:rPr lang="en-US" sz="1000" dirty="0">
+                <a:solidFill>
+                  <a:schemeClr val="tx2"/>
+                </a:solidFill>
+              </a:rPr>
+              <a:t>350</a:t>
+            </a:r>
+            <a:endParaRPr lang="en-US" sz="1000" dirty="0"/>
+          </a:p>
+        </p:txBody>
+      </p:sp>
+      <p:sp>
+        <p:nvSpPr>
+          <p:cNvPr id="29" name="lv_5_1"/>
+          <p:cNvSpPr txBox="1"/>
+          <p:nvPr/>
+        </p:nvSpPr>
+        <p:spPr>
+          <a:xfrm>
+            <a:off x="1508760" y="2258568"/>
+            <a:ext cx="1554480" cy="192024"/>
+          </a:xfrm>
+          <a:prstGeom prst="rect">
+            <a:avLst/>
+          </a:prstGeom>
+          <a:noFill/>
+          <a:ln/>
+        </p:spPr>
+        <p:txBody>
+          <a:bodyPr wrap="square" lIns="0" tIns="0" rIns="0" bIns="0" rtlCol="0" anchor="ctr"/>
+          <a:lstStyle/>
+          <a:p>
+            <a:pPr algn="ctr" indent="0" marL="0">
+              <a:buNone/>
+            </a:pPr>
+            <a:r>
+              <a:rPr lang="en-US" sz="1000" b="1" dirty="0">
+                <a:solidFill>
+                  <a:schemeClr val="tx2"/>
+                </a:solidFill>
+              </a:rPr>
+              <a:t>受容</a:t>
+            </a:r>
+            <a:endParaRPr lang="en-US" sz="1000" dirty="0"/>
+          </a:p>
+        </p:txBody>
+      </p:sp>
+      <p:sp>
+        <p:nvSpPr>
+          <p:cNvPr id="30" name="lv_5_2"/>
+          <p:cNvSpPr txBox="1"/>
+          <p:nvPr/>
+        </p:nvSpPr>
+        <p:spPr>
+          <a:xfrm>
+            <a:off x="3063240" y="2258568"/>
+            <a:ext cx="1371600" cy="192024"/>
+          </a:xfrm>
+          <a:prstGeom prst="rect">
+            <a:avLst/>
+          </a:prstGeom>
+          <a:noFill/>
+          <a:ln/>
+        </p:spPr>
+        <p:txBody>
+          <a:bodyPr wrap="square" lIns="0" tIns="0" rIns="0" bIns="0" rtlCol="0" anchor="ctr"/>
+          <a:lstStyle/>
+          <a:p>
+            <a:pPr algn="ctr" indent="0" marL="0">
+              <a:buNone/>
+            </a:pPr>
+            <a:r>
+              <a:rPr lang="en-US" sz="1000" dirty="0">
+                <a:solidFill>
+                  <a:schemeClr val="tx2"/>
+                </a:solidFill>
+              </a:rPr>
+              <a:t>許し</a:t>
+            </a:r>
+            <a:endParaRPr lang="en-US" sz="1000" dirty="0"/>
+          </a:p>
+        </p:txBody>
+      </p:sp>
+      <p:sp>
+        <p:nvSpPr>
+          <p:cNvPr id="31" name="lv_row6"/>
+          <p:cNvSpPr/>
+          <p:nvPr/>
+        </p:nvSpPr>
+        <p:spPr>
+          <a:xfrm>
+            <a:off x="457200" y="2450592"/>
+            <a:ext cx="5120640" cy="192024"/>
+          </a:xfrm>
+          <a:prstGeom prst="rect">
+            <a:avLst/>
+          </a:prstGeom>
+          <a:solidFill>
+            <a:srgbClr val="F8EBC8"/>
+          </a:solidFill>
+          <a:ln w="9525">
+            <a:solidFill>
+              <a:srgbClr val="FFFFFF"/>
+            </a:solidFill>
+            <a:prstDash val="solid"/>
+          </a:ln>
+        </p:spPr>
+        <p:txBody>
+          <a:bodyPr/>
+          <a:p/>
+        </p:txBody>
+      </p:sp>
+      <p:sp>
+        <p:nvSpPr>
+          <p:cNvPr id="32" name="lv_6_0"/>
+          <p:cNvSpPr txBox="1"/>
+          <p:nvPr/>
+        </p:nvSpPr>
+        <p:spPr>
+          <a:xfrm>
+            <a:off x="457200" y="2450592"/>
+            <a:ext cx="1051560" cy="192024"/>
+          </a:xfrm>
+          <a:prstGeom prst="rect">
+            <a:avLst/>
+          </a:prstGeom>
+          <a:noFill/>
+          <a:ln/>
+        </p:spPr>
+        <p:txBody>
+          <a:bodyPr wrap="square" lIns="0" tIns="0" rIns="0" bIns="0" rtlCol="0" anchor="ctr"/>
+          <a:lstStyle/>
+          <a:p>
+            <a:pPr algn="ctr" indent="0" marL="0">
+              <a:buNone/>
+            </a:pPr>
+            <a:r>
+              <a:rPr lang="en-US" sz="1000" dirty="0">
+                <a:solidFill>
+                  <a:schemeClr val="tx2"/>
+                </a:solidFill>
+              </a:rPr>
+              <a:t>310</a:t>
+            </a:r>
+            <a:endParaRPr lang="en-US" sz="1000" dirty="0"/>
+          </a:p>
+        </p:txBody>
+      </p:sp>
+      <p:sp>
+        <p:nvSpPr>
+          <p:cNvPr id="33" name="lv_6_1"/>
+          <p:cNvSpPr txBox="1"/>
+          <p:nvPr/>
+        </p:nvSpPr>
+        <p:spPr>
+          <a:xfrm>
+            <a:off x="1508760" y="2450592"/>
+            <a:ext cx="1554480" cy="192024"/>
+          </a:xfrm>
+          <a:prstGeom prst="rect">
+            <a:avLst/>
+          </a:prstGeom>
+          <a:noFill/>
+          <a:ln/>
+        </p:spPr>
+        <p:txBody>
+          <a:bodyPr wrap="square" lIns="0" tIns="0" rIns="0" bIns="0" rtlCol="0" anchor="ctr"/>
+          <a:lstStyle/>
+          <a:p>
+            <a:pPr algn="ctr" indent="0" marL="0">
+              <a:buNone/>
+            </a:pPr>
+            <a:r>
+              <a:rPr lang="en-US" sz="1000" b="1" dirty="0">
+                <a:solidFill>
+                  <a:schemeClr val="tx2"/>
+                </a:solidFill>
+              </a:rPr>
+              <a:t>意欲</a:t>
+            </a:r>
+            <a:endParaRPr lang="en-US" sz="1000" dirty="0"/>
+          </a:p>
+        </p:txBody>
+      </p:sp>
+      <p:sp>
+        <p:nvSpPr>
+          <p:cNvPr id="34" name="lv_6_2"/>
+          <p:cNvSpPr txBox="1"/>
+          <p:nvPr/>
+        </p:nvSpPr>
+        <p:spPr>
+          <a:xfrm>
+            <a:off x="3063240" y="2450592"/>
+            <a:ext cx="1371600" cy="192024"/>
+          </a:xfrm>
+          <a:prstGeom prst="rect">
+            <a:avLst/>
+          </a:prstGeom>
+          <a:noFill/>
+          <a:ln/>
+        </p:spPr>
+        <p:txBody>
+          <a:bodyPr wrap="square" lIns="0" tIns="0" rIns="0" bIns="0" rtlCol="0" anchor="ctr"/>
+          <a:lstStyle/>
+          <a:p>
+            <a:pPr algn="ctr" indent="0" marL="0">
+              <a:buNone/>
+            </a:pPr>
+            <a:r>
+              <a:rPr lang="en-US" sz="1000" dirty="0">
+                <a:solidFill>
+                  <a:schemeClr val="tx2"/>
+                </a:solidFill>
+              </a:rPr>
+              <a:t>楽観</a:t>
+            </a:r>
+            <a:endParaRPr lang="en-US" sz="1000" dirty="0"/>
+          </a:p>
+        </p:txBody>
+      </p:sp>
+      <p:sp>
+        <p:nvSpPr>
+          <p:cNvPr id="35" name="lv_row7"/>
+          <p:cNvSpPr/>
+          <p:nvPr/>
+        </p:nvSpPr>
+        <p:spPr>
+          <a:xfrm>
+            <a:off x="457200" y="2642616"/>
+            <a:ext cx="5120640" cy="192024"/>
+          </a:xfrm>
+          <a:prstGeom prst="rect">
+            <a:avLst/>
+          </a:prstGeom>
+          <a:solidFill>
+            <a:srgbClr val="F8EBC8"/>
+          </a:solidFill>
+          <a:ln w="9525">
+            <a:solidFill>
+              <a:srgbClr val="FFFFFF"/>
+            </a:solidFill>
+            <a:prstDash val="solid"/>
+          </a:ln>
+        </p:spPr>
+        <p:txBody>
+          <a:bodyPr/>
+          <a:p/>
+        </p:txBody>
+      </p:sp>
+      <p:sp>
+        <p:nvSpPr>
+          <p:cNvPr id="36" name="lv_7_0"/>
+          <p:cNvSpPr txBox="1"/>
+          <p:nvPr/>
+        </p:nvSpPr>
+        <p:spPr>
+          <a:xfrm>
+            <a:off x="457200" y="2642616"/>
+            <a:ext cx="1051560" cy="192024"/>
+          </a:xfrm>
+          <a:prstGeom prst="rect">
+            <a:avLst/>
+          </a:prstGeom>
+          <a:noFill/>
+          <a:ln/>
+        </p:spPr>
+        <p:txBody>
+          <a:bodyPr wrap="square" lIns="0" tIns="0" rIns="0" bIns="0" rtlCol="0" anchor="ctr"/>
+          <a:lstStyle/>
+          <a:p>
+            <a:pPr algn="ctr" indent="0" marL="0">
+              <a:buNone/>
+            </a:pPr>
+            <a:r>
+              <a:rPr lang="en-US" sz="1000" dirty="0">
+                <a:solidFill>
+                  <a:schemeClr val="tx2"/>
+                </a:solidFill>
+              </a:rPr>
+              <a:t>250</a:t>
+            </a:r>
+            <a:endParaRPr lang="en-US" sz="1000" dirty="0"/>
+          </a:p>
+        </p:txBody>
+      </p:sp>
+      <p:sp>
+        <p:nvSpPr>
+          <p:cNvPr id="37" name="lv_7_1"/>
+          <p:cNvSpPr txBox="1"/>
+          <p:nvPr/>
+        </p:nvSpPr>
+        <p:spPr>
+          <a:xfrm>
+            <a:off x="1508760" y="2642616"/>
+            <a:ext cx="1554480" cy="192024"/>
+          </a:xfrm>
+          <a:prstGeom prst="rect">
+            <a:avLst/>
+          </a:prstGeom>
+          <a:noFill/>
+          <a:ln/>
+        </p:spPr>
+        <p:txBody>
+          <a:bodyPr wrap="square" lIns="0" tIns="0" rIns="0" bIns="0" rtlCol="0" anchor="ctr"/>
+          <a:lstStyle/>
+          <a:p>
+            <a:pPr algn="ctr" indent="0" marL="0">
+              <a:buNone/>
+            </a:pPr>
+            <a:r>
+              <a:rPr lang="en-US" sz="1000" b="1" dirty="0">
+                <a:solidFill>
+                  <a:schemeClr val="tx2"/>
+                </a:solidFill>
+              </a:rPr>
+              <a:t>中立</a:t>
+            </a:r>
+            <a:endParaRPr lang="en-US" sz="1000" dirty="0"/>
+          </a:p>
+        </p:txBody>
+      </p:sp>
+      <p:sp>
+        <p:nvSpPr>
+          <p:cNvPr id="38" name="lv_7_2"/>
+          <p:cNvSpPr txBox="1"/>
+          <p:nvPr/>
+        </p:nvSpPr>
+        <p:spPr>
+          <a:xfrm>
+            <a:off x="3063240" y="2642616"/>
+            <a:ext cx="1371600" cy="192024"/>
+          </a:xfrm>
+          <a:prstGeom prst="rect">
+            <a:avLst/>
+          </a:prstGeom>
+          <a:noFill/>
+          <a:ln/>
+        </p:spPr>
+        <p:txBody>
+          <a:bodyPr wrap="square" lIns="0" tIns="0" rIns="0" bIns="0" rtlCol="0" anchor="ctr"/>
+          <a:lstStyle/>
+          <a:p>
+            <a:pPr algn="ctr" indent="0" marL="0">
+              <a:buNone/>
+            </a:pPr>
+            <a:r>
+              <a:rPr lang="en-US" sz="1000" dirty="0">
+                <a:solidFill>
+                  <a:schemeClr val="tx2"/>
+                </a:solidFill>
+              </a:rPr>
+              <a:t>信頼</a:t>
+            </a:r>
+            <a:endParaRPr lang="en-US" sz="1000" dirty="0"/>
+          </a:p>
+        </p:txBody>
+      </p:sp>
+      <p:sp>
+        <p:nvSpPr>
+          <p:cNvPr id="39" name="lv_row8"/>
+          <p:cNvSpPr/>
+          <p:nvPr/>
+        </p:nvSpPr>
+        <p:spPr>
+          <a:xfrm>
+            <a:off x="457200" y="2834640"/>
+            <a:ext cx="5120640" cy="192024"/>
+          </a:xfrm>
+          <a:prstGeom prst="rect">
+            <a:avLst/>
+          </a:prstGeom>
+          <a:solidFill>
+            <a:srgbClr val="F8EBC8"/>
+          </a:solidFill>
+          <a:ln w="9525">
+            <a:solidFill>
+              <a:srgbClr val="FFFFFF"/>
+            </a:solidFill>
+            <a:prstDash val="solid"/>
+          </a:ln>
+        </p:spPr>
+        <p:txBody>
+          <a:bodyPr/>
+          <a:p/>
+        </p:txBody>
+      </p:sp>
+      <p:sp>
+        <p:nvSpPr>
+          <p:cNvPr id="40" name="lv_8_0"/>
+          <p:cNvSpPr txBox="1"/>
+          <p:nvPr/>
+        </p:nvSpPr>
+        <p:spPr>
+          <a:xfrm>
+            <a:off x="457200" y="2834640"/>
+            <a:ext cx="1051560" cy="192024"/>
+          </a:xfrm>
+          <a:prstGeom prst="rect">
+            <a:avLst/>
+          </a:prstGeom>
+          <a:noFill/>
+          <a:ln/>
+        </p:spPr>
+        <p:txBody>
+          <a:bodyPr wrap="square" lIns="0" tIns="0" rIns="0" bIns="0" rtlCol="0" anchor="ctr"/>
+          <a:lstStyle/>
+          <a:p>
+            <a:pPr algn="ctr" indent="0" marL="0">
+              <a:buNone/>
+            </a:pPr>
+            <a:r>
+              <a:rPr lang="en-US" sz="1000" dirty="0">
+                <a:solidFill>
+                  <a:schemeClr val="tx2"/>
+                </a:solidFill>
+              </a:rPr>
+              <a:t>200</a:t>
+            </a:r>
+            <a:endParaRPr lang="en-US" sz="1000" dirty="0"/>
+          </a:p>
+        </p:txBody>
+      </p:sp>
+      <p:sp>
+        <p:nvSpPr>
+          <p:cNvPr id="41" name="lv_8_1"/>
+          <p:cNvSpPr txBox="1"/>
+          <p:nvPr/>
+        </p:nvSpPr>
+        <p:spPr>
+          <a:xfrm>
+            <a:off x="1508760" y="2834640"/>
+            <a:ext cx="1554480" cy="192024"/>
+          </a:xfrm>
+          <a:prstGeom prst="rect">
+            <a:avLst/>
+          </a:prstGeom>
+          <a:noFill/>
+          <a:ln/>
+        </p:spPr>
+        <p:txBody>
+          <a:bodyPr wrap="square" lIns="0" tIns="0" rIns="0" bIns="0" rtlCol="0" anchor="ctr"/>
+          <a:lstStyle/>
+          <a:p>
+            <a:pPr algn="ctr" indent="0" marL="0">
+              <a:buNone/>
+            </a:pPr>
+            <a:r>
+              <a:rPr lang="en-US" sz="1000" b="1" dirty="0">
+                <a:solidFill>
+                  <a:schemeClr val="tx2"/>
+                </a:solidFill>
+              </a:rPr>
+              <a:t>勇気</a:t>
+            </a:r>
+            <a:endParaRPr lang="en-US" sz="1000" dirty="0"/>
+          </a:p>
+        </p:txBody>
+      </p:sp>
+      <p:sp>
+        <p:nvSpPr>
+          <p:cNvPr id="42" name="lv_8_2"/>
+          <p:cNvSpPr txBox="1"/>
+          <p:nvPr/>
+        </p:nvSpPr>
+        <p:spPr>
+          <a:xfrm>
+            <a:off x="3063240" y="2834640"/>
+            <a:ext cx="1371600" cy="192024"/>
+          </a:xfrm>
+          <a:prstGeom prst="rect">
+            <a:avLst/>
+          </a:prstGeom>
+          <a:noFill/>
+          <a:ln/>
+        </p:spPr>
+        <p:txBody>
+          <a:bodyPr wrap="square" lIns="0" tIns="0" rIns="0" bIns="0" rtlCol="0" anchor="ctr"/>
+          <a:lstStyle/>
+          <a:p>
+            <a:pPr algn="ctr" indent="0" marL="0">
+              <a:buNone/>
+            </a:pPr>
+            <a:r>
+              <a:rPr lang="en-US" sz="1000" dirty="0">
+                <a:solidFill>
+                  <a:schemeClr val="tx2"/>
+                </a:solidFill>
+              </a:rPr>
+              <a:t>肯定</a:t>
+            </a:r>
+            <a:endParaRPr lang="en-US" sz="1000" dirty="0"/>
+          </a:p>
+        </p:txBody>
+      </p:sp>
+      <p:sp>
+        <p:nvSpPr>
+          <p:cNvPr id="43" name="lv_row9"/>
+          <p:cNvSpPr/>
+          <p:nvPr/>
+        </p:nvSpPr>
+        <p:spPr>
+          <a:xfrm>
+            <a:off x="457200" y="3026664"/>
+            <a:ext cx="5120640" cy="192024"/>
+          </a:xfrm>
+          <a:prstGeom prst="rect">
+            <a:avLst/>
+          </a:prstGeom>
+          <a:solidFill>
+            <a:srgbClr val="EEF0F5"/>
+          </a:solidFill>
+          <a:ln w="9525">
+            <a:solidFill>
+              <a:srgbClr val="FFFFFF"/>
+            </a:solidFill>
+            <a:prstDash val="solid"/>
+          </a:ln>
+        </p:spPr>
+        <p:txBody>
+          <a:bodyPr/>
+          <a:p/>
+        </p:txBody>
+      </p:sp>
+      <p:sp>
+        <p:nvSpPr>
+          <p:cNvPr id="44" name="lv_9_0"/>
+          <p:cNvSpPr txBox="1"/>
+          <p:nvPr/>
+        </p:nvSpPr>
+        <p:spPr>
+          <a:xfrm>
+            <a:off x="457200" y="3026664"/>
+            <a:ext cx="1051560" cy="192024"/>
+          </a:xfrm>
+          <a:prstGeom prst="rect">
+            <a:avLst/>
+          </a:prstGeom>
+          <a:noFill/>
+          <a:ln/>
+        </p:spPr>
+        <p:txBody>
+          <a:bodyPr wrap="square" lIns="0" tIns="0" rIns="0" bIns="0" rtlCol="0" anchor="ctr"/>
+          <a:lstStyle/>
+          <a:p>
+            <a:pPr algn="ctr" indent="0" marL="0">
+              <a:buNone/>
+            </a:pPr>
+            <a:r>
+              <a:rPr lang="en-US" sz="1000" dirty="0">
+                <a:solidFill>
+                  <a:schemeClr val="tx2"/>
+                </a:solidFill>
+              </a:rPr>
+              <a:t>175</a:t>
+            </a:r>
+            <a:endParaRPr lang="en-US" sz="1000" dirty="0"/>
+          </a:p>
+        </p:txBody>
+      </p:sp>
+      <p:sp>
+        <p:nvSpPr>
+          <p:cNvPr id="45" name="lv_9_1"/>
+          <p:cNvSpPr txBox="1"/>
+          <p:nvPr/>
+        </p:nvSpPr>
+        <p:spPr>
+          <a:xfrm>
+            <a:off x="1508760" y="3026664"/>
+            <a:ext cx="1554480" cy="192024"/>
+          </a:xfrm>
+          <a:prstGeom prst="rect">
+            <a:avLst/>
+          </a:prstGeom>
+          <a:noFill/>
+          <a:ln/>
+        </p:spPr>
+        <p:txBody>
+          <a:bodyPr wrap="square" lIns="0" tIns="0" rIns="0" bIns="0" rtlCol="0" anchor="ctr"/>
+          <a:lstStyle/>
+          <a:p>
+            <a:pPr algn="ctr" indent="0" marL="0">
+              <a:buNone/>
+            </a:pPr>
+            <a:r>
+              <a:rPr lang="en-US" sz="1000" b="1" dirty="0">
+                <a:solidFill>
+                  <a:schemeClr val="tx2"/>
+                </a:solidFill>
+              </a:rPr>
+              <a:t>プライド</a:t>
+            </a:r>
+            <a:endParaRPr lang="en-US" sz="1000" dirty="0"/>
+          </a:p>
+        </p:txBody>
+      </p:sp>
+      <p:sp>
+        <p:nvSpPr>
+          <p:cNvPr id="46" name="lv_9_2"/>
+          <p:cNvSpPr txBox="1"/>
+          <p:nvPr/>
+        </p:nvSpPr>
+        <p:spPr>
+          <a:xfrm>
+            <a:off x="3063240" y="3026664"/>
+            <a:ext cx="1371600" cy="192024"/>
+          </a:xfrm>
+          <a:prstGeom prst="rect">
+            <a:avLst/>
+          </a:prstGeom>
+          <a:noFill/>
+          <a:ln/>
+        </p:spPr>
+        <p:txBody>
+          <a:bodyPr wrap="square" lIns="0" tIns="0" rIns="0" bIns="0" rtlCol="0" anchor="ctr"/>
+          <a:lstStyle/>
+          <a:p>
+            <a:pPr algn="ctr" indent="0" marL="0">
+              <a:buNone/>
+            </a:pPr>
+            <a:r>
+              <a:rPr lang="en-US" sz="1000" dirty="0">
+                <a:solidFill>
+                  <a:schemeClr val="tx2"/>
+                </a:solidFill>
+              </a:rPr>
+              <a:t>嘲笑</a:t>
+            </a:r>
+            <a:endParaRPr lang="en-US" sz="1000" dirty="0"/>
+          </a:p>
+        </p:txBody>
+      </p:sp>
+      <p:sp>
+        <p:nvSpPr>
+          <p:cNvPr id="47" name="lv_row10"/>
+          <p:cNvSpPr/>
+          <p:nvPr/>
+        </p:nvSpPr>
+        <p:spPr>
+          <a:xfrm>
+            <a:off x="457200" y="3218688"/>
+            <a:ext cx="5120640" cy="192024"/>
+          </a:xfrm>
+          <a:prstGeom prst="rect">
+            <a:avLst/>
+          </a:prstGeom>
+          <a:solidFill>
+            <a:srgbClr val="EEF0F5"/>
+          </a:solidFill>
+          <a:ln w="9525">
+            <a:solidFill>
+              <a:srgbClr val="FFFFFF"/>
+            </a:solidFill>
+            <a:prstDash val="solid"/>
+          </a:ln>
+        </p:spPr>
+        <p:txBody>
+          <a:bodyPr/>
+          <a:p/>
+        </p:txBody>
+      </p:sp>
+      <p:sp>
+        <p:nvSpPr>
+          <p:cNvPr id="48" name="lv_10_0"/>
+          <p:cNvSpPr txBox="1"/>
+          <p:nvPr/>
+        </p:nvSpPr>
+        <p:spPr>
+          <a:xfrm>
+            <a:off x="457200" y="3218688"/>
+            <a:ext cx="1051560" cy="192024"/>
+          </a:xfrm>
+          <a:prstGeom prst="rect">
+            <a:avLst/>
+          </a:prstGeom>
+          <a:noFill/>
+          <a:ln/>
+        </p:spPr>
+        <p:txBody>
+          <a:bodyPr wrap="square" lIns="0" tIns="0" rIns="0" bIns="0" rtlCol="0" anchor="ctr"/>
+          <a:lstStyle/>
+          <a:p>
+            <a:pPr algn="ctr" indent="0" marL="0">
+              <a:buNone/>
+            </a:pPr>
+            <a:r>
+              <a:rPr lang="en-US" sz="1000" dirty="0">
+                <a:solidFill>
+                  <a:schemeClr val="tx2"/>
+                </a:solidFill>
+              </a:rPr>
+              <a:t>150</a:t>
+            </a:r>
+            <a:endParaRPr lang="en-US" sz="1000" dirty="0"/>
+          </a:p>
+        </p:txBody>
+      </p:sp>
+      <p:sp>
+        <p:nvSpPr>
+          <p:cNvPr id="49" name="lv_10_1"/>
+          <p:cNvSpPr txBox="1"/>
+          <p:nvPr/>
+        </p:nvSpPr>
+        <p:spPr>
+          <a:xfrm>
+            <a:off x="1508760" y="3218688"/>
+            <a:ext cx="1554480" cy="192024"/>
+          </a:xfrm>
+          <a:prstGeom prst="rect">
+            <a:avLst/>
+          </a:prstGeom>
+          <a:noFill/>
+          <a:ln/>
+        </p:spPr>
+        <p:txBody>
+          <a:bodyPr wrap="square" lIns="0" tIns="0" rIns="0" bIns="0" rtlCol="0" anchor="ctr"/>
+          <a:lstStyle/>
+          <a:p>
+            <a:pPr algn="ctr" indent="0" marL="0">
+              <a:buNone/>
+            </a:pPr>
+            <a:r>
+              <a:rPr lang="en-US" sz="1000" b="1" dirty="0">
+                <a:solidFill>
+                  <a:schemeClr val="tx2"/>
+                </a:solidFill>
+              </a:rPr>
+              <a:t>怒り</a:t>
+            </a:r>
+            <a:endParaRPr lang="en-US" sz="1000" dirty="0"/>
+          </a:p>
+        </p:txBody>
+      </p:sp>
+      <p:sp>
+        <p:nvSpPr>
+          <p:cNvPr id="50" name="lv_10_2"/>
+          <p:cNvSpPr txBox="1"/>
+          <p:nvPr/>
+        </p:nvSpPr>
+        <p:spPr>
+          <a:xfrm>
+            <a:off x="3063240" y="3218688"/>
+            <a:ext cx="1371600" cy="192024"/>
+          </a:xfrm>
+          <a:prstGeom prst="rect">
+            <a:avLst/>
+          </a:prstGeom>
+          <a:noFill/>
+          <a:ln/>
+        </p:spPr>
+        <p:txBody>
+          <a:bodyPr wrap="square" lIns="0" tIns="0" rIns="0" bIns="0" rtlCol="0" anchor="ctr"/>
+          <a:lstStyle/>
+          <a:p>
+            <a:pPr algn="ctr" indent="0" marL="0">
+              <a:buNone/>
+            </a:pPr>
+            <a:r>
+              <a:rPr lang="en-US" sz="1000" dirty="0">
+                <a:solidFill>
+                  <a:schemeClr val="tx2"/>
+                </a:solidFill>
+              </a:rPr>
+              <a:t>憎しみ</a:t>
+            </a:r>
+            <a:endParaRPr lang="en-US" sz="1000" dirty="0"/>
+          </a:p>
+        </p:txBody>
+      </p:sp>
+      <p:sp>
+        <p:nvSpPr>
+          <p:cNvPr id="51" name="lv_row11"/>
+          <p:cNvSpPr/>
+          <p:nvPr/>
+        </p:nvSpPr>
+        <p:spPr>
+          <a:xfrm>
+            <a:off x="457200" y="3410712"/>
+            <a:ext cx="5120640" cy="192024"/>
+          </a:xfrm>
+          <a:prstGeom prst="rect">
+            <a:avLst/>
+          </a:prstGeom>
+          <a:solidFill>
+            <a:srgbClr val="EEF0F5"/>
+          </a:solidFill>
+          <a:ln w="9525">
+            <a:solidFill>
+              <a:srgbClr val="FFFFFF"/>
+            </a:solidFill>
+            <a:prstDash val="solid"/>
+          </a:ln>
+        </p:spPr>
+        <p:txBody>
+          <a:bodyPr/>
+          <a:p/>
+        </p:txBody>
+      </p:sp>
+      <p:sp>
+        <p:nvSpPr>
+          <p:cNvPr id="52" name="lv_11_0"/>
+          <p:cNvSpPr txBox="1"/>
+          <p:nvPr/>
+        </p:nvSpPr>
+        <p:spPr>
+          <a:xfrm>
+            <a:off x="457200" y="3410712"/>
+            <a:ext cx="1051560" cy="192024"/>
+          </a:xfrm>
+          <a:prstGeom prst="rect">
+            <a:avLst/>
+          </a:prstGeom>
+          <a:noFill/>
+          <a:ln/>
+        </p:spPr>
+        <p:txBody>
+          <a:bodyPr wrap="square" lIns="0" tIns="0" rIns="0" bIns="0" rtlCol="0" anchor="ctr"/>
+          <a:lstStyle/>
+          <a:p>
+            <a:pPr algn="ctr" indent="0" marL="0">
+              <a:buNone/>
+            </a:pPr>
+            <a:r>
+              <a:rPr lang="en-US" sz="1000" dirty="0">
+                <a:solidFill>
+                  <a:schemeClr val="tx2"/>
+                </a:solidFill>
+              </a:rPr>
+              <a:t>125</a:t>
+            </a:r>
+            <a:endParaRPr lang="en-US" sz="1000" dirty="0"/>
+          </a:p>
+        </p:txBody>
+      </p:sp>
+      <p:sp>
+        <p:nvSpPr>
+          <p:cNvPr id="53" name="lv_11_1"/>
+          <p:cNvSpPr txBox="1"/>
+          <p:nvPr/>
+        </p:nvSpPr>
+        <p:spPr>
+          <a:xfrm>
+            <a:off x="1508760" y="3410712"/>
+            <a:ext cx="1554480" cy="192024"/>
+          </a:xfrm>
+          <a:prstGeom prst="rect">
+            <a:avLst/>
+          </a:prstGeom>
+          <a:noFill/>
+          <a:ln/>
+        </p:spPr>
+        <p:txBody>
+          <a:bodyPr wrap="square" lIns="0" tIns="0" rIns="0" bIns="0" rtlCol="0" anchor="ctr"/>
+          <a:lstStyle/>
+          <a:p>
+            <a:pPr algn="ctr" indent="0" marL="0">
+              <a:buNone/>
+            </a:pPr>
+            <a:r>
+              <a:rPr lang="en-US" sz="1000" b="1" dirty="0">
+                <a:solidFill>
+                  <a:schemeClr val="tx2"/>
+                </a:solidFill>
+              </a:rPr>
+              <a:t>欲望</a:t>
+            </a:r>
+            <a:endParaRPr lang="en-US" sz="1000" dirty="0"/>
+          </a:p>
+        </p:txBody>
+      </p:sp>
+      <p:sp>
+        <p:nvSpPr>
+          <p:cNvPr id="54" name="lv_11_2"/>
+          <p:cNvSpPr txBox="1"/>
+          <p:nvPr/>
+        </p:nvSpPr>
+        <p:spPr>
+          <a:xfrm>
+            <a:off x="3063240" y="3410712"/>
+            <a:ext cx="1371600" cy="192024"/>
+          </a:xfrm>
+          <a:prstGeom prst="rect">
+            <a:avLst/>
+          </a:prstGeom>
+          <a:noFill/>
+          <a:ln/>
+        </p:spPr>
+        <p:txBody>
+          <a:bodyPr wrap="square" lIns="0" tIns="0" rIns="0" bIns="0" rtlCol="0" anchor="ctr"/>
+          <a:lstStyle/>
+          <a:p>
+            <a:pPr algn="ctr" indent="0" marL="0">
+              <a:buNone/>
+            </a:pPr>
+            <a:r>
+              <a:rPr lang="en-US" sz="1000" dirty="0">
+                <a:solidFill>
+                  <a:schemeClr val="tx2"/>
+                </a:solidFill>
+              </a:rPr>
+              <a:t>切望</a:t>
+            </a:r>
+            <a:endParaRPr lang="en-US" sz="1000" dirty="0"/>
+          </a:p>
+        </p:txBody>
+      </p:sp>
+      <p:sp>
+        <p:nvSpPr>
+          <p:cNvPr id="55" name="lv_row12"/>
+          <p:cNvSpPr/>
+          <p:nvPr/>
+        </p:nvSpPr>
+        <p:spPr>
+          <a:xfrm>
+            <a:off x="457200" y="3602736"/>
+            <a:ext cx="5120640" cy="192024"/>
+          </a:xfrm>
+          <a:prstGeom prst="rect">
+            <a:avLst/>
+          </a:prstGeom>
+          <a:solidFill>
+            <a:srgbClr val="EEF0F5"/>
+          </a:solidFill>
+          <a:ln w="9525">
+            <a:solidFill>
+              <a:srgbClr val="FFFFFF"/>
+            </a:solidFill>
+            <a:prstDash val="solid"/>
+          </a:ln>
+        </p:spPr>
+        <p:txBody>
+          <a:bodyPr/>
+          <a:p/>
+        </p:txBody>
+      </p:sp>
+      <p:sp>
+        <p:nvSpPr>
+          <p:cNvPr id="56" name="lv_12_0"/>
+          <p:cNvSpPr txBox="1"/>
+          <p:nvPr/>
+        </p:nvSpPr>
+        <p:spPr>
+          <a:xfrm>
+            <a:off x="457200" y="3602736"/>
+            <a:ext cx="1051560" cy="192024"/>
+          </a:xfrm>
+          <a:prstGeom prst="rect">
+            <a:avLst/>
+          </a:prstGeom>
+          <a:noFill/>
+          <a:ln/>
+        </p:spPr>
+        <p:txBody>
+          <a:bodyPr wrap="square" lIns="0" tIns="0" rIns="0" bIns="0" rtlCol="0" anchor="ctr"/>
+          <a:lstStyle/>
+          <a:p>
+            <a:pPr algn="ctr" indent="0" marL="0">
+              <a:buNone/>
+            </a:pPr>
+            <a:r>
+              <a:rPr lang="en-US" sz="1000" dirty="0">
+                <a:solidFill>
+                  <a:schemeClr val="tx2"/>
+                </a:solidFill>
+              </a:rPr>
+              <a:t>100</a:t>
+            </a:r>
+            <a:endParaRPr lang="en-US" sz="1000" dirty="0"/>
+          </a:p>
+        </p:txBody>
+      </p:sp>
+      <p:sp>
+        <p:nvSpPr>
+          <p:cNvPr id="57" name="lv_12_1"/>
+          <p:cNvSpPr txBox="1"/>
+          <p:nvPr/>
+        </p:nvSpPr>
+        <p:spPr>
+          <a:xfrm>
+            <a:off x="1508760" y="3602736"/>
+            <a:ext cx="1554480" cy="192024"/>
+          </a:xfrm>
+          <a:prstGeom prst="rect">
+            <a:avLst/>
+          </a:prstGeom>
+          <a:noFill/>
+          <a:ln/>
+        </p:spPr>
+        <p:txBody>
+          <a:bodyPr wrap="square" lIns="0" tIns="0" rIns="0" bIns="0" rtlCol="0" anchor="ctr"/>
+          <a:lstStyle/>
+          <a:p>
+            <a:pPr algn="ctr" indent="0" marL="0">
+              <a:buNone/>
+            </a:pPr>
+            <a:r>
+              <a:rPr lang="en-US" sz="1000" b="1" dirty="0">
+                <a:solidFill>
+                  <a:schemeClr val="tx2"/>
+                </a:solidFill>
+              </a:rPr>
+              <a:t>恐怖</a:t>
+            </a:r>
+            <a:endParaRPr lang="en-US" sz="1000" dirty="0"/>
+          </a:p>
+        </p:txBody>
+      </p:sp>
+      <p:sp>
+        <p:nvSpPr>
+          <p:cNvPr id="58" name="lv_12_2"/>
+          <p:cNvSpPr txBox="1"/>
+          <p:nvPr/>
+        </p:nvSpPr>
+        <p:spPr>
+          <a:xfrm>
+            <a:off x="3063240" y="3602736"/>
+            <a:ext cx="1371600" cy="192024"/>
+          </a:xfrm>
+          <a:prstGeom prst="rect">
+            <a:avLst/>
+          </a:prstGeom>
+          <a:noFill/>
+          <a:ln/>
+        </p:spPr>
+        <p:txBody>
+          <a:bodyPr wrap="square" lIns="0" tIns="0" rIns="0" bIns="0" rtlCol="0" anchor="ctr"/>
+          <a:lstStyle/>
+          <a:p>
+            <a:pPr algn="ctr" indent="0" marL="0">
+              <a:buNone/>
+            </a:pPr>
+            <a:r>
+              <a:rPr lang="en-US" sz="1000" dirty="0">
+                <a:solidFill>
+                  <a:schemeClr val="tx2"/>
+                </a:solidFill>
+              </a:rPr>
+              <a:t>不安</a:t>
+            </a:r>
+            <a:endParaRPr lang="en-US" sz="1000" dirty="0"/>
+          </a:p>
+        </p:txBody>
+      </p:sp>
+      <p:sp>
+        <p:nvSpPr>
+          <p:cNvPr id="59" name="lv_row13"/>
+          <p:cNvSpPr/>
+          <p:nvPr/>
+        </p:nvSpPr>
+        <p:spPr>
+          <a:xfrm>
+            <a:off x="457200" y="3794760"/>
+            <a:ext cx="5120640" cy="192024"/>
+          </a:xfrm>
+          <a:prstGeom prst="rect">
+            <a:avLst/>
+          </a:prstGeom>
+          <a:solidFill>
+            <a:srgbClr val="EEF0F5"/>
+          </a:solidFill>
+          <a:ln w="9525">
+            <a:solidFill>
+              <a:srgbClr val="FFFFFF"/>
+            </a:solidFill>
+            <a:prstDash val="solid"/>
+          </a:ln>
+        </p:spPr>
+        <p:txBody>
+          <a:bodyPr/>
+          <a:p/>
+        </p:txBody>
+      </p:sp>
+      <p:sp>
+        <p:nvSpPr>
+          <p:cNvPr id="60" name="lv_13_0"/>
+          <p:cNvSpPr txBox="1"/>
+          <p:nvPr/>
+        </p:nvSpPr>
+        <p:spPr>
+          <a:xfrm>
+            <a:off x="457200" y="3794760"/>
+            <a:ext cx="1051560" cy="192024"/>
+          </a:xfrm>
+          <a:prstGeom prst="rect">
+            <a:avLst/>
+          </a:prstGeom>
+          <a:noFill/>
+          <a:ln/>
+        </p:spPr>
+        <p:txBody>
+          <a:bodyPr wrap="square" lIns="0" tIns="0" rIns="0" bIns="0" rtlCol="0" anchor="ctr"/>
+          <a:lstStyle/>
+          <a:p>
+            <a:pPr algn="ctr" indent="0" marL="0">
+              <a:buNone/>
+            </a:pPr>
+            <a:r>
+              <a:rPr lang="en-US" sz="1000" dirty="0">
+                <a:solidFill>
+                  <a:schemeClr val="tx2"/>
+                </a:solidFill>
+              </a:rPr>
+              <a:t>75</a:t>
+            </a:r>
+            <a:endParaRPr lang="en-US" sz="1000" dirty="0"/>
+          </a:p>
+        </p:txBody>
+      </p:sp>
+      <p:sp>
+        <p:nvSpPr>
+          <p:cNvPr id="61" name="lv_13_1"/>
+          <p:cNvSpPr txBox="1"/>
+          <p:nvPr/>
+        </p:nvSpPr>
+        <p:spPr>
+          <a:xfrm>
+            <a:off x="1508760" y="3794760"/>
+            <a:ext cx="1554480" cy="192024"/>
+          </a:xfrm>
+          <a:prstGeom prst="rect">
+            <a:avLst/>
+          </a:prstGeom>
+          <a:noFill/>
+          <a:ln/>
+        </p:spPr>
+        <p:txBody>
+          <a:bodyPr wrap="square" lIns="0" tIns="0" rIns="0" bIns="0" rtlCol="0" anchor="ctr"/>
+          <a:lstStyle/>
+          <a:p>
+            <a:pPr algn="ctr" indent="0" marL="0">
+              <a:buNone/>
+            </a:pPr>
+            <a:r>
+              <a:rPr lang="en-US" sz="1000" b="1" dirty="0">
+                <a:solidFill>
+                  <a:schemeClr val="tx2"/>
+                </a:solidFill>
+              </a:rPr>
+              <a:t>深い悲しみ</a:t>
+            </a:r>
+            <a:endParaRPr lang="en-US" sz="1000" dirty="0"/>
+          </a:p>
+        </p:txBody>
+      </p:sp>
+      <p:sp>
+        <p:nvSpPr>
+          <p:cNvPr id="62" name="lv_13_2"/>
+          <p:cNvSpPr txBox="1"/>
+          <p:nvPr/>
+        </p:nvSpPr>
+        <p:spPr>
+          <a:xfrm>
+            <a:off x="3063240" y="3794760"/>
+            <a:ext cx="1371600" cy="192024"/>
+          </a:xfrm>
+          <a:prstGeom prst="rect">
+            <a:avLst/>
+          </a:prstGeom>
+          <a:noFill/>
+          <a:ln/>
+        </p:spPr>
+        <p:txBody>
+          <a:bodyPr wrap="square" lIns="0" tIns="0" rIns="0" bIns="0" rtlCol="0" anchor="ctr"/>
+          <a:lstStyle/>
+          <a:p>
+            <a:pPr algn="ctr" indent="0" marL="0">
+              <a:buNone/>
+            </a:pPr>
+            <a:r>
+              <a:rPr lang="en-US" sz="1000" dirty="0">
+                <a:solidFill>
+                  <a:schemeClr val="tx2"/>
+                </a:solidFill>
+              </a:rPr>
+              <a:t>後悔</a:t>
+            </a:r>
+            <a:endParaRPr lang="en-US" sz="1000" dirty="0"/>
+          </a:p>
+        </p:txBody>
+      </p:sp>
+      <p:sp>
+        <p:nvSpPr>
+          <p:cNvPr id="63" name="lv_row14"/>
+          <p:cNvSpPr/>
+          <p:nvPr/>
+        </p:nvSpPr>
+        <p:spPr>
+          <a:xfrm>
+            <a:off x="457200" y="3986784"/>
+            <a:ext cx="5120640" cy="192024"/>
+          </a:xfrm>
+          <a:prstGeom prst="rect">
+            <a:avLst/>
+          </a:prstGeom>
+          <a:solidFill>
+            <a:srgbClr val="EEF0F5"/>
+          </a:solidFill>
+          <a:ln w="9525">
+            <a:solidFill>
+              <a:srgbClr val="FFFFFF"/>
+            </a:solidFill>
+            <a:prstDash val="solid"/>
+          </a:ln>
+        </p:spPr>
+        <p:txBody>
+          <a:bodyPr/>
+          <a:p/>
+        </p:txBody>
+      </p:sp>
+      <p:sp>
+        <p:nvSpPr>
+          <p:cNvPr id="64" name="lv_14_0"/>
+          <p:cNvSpPr txBox="1"/>
+          <p:nvPr/>
+        </p:nvSpPr>
+        <p:spPr>
+          <a:xfrm>
+            <a:off x="457200" y="3986784"/>
+            <a:ext cx="1051560" cy="192024"/>
+          </a:xfrm>
+          <a:prstGeom prst="rect">
+            <a:avLst/>
+          </a:prstGeom>
+          <a:noFill/>
+          <a:ln/>
+        </p:spPr>
+        <p:txBody>
+          <a:bodyPr wrap="square" lIns="0" tIns="0" rIns="0" bIns="0" rtlCol="0" anchor="ctr"/>
+          <a:lstStyle/>
+          <a:p>
+            <a:pPr algn="ctr" indent="0" marL="0">
+              <a:buNone/>
+            </a:pPr>
+            <a:r>
+              <a:rPr lang="en-US" sz="1000" dirty="0">
+                <a:solidFill>
+                  <a:schemeClr val="tx2"/>
+                </a:solidFill>
+              </a:rPr>
+              <a:t>50</a:t>
+            </a:r>
+            <a:endParaRPr lang="en-US" sz="1000" dirty="0"/>
+          </a:p>
+        </p:txBody>
+      </p:sp>
+      <p:sp>
+        <p:nvSpPr>
+          <p:cNvPr id="65" name="lv_14_1"/>
+          <p:cNvSpPr txBox="1"/>
+          <p:nvPr/>
+        </p:nvSpPr>
+        <p:spPr>
+          <a:xfrm>
+            <a:off x="1508760" y="3986784"/>
+            <a:ext cx="1554480" cy="192024"/>
+          </a:xfrm>
+          <a:prstGeom prst="rect">
+            <a:avLst/>
+          </a:prstGeom>
+          <a:noFill/>
+          <a:ln/>
+        </p:spPr>
+        <p:txBody>
+          <a:bodyPr wrap="square" lIns="0" tIns="0" rIns="0" bIns="0" rtlCol="0" anchor="ctr"/>
+          <a:lstStyle/>
+          <a:p>
+            <a:pPr algn="ctr" indent="0" marL="0">
+              <a:buNone/>
+            </a:pPr>
+            <a:r>
+              <a:rPr lang="en-US" sz="1000" b="1" dirty="0">
+                <a:solidFill>
+                  <a:schemeClr val="tx2"/>
+                </a:solidFill>
+              </a:rPr>
+              <a:t>無気力</a:t>
+            </a:r>
+            <a:endParaRPr lang="en-US" sz="1000" dirty="0"/>
+          </a:p>
+        </p:txBody>
+      </p:sp>
+      <p:sp>
+        <p:nvSpPr>
+          <p:cNvPr id="66" name="lv_14_2"/>
+          <p:cNvSpPr txBox="1"/>
+          <p:nvPr/>
+        </p:nvSpPr>
+        <p:spPr>
+          <a:xfrm>
+            <a:off x="3063240" y="3986784"/>
+            <a:ext cx="1371600" cy="192024"/>
+          </a:xfrm>
+          <a:prstGeom prst="rect">
+            <a:avLst/>
+          </a:prstGeom>
+          <a:noFill/>
+          <a:ln/>
+        </p:spPr>
+        <p:txBody>
+          <a:bodyPr wrap="square" lIns="0" tIns="0" rIns="0" bIns="0" rtlCol="0" anchor="ctr"/>
+          <a:lstStyle/>
+          <a:p>
+            <a:pPr algn="ctr" indent="0" marL="0">
+              <a:buNone/>
+            </a:pPr>
+            <a:r>
+              <a:rPr lang="en-US" sz="1000" dirty="0">
+                <a:solidFill>
+                  <a:schemeClr val="tx2"/>
+                </a:solidFill>
+              </a:rPr>
+              <a:t>絶望</a:t>
+            </a:r>
+            <a:endParaRPr lang="en-US" sz="1000" dirty="0"/>
+          </a:p>
+        </p:txBody>
+      </p:sp>
+      <p:sp>
+        <p:nvSpPr>
+          <p:cNvPr id="67" name="lv_row15"/>
+          <p:cNvSpPr/>
+          <p:nvPr/>
+        </p:nvSpPr>
+        <p:spPr>
+          <a:xfrm>
+            <a:off x="457200" y="4178808"/>
+            <a:ext cx="5120640" cy="192024"/>
+          </a:xfrm>
+          <a:prstGeom prst="rect">
+            <a:avLst/>
+          </a:prstGeom>
+          <a:solidFill>
+            <a:srgbClr val="EEF0F5"/>
+          </a:solidFill>
+          <a:ln w="9525">
+            <a:solidFill>
+              <a:srgbClr val="FFFFFF"/>
+            </a:solidFill>
+            <a:prstDash val="solid"/>
+          </a:ln>
+        </p:spPr>
+        <p:txBody>
+          <a:bodyPr/>
+          <a:p/>
+        </p:txBody>
+      </p:sp>
+      <p:sp>
+        <p:nvSpPr>
+          <p:cNvPr id="68" name="lv_15_0"/>
+          <p:cNvSpPr txBox="1"/>
+          <p:nvPr/>
+        </p:nvSpPr>
+        <p:spPr>
+          <a:xfrm>
+            <a:off x="457200" y="4178808"/>
+            <a:ext cx="1051560" cy="192024"/>
+          </a:xfrm>
+          <a:prstGeom prst="rect">
+            <a:avLst/>
+          </a:prstGeom>
+          <a:noFill/>
+          <a:ln/>
+        </p:spPr>
+        <p:txBody>
+          <a:bodyPr wrap="square" lIns="0" tIns="0" rIns="0" bIns="0" rtlCol="0" anchor="ctr"/>
+          <a:lstStyle/>
+          <a:p>
+            <a:pPr algn="ctr" indent="0" marL="0">
+              <a:buNone/>
+            </a:pPr>
+            <a:r>
+              <a:rPr lang="en-US" sz="1000" dirty="0">
+                <a:solidFill>
+                  <a:schemeClr val="tx2"/>
+                </a:solidFill>
+              </a:rPr>
+              <a:t>30</a:t>
+            </a:r>
+            <a:endParaRPr lang="en-US" sz="1000" dirty="0"/>
+          </a:p>
+        </p:txBody>
+      </p:sp>
+      <p:sp>
+        <p:nvSpPr>
+          <p:cNvPr id="69" name="lv_15_1"/>
+          <p:cNvSpPr txBox="1"/>
+          <p:nvPr/>
+        </p:nvSpPr>
+        <p:spPr>
+          <a:xfrm>
+            <a:off x="1508760" y="4178808"/>
+            <a:ext cx="1554480" cy="192024"/>
+          </a:xfrm>
+          <a:prstGeom prst="rect">
+            <a:avLst/>
+          </a:prstGeom>
+          <a:noFill/>
+          <a:ln/>
+        </p:spPr>
+        <p:txBody>
+          <a:bodyPr wrap="square" lIns="0" tIns="0" rIns="0" bIns="0" rtlCol="0" anchor="ctr"/>
+          <a:lstStyle/>
+          <a:p>
+            <a:pPr algn="ctr" indent="0" marL="0">
+              <a:buNone/>
+            </a:pPr>
+            <a:r>
+              <a:rPr lang="en-US" sz="1000" b="1" dirty="0">
+                <a:solidFill>
+                  <a:schemeClr val="tx2"/>
+                </a:solidFill>
+              </a:rPr>
+              <a:t>罪悪感</a:t>
+            </a:r>
+            <a:endParaRPr lang="en-US" sz="1000" dirty="0"/>
+          </a:p>
+        </p:txBody>
+      </p:sp>
+      <p:sp>
+        <p:nvSpPr>
+          <p:cNvPr id="70" name="lv_15_2"/>
+          <p:cNvSpPr txBox="1"/>
+          <p:nvPr/>
+        </p:nvSpPr>
+        <p:spPr>
+          <a:xfrm>
+            <a:off x="3063240" y="4178808"/>
+            <a:ext cx="1371600" cy="192024"/>
+          </a:xfrm>
+          <a:prstGeom prst="rect">
+            <a:avLst/>
+          </a:prstGeom>
+          <a:noFill/>
+          <a:ln/>
+        </p:spPr>
+        <p:txBody>
+          <a:bodyPr wrap="square" lIns="0" tIns="0" rIns="0" bIns="0" rtlCol="0" anchor="ctr"/>
+          <a:lstStyle/>
+          <a:p>
+            <a:pPr algn="ctr" indent="0" marL="0">
+              <a:buNone/>
+            </a:pPr>
+            <a:r>
+              <a:rPr lang="en-US" sz="1000" dirty="0">
+                <a:solidFill>
+                  <a:schemeClr val="tx2"/>
+                </a:solidFill>
+              </a:rPr>
+              <a:t>非難</a:t>
+            </a:r>
+            <a:endParaRPr lang="en-US" sz="1000" dirty="0"/>
+          </a:p>
+        </p:txBody>
+      </p:sp>
+      <p:sp>
+        <p:nvSpPr>
+          <p:cNvPr id="71" name="lv_row16"/>
+          <p:cNvSpPr/>
+          <p:nvPr/>
+        </p:nvSpPr>
+        <p:spPr>
+          <a:xfrm>
+            <a:off x="457200" y="4370832"/>
+            <a:ext cx="5120640" cy="192024"/>
+          </a:xfrm>
+          <a:prstGeom prst="rect">
+            <a:avLst/>
+          </a:prstGeom>
+          <a:solidFill>
+            <a:srgbClr val="EEF0F5"/>
+          </a:solidFill>
+          <a:ln w="9525">
+            <a:solidFill>
+              <a:srgbClr val="FFFFFF"/>
+            </a:solidFill>
+            <a:prstDash val="solid"/>
+          </a:ln>
+        </p:spPr>
+        <p:txBody>
+          <a:bodyPr/>
+          <a:p/>
+        </p:txBody>
+      </p:sp>
+      <p:sp>
+        <p:nvSpPr>
+          <p:cNvPr id="72" name="lv_16_0"/>
+          <p:cNvSpPr txBox="1"/>
+          <p:nvPr/>
+        </p:nvSpPr>
+        <p:spPr>
+          <a:xfrm>
+            <a:off x="457200" y="4370832"/>
+            <a:ext cx="1051560" cy="192024"/>
+          </a:xfrm>
+          <a:prstGeom prst="rect">
+            <a:avLst/>
+          </a:prstGeom>
+          <a:noFill/>
+          <a:ln/>
+        </p:spPr>
+        <p:txBody>
+          <a:bodyPr wrap="square" lIns="0" tIns="0" rIns="0" bIns="0" rtlCol="0" anchor="ctr"/>
+          <a:lstStyle/>
+          <a:p>
+            <a:pPr algn="ctr" indent="0" marL="0">
+              <a:buNone/>
+            </a:pPr>
+            <a:r>
+              <a:rPr lang="en-US" sz="1000" dirty="0">
+                <a:solidFill>
+                  <a:schemeClr val="tx2"/>
+                </a:solidFill>
+              </a:rPr>
+              <a:t>20</a:t>
+            </a:r>
+            <a:endParaRPr lang="en-US" sz="1000" dirty="0"/>
+          </a:p>
+        </p:txBody>
+      </p:sp>
+      <p:sp>
+        <p:nvSpPr>
+          <p:cNvPr id="73" name="lv_16_1"/>
+          <p:cNvSpPr txBox="1"/>
+          <p:nvPr/>
+        </p:nvSpPr>
+        <p:spPr>
+          <a:xfrm>
+            <a:off x="1508760" y="4370832"/>
+            <a:ext cx="1554480" cy="192024"/>
+          </a:xfrm>
+          <a:prstGeom prst="rect">
+            <a:avLst/>
+          </a:prstGeom>
+          <a:noFill/>
+          <a:ln/>
+        </p:spPr>
+        <p:txBody>
+          <a:bodyPr wrap="square" lIns="0" tIns="0" rIns="0" bIns="0" rtlCol="0" anchor="ctr"/>
+          <a:lstStyle/>
+          <a:p>
+            <a:pPr algn="ctr" indent="0" marL="0">
+              <a:buNone/>
+            </a:pPr>
+            <a:r>
+              <a:rPr lang="en-US" sz="1000" b="1" dirty="0">
+                <a:solidFill>
+                  <a:schemeClr val="tx2"/>
+                </a:solidFill>
+              </a:rPr>
+              <a:t>恥</a:t>
+            </a:r>
+            <a:endParaRPr lang="en-US" sz="1000" dirty="0"/>
+          </a:p>
+        </p:txBody>
+      </p:sp>
+      <p:sp>
+        <p:nvSpPr>
+          <p:cNvPr id="74" name="lv_16_2"/>
+          <p:cNvSpPr txBox="1"/>
+          <p:nvPr/>
+        </p:nvSpPr>
+        <p:spPr>
+          <a:xfrm>
+            <a:off x="3063240" y="4370832"/>
+            <a:ext cx="1371600" cy="192024"/>
+          </a:xfrm>
+          <a:prstGeom prst="rect">
+            <a:avLst/>
+          </a:prstGeom>
+          <a:noFill/>
+          <a:ln/>
+        </p:spPr>
+        <p:txBody>
+          <a:bodyPr wrap="square" lIns="0" tIns="0" rIns="0" bIns="0" rtlCol="0" anchor="ctr"/>
+          <a:lstStyle/>
+          <a:p>
+            <a:pPr algn="ctr" indent="0" marL="0">
+              <a:buNone/>
+            </a:pPr>
+            <a:r>
+              <a:rPr lang="en-US" sz="1000" dirty="0">
+                <a:solidFill>
+                  <a:schemeClr val="tx2"/>
+                </a:solidFill>
+              </a:rPr>
+              <a:t>屈辱</a:t>
+            </a:r>
+            <a:endParaRPr lang="en-US" sz="1000" dirty="0"/>
+          </a:p>
+        </p:txBody>
+      </p:sp>
+      <p:sp>
+        <p:nvSpPr>
+          <p:cNvPr id="75" name="lv_border"/>
+          <p:cNvSpPr/>
+          <p:nvPr/>
+        </p:nvSpPr>
+        <p:spPr>
+          <a:xfrm>
+            <a:off x="457200" y="3026664"/>
+            <a:ext cx="5120640" cy="0"/>
+          </a:xfrm>
+          <a:prstGeom prst="line">
+            <a:avLst/>
+          </a:prstGeom>
+          <a:noFill/>
+          <a:ln w="25400">
+            <a:solidFill>
+              <a:srgbClr val="8C6A34"/>
+            </a:solidFill>
+            <a:prstDash val="dash"/>
+          </a:ln>
+        </p:spPr>
+        <p:txBody>
+          <a:bodyPr/>
+          <a:p/>
+        </p:txBody>
+      </p:sp>
+      <p:sp>
+        <p:nvSpPr>
+          <p:cNvPr id="76" name="lv_power"/>
+          <p:cNvSpPr txBox="1"/>
+          <p:nvPr/>
+        </p:nvSpPr>
+        <p:spPr>
+          <a:xfrm>
+            <a:off x="3840480" y="2825496"/>
+            <a:ext cx="1691640" cy="182880"/>
+          </a:xfrm>
+          <a:prstGeom prst="rect">
+            <a:avLst/>
+          </a:prstGeom>
+          <a:noFill/>
+          <a:ln/>
+        </p:spPr>
+        <p:txBody>
+          <a:bodyPr wrap="square" lIns="0" tIns="0" rIns="0" bIns="0" rtlCol="0" anchor="ctr"/>
+          <a:lstStyle/>
+          <a:p>
+            <a:pPr algn="r" indent="0" marL="0">
+              <a:buNone/>
+            </a:pPr>
+            <a:r>
+              <a:rPr lang="en-US" sz="800" b="1" dirty="0">
+                <a:solidFill>
+                  <a:schemeClr val="accent2"/>
+                </a:solidFill>
+              </a:rPr>
+              <a:t>▲ パワー（生かす力）</a:t>
+            </a:r>
+            <a:endParaRPr lang="en-US" sz="800" dirty="0"/>
+          </a:p>
+        </p:txBody>
+      </p:sp>
+      <p:sp>
+        <p:nvSpPr>
+          <p:cNvPr id="77" name="lv_force"/>
+          <p:cNvSpPr txBox="1"/>
+          <p:nvPr/>
+        </p:nvSpPr>
+        <p:spPr>
+          <a:xfrm>
+            <a:off x="3840480" y="3035808"/>
+            <a:ext cx="1691640" cy="182880"/>
+          </a:xfrm>
+          <a:prstGeom prst="rect">
+            <a:avLst/>
+          </a:prstGeom>
+          <a:noFill/>
+          <a:ln/>
+        </p:spPr>
+        <p:txBody>
+          <a:bodyPr wrap="square" lIns="0" tIns="0" rIns="0" bIns="0" rtlCol="0" anchor="ctr"/>
+          <a:lstStyle/>
+          <a:p>
+            <a:pPr algn="r" indent="0" marL="0">
+              <a:buNone/>
+            </a:pPr>
+            <a:r>
+              <a:rPr lang="en-US" sz="800" b="1" dirty="0">
+                <a:solidFill>
+                  <a:schemeClr val="accent2"/>
+                </a:solidFill>
+              </a:rPr>
+              <a:t>▼ フォース（押す力）</a:t>
+            </a:r>
+            <a:endParaRPr lang="en-US" sz="800" dirty="0"/>
+          </a:p>
+        </p:txBody>
+      </p:sp>
+      <p:sp>
+        <p:nvSpPr>
+          <p:cNvPr id="78" name="money_card"/>
+          <p:cNvSpPr/>
+          <p:nvPr/>
+        </p:nvSpPr>
+        <p:spPr>
+          <a:xfrm>
+            <a:off x="5806440" y="1097280"/>
+            <a:ext cx="2880360" cy="3456432"/>
           </a:xfrm>
           <a:prstGeom prst="roundRect">
             <a:avLst>
-              <a:gd name="adj" fmla="val 3839"/>
+              <a:gd name="adj" fmla="val 3810"/>
             </a:avLst>
           </a:prstGeom>
           <a:solidFill>
@@ -12118,13 +14630,13 @@
       </p:sp>
       <p:sp>
         <p:nvSpPr>
-          <p:cNvPr id="6" name="money_head"/>
+          <p:cNvPr id="79" name="money_head"/>
           <p:cNvSpPr txBox="1"/>
           <p:nvPr/>
         </p:nvSpPr>
         <p:spPr>
           <a:xfrm>
-            <a:off x="5989320" y="1371600"/>
+            <a:off x="5989320" y="1207008"/>
             <a:ext cx="2560320" cy="365760"/>
           </a:xfrm>
           <a:prstGeom prst="rect">
@@ -12154,14 +14666,14 @@
       </p:sp>
       <p:sp>
         <p:nvSpPr>
-          <p:cNvPr id="7" name="money_body"/>
+          <p:cNvPr id="80" name="money_body"/>
           <p:cNvSpPr txBox="1"/>
           <p:nvPr/>
         </p:nvSpPr>
         <p:spPr>
           <a:xfrm>
-            <a:off x="5989320" y="1783080"/>
-            <a:ext cx="2560320" cy="2217877"/>
+            <a:off x="5989320" y="1600200"/>
+            <a:ext cx="2560320" cy="2514600"/>
           </a:xfrm>
           <a:prstGeom prst="rect">
             <a:avLst/>
@@ -12180,14 +14692,14 @@
               <a:buNone/>
             </a:pPr>
             <a:r>
-              <a:rPr lang="en-US" sz="1400" dirty="0">
+              <a:rPr lang="en-US" sz="1300" dirty="0">
                 <a:solidFill>
                   <a:schemeClr val="tx1"/>
                 </a:solidFill>
               </a:rPr>
-              <a:t>胸の奥にしまってきた怒りや悲しみが出てきても大丈夫。</a:t>
-            </a:r>
-            <a:endParaRPr lang="en-US" sz="1400" dirty="0"/>
+              <a:t>胸の奥にしまってきた感情にも、エネルギーの高さがあります。</a:t>
+            </a:r>
+            <a:endParaRPr lang="en-US" sz="1300" dirty="0"/>
           </a:p>
           <a:p>
             <a:pPr indent="0" marL="0">
@@ -12197,14 +14709,84 @@
               <a:buNone/>
             </a:pPr>
             <a:r>
-              <a:rPr lang="en-US" sz="1400" dirty="0">
+              <a:rPr lang="en-US" sz="1300" dirty="0">
                 <a:solidFill>
                   <a:schemeClr val="tx1"/>
                 </a:solidFill>
               </a:rPr>
-              <a:t>それは痛みがほどけはじめているサインです。</a:t>
-            </a:r>
-            <a:endParaRPr lang="en-US" sz="1400" dirty="0"/>
+              <a:t>出てきた感情を否定せずに感じ切ると、統合されて、上へ上がっていきます。</a:t>
+            </a:r>
+            <a:endParaRPr lang="en-US" sz="1300" dirty="0"/>
+          </a:p>
+          <a:p>
+            <a:pPr indent="0" marL="0">
+              <a:spcAft>
+                <a:spcPts val="600"/>
+              </a:spcAft>
+              <a:buNone/>
+            </a:pPr>
+            <a:r>
+              <a:rPr lang="en-US" sz="1300" dirty="0">
+                <a:solidFill>
+                  <a:schemeClr val="tx1"/>
+                </a:solidFill>
+              </a:rPr>
+              <a:t>怒りや悲しみが出ても大丈夫。</a:t>
+            </a:r>
+            <a:endParaRPr lang="en-US" sz="1300" dirty="0"/>
+          </a:p>
+          <a:p>
+            <a:pPr indent="0" marL="0">
+              <a:spcAft>
+                <a:spcPts val="600"/>
+              </a:spcAft>
+              <a:buNone/>
+            </a:pPr>
+            <a:r>
+              <a:rPr lang="en-US" sz="1300" dirty="0">
+                <a:solidFill>
+                  <a:schemeClr val="tx1"/>
+                </a:solidFill>
+              </a:rPr>
+              <a:t>ほどけはじめているサインです。</a:t>
+            </a:r>
+            <a:endParaRPr lang="en-US" sz="1300" dirty="0"/>
+          </a:p>
+        </p:txBody>
+      </p:sp>
+      <p:sp>
+        <p:nvSpPr>
+          <p:cNvPr id="81" name="lv_src"/>
+          <p:cNvSpPr txBox="1"/>
+          <p:nvPr/>
+        </p:nvSpPr>
+        <p:spPr>
+          <a:xfrm>
+            <a:off x="5943600" y="4114800"/>
+            <a:ext cx="2651760" cy="365760"/>
+          </a:xfrm>
+          <a:prstGeom prst="rect">
+            <a:avLst/>
+          </a:prstGeom>
+          <a:noFill/>
+          <a:ln/>
+        </p:spPr>
+        <p:txBody>
+          <a:bodyPr wrap="square" lIns="1016" tIns="1016" rIns="1016" bIns="1016" rtlCol="0" anchor="t"/>
+          <a:lstStyle/>
+          <a:p>
+            <a:pPr indent="0" marL="0">
+              <a:buNone/>
+            </a:pPr>
+            <a:r>
+              <a:rPr lang="en-US" sz="800" dirty="0">
+                <a:solidFill>
+                  <a:schemeClr val="accent1"/>
+                </a:solidFill>
+              </a:rPr>
+              <a:t>D.R.ホーキンズ『パワーか、フォースか』の意識のマップをもとに作成</a:t>
+            </a:r>
+            <a:endParaRPr lang="en-US" sz="800" dirty="0"/>
           </a:p>
         </p:txBody>
       </p:sp>

--- a/20_Projects/海音_心体の調律/タマラ/髙瀨三由紀さん/20261102_髙瀨三由紀さん_胸の奥の痛みをほどく単発セッション.pptx
+++ b/20_Projects/海音_心体の調律/タマラ/髙瀨三由紀さん/20261102_髙瀨三由紀さん_胸の奥の痛みをほどく単発セッション.pptx
@@ -59,9 +59,23 @@
     <p:sldId id="307" r:id="rId53"/>
     <p:sldId id="308" r:id="rId54"/>
     <p:sldId id="309" r:id="rId55"/>
+    <p:sldId id="310" r:id="rId56"/>
+    <p:sldId id="311" r:id="rId57"/>
+    <p:sldId id="312" r:id="rId58"/>
+    <p:sldId id="313" r:id="rId59"/>
+    <p:sldId id="314" r:id="rId60"/>
+    <p:sldId id="315" r:id="rId61"/>
+    <p:sldId id="316" r:id="rId62"/>
+    <p:sldId id="317" r:id="rId63"/>
+    <p:sldId id="318" r:id="rId64"/>
+    <p:sldId id="319" r:id="rId65"/>
+    <p:sldId id="320" r:id="rId66"/>
+    <p:sldId id="321" r:id="rId67"/>
+    <p:sldId id="322" r:id="rId68"/>
+    <p:sldId id="323" r:id="rId69"/>
   </p:sldIdLst>
   <p:notesMasterIdLst>
-    <p:notesMasterId r:id="rId56"/>
+    <p:notesMasterId r:id="rId70"/>
   </p:notesMasterIdLst>
   <p:sldSz cx="9144000" cy="5143500"/>
   <p:notesSz cx="5143500" cy="9144000"/>
@@ -160,14 +174,14 @@
   <p:extLst>
     <p:ext uri="{521415D9-36F7-43E2-AB2F-B90AF26B5E84}">
       <p14:sectionLst xmlns:p14="http://schemas.microsoft.com/office/powerpoint/2010/main">
-        <p14:section name="はじめに" id="{03aa1b8d-5c6b-f15c-e63d-b5b16c213cd6}">
+        <p14:section name="はじめに" id="{e6657519-cc21-768a-b881-8fb91922c410}">
           <p14:sldIdLst>
             <p14:sldId id="256"/>
             <p14:sldId id="257"/>
             <p14:sldId id="258"/>
           </p14:sldIdLst>
         </p14:section>
-        <p14:section name="第1部 魂の傷を聴く" id="{cdb1e530-9ca5-19d0-2f6b-2b1e2c05a6f0}">
+        <p14:section name="第1部 魂の傷を聴く" id="{dd7076d8-44f1-7d46-e7fe-0a0e5f16356b}">
           <p14:sldIdLst>
             <p14:sldId id="259"/>
             <p14:sldId id="260"/>
@@ -186,7 +200,7 @@
             <p14:sldId id="273"/>
           </p14:sldIdLst>
         </p14:section>
-        <p14:section name="第2部 頭の構造を知る" id="{6fb0b37e-758e-bc43-a4b4-33fa8396429e}">
+        <p14:section name="第2部 頭の構造を知る" id="{becf0455-f0bb-b7a9-799f-204e20e79442}">
           <p14:sldIdLst>
             <p14:sldId id="274"/>
             <p14:sldId id="275"/>
@@ -200,7 +214,7 @@
             <p14:sldId id="283"/>
           </p14:sldIdLst>
         </p14:section>
-        <p14:section name="ワーク 思い込みを書き換える" id="{2cc51895-41fe-dfec-9729-eeeeb91d5670}">
+        <p14:section name="ワークA 思い込みを書き換える" id="{20ebb883-2fcc-752e-ea0e-b95d79c97136}">
           <p14:sldIdLst>
             <p14:sldId id="284"/>
             <p14:sldId id="285"/>
@@ -223,19 +237,37 @@
             <p14:sldId id="302"/>
           </p14:sldIdLst>
         </p14:section>
-        <p14:section name="エネルギー" id="{d01206d7-db2d-9d6a-027e-0f4acae84898}">
+        <p14:section name="ワークB 感情を統合する" id="{f422e797-eb9c-4ac5-d166-f98bd2d28fa7}">
           <p14:sldIdLst>
             <p14:sldId id="303"/>
-          </p14:sldIdLst>
-        </p14:section>
-        <p14:section name="まとめ" id="{ad69bd18-5418-93ac-6e7c-1cac7b167f64}">
-          <p14:sldIdLst>
             <p14:sldId id="304"/>
             <p14:sldId id="305"/>
             <p14:sldId id="306"/>
             <p14:sldId id="307"/>
             <p14:sldId id="308"/>
             <p14:sldId id="309"/>
+            <p14:sldId id="310"/>
+            <p14:sldId id="311"/>
+            <p14:sldId id="312"/>
+            <p14:sldId id="313"/>
+            <p14:sldId id="314"/>
+            <p14:sldId id="315"/>
+            <p14:sldId id="316"/>
+          </p14:sldIdLst>
+        </p14:section>
+        <p14:section name="エネルギー" id="{a831e65b-121d-9cdf-97b0-1b4f06e7ffad}">
+          <p14:sldIdLst>
+            <p14:sldId id="317"/>
+          </p14:sldIdLst>
+        </p14:section>
+        <p14:section name="まとめ" id="{64ddccdf-cfc2-1704-a588-99f477a4aa6f}">
+          <p14:sldIdLst>
+            <p14:sldId id="318"/>
+            <p14:sldId id="319"/>
+            <p14:sldId id="320"/>
+            <p14:sldId id="321"/>
+            <p14:sldId id="322"/>
+            <p14:sldId id="323"/>
           </p14:sldIdLst>
         </p14:section>
       </p14:sectionLst>
@@ -1610,7 +1642,7 @@
           <a:p>
             <a:r>
               <a:rPr lang="en-US" dirty="0"/>
-              <a:t>全体の流れ。質問は1つずつゆっくり聴いていく。</a:t>
+              <a:t>全体の流れ。質問は1つずつゆっくり聴いていく。ワークは、その日の状態で「A 思い込みを書き換える」か「B 感情を統合する」のどちらかを選ぶ。</a:t>
             </a:r>
             <a:endParaRPr lang="en-US" dirty="0"/>
           </a:p>
@@ -4250,7 +4282,7 @@
           <a:p>
             <a:r>
               <a:rPr lang="en-US" dirty="0"/>
-              <a:t>由香が本人の言葉をそのまま打ち込む。言葉は本人が決める（由香が作らない）。</a:t>
+              <a:t>由香が本人の言葉をそのまま打ち込む。言葉は本人が決める（由香が作らない）。ワークAが終わったら、ワークBは飛ばしてエネルギーへ。</a:t>
             </a:r>
             <a:endParaRPr lang="en-US" dirty="0"/>
           </a:p>
@@ -4338,7 +4370,7 @@
           <a:p>
             <a:r>
               <a:rPr lang="en-US" dirty="0"/>
-              <a:t>ワークで残ったものをエネルギーで取り除く。ご自身では痛すぎてできなかった所なので、120分版ではここを15分とる。前後で胸の痛み（1〜10・色・形・重さ）を確かめる。</a:t>
+              <a:t>感情の統合の誘導セッション。その日の状態でワークAかワークBを選ぶ（両方はやらない）。ワークBを選んだ時は、ワークAのスライドを飛ばしてここから。</a:t>
             </a:r>
             <a:endParaRPr lang="en-US" dirty="0"/>
           </a:p>
@@ -4426,7 +4458,7 @@
           <a:p>
             <a:r>
               <a:rPr lang="en-US" dirty="0"/>
-              <a:t>第1部の「1〜10で言うと、今の痛みはどのくらいですか？」で聞いた数字と比べる。色や形・重さの変化も聞く。由香が＿＿に打ち込む。</a:t>
+              <a:t>見せないスライド。画面共有を止めてから読む。読んだら次のスライドで共有を再開。</a:t>
             </a:r>
             <a:endParaRPr lang="en-US" dirty="0"/>
           </a:p>
@@ -4602,7 +4634,7 @@
           <a:p>
             <a:r>
               <a:rPr lang="en-US" dirty="0"/>
-              <a:t>本人の言葉で言ってもらう。</a:t>
+              <a:t>ワークに入る直前（または第1部・講座の途中）で出てきた感情を使う。「今、どんな感情が出ていますか？」と確かめてから。感情の名前は本人の言葉のまま。</a:t>
             </a:r>
             <a:endParaRPr lang="en-US" dirty="0"/>
           </a:p>
@@ -4690,7 +4722,7 @@
           <a:p>
             <a:r>
               <a:rPr lang="en-US" dirty="0"/>
-              <a:t>「一度で終わりではなく、繰り返し向き合う」につなげる。</a:t>
+              <a:t>色が見えなくてもOK。温度・重さ・におい・音など、感じたままを聞く。</a:t>
             </a:r>
             <a:endParaRPr lang="en-US" dirty="0"/>
           </a:p>
@@ -4778,7 +4810,7 @@
           <a:p>
             <a:r>
               <a:rPr lang="en-US" dirty="0"/>
-              <a:t>由香さんの言葉。一度で外れなくても失敗ではなく、ほどいている途中だと伝える。</a:t>
+              <a:t>入れない時は、池のふちから眺めるだけでもいい。入れそうになるまで待つ。</a:t>
             </a:r>
             <a:endParaRPr lang="en-US" dirty="0"/>
           </a:p>
@@ -4866,7 +4898,7 @@
           <a:p>
             <a:r>
               <a:rPr lang="en-US" dirty="0"/>
-              <a:t>すべての土台は絶対的安心感。「何をやっても、やらなくても大丈夫」「嫌なことをやめても、愛される」。</a:t>
+              <a:t>見えたもの・聞こえたもの・体の感じをそのまま受け取る。意味づけしない。</a:t>
             </a:r>
             <a:endParaRPr lang="en-US" dirty="0"/>
           </a:p>
@@ -4954,7 +4986,7 @@
           <a:p>
             <a:r>
               <a:rPr lang="en-US" dirty="0"/>
-              <a:t>終了。1週間後にLINEで「その後いかがですか？」と連絡する。</a:t>
+              <a:t>見るものがなくなるまで、このスライドのまま「先に進んでみましょう」「何が見えますか？」を繰り返す。</a:t>
             </a:r>
             <a:endParaRPr lang="en-US" dirty="0"/>
           </a:p>
@@ -4978,6 +5010,446 @@
             <a:fld id="{F7021451-1387-4CA6-816F-3879F97B5CBC}" type="slidenum">
               <a:rPr lang="en-US"/>
               <a:t>54</a:t>
+            </a:fld>
+            <a:endParaRPr lang="en-US"/>
+          </a:p>
+        </p:txBody>
+      </p:sp>
+    </p:spTree>
+    <p:extLst>
+      <p:ext uri="{BB962C8B-B14F-4D97-AF65-F5344CB8AC3E}">
+        <p14:creationId xmlns:p14="http://schemas.microsoft.com/office/powerpoint/2010/main" val="1024086991"/>
+      </p:ext>
+    </p:extLst>
+  </p:cSld>
+  <p:clrMapOvr>
+    <a:masterClrMapping/>
+  </p:clrMapOvr>
+</p:notes>
+</file>
+
+<file path=ppt/notesSlides/notesSlide55.xml><?xml version="1.0" encoding="utf-8"?>
+<p:notes xmlns:a="http://schemas.openxmlformats.org/drawingml/2006/main" xmlns:r="http://schemas.openxmlformats.org/officeDocument/2006/relationships" xmlns:p="http://schemas.openxmlformats.org/presentationml/2006/main">
+  <p:cSld>
+    <p:spTree>
+      <p:nvGrpSpPr>
+        <p:cNvPr id="1" name=""/>
+        <p:cNvGrpSpPr/>
+        <p:nvPr/>
+      </p:nvGrpSpPr>
+      <p:grpSpPr>
+        <a:xfrm>
+          <a:off x="0" y="0"/>
+          <a:ext cx="0" cy="0"/>
+          <a:chOff x="0" y="0"/>
+          <a:chExt cx="0" cy="0"/>
+        </a:xfrm>
+      </p:grpSpPr>
+      <p:sp>
+        <p:nvSpPr>
+          <p:cNvPr id="2" name="Slide Image Placeholder 1"/>
+          <p:cNvSpPr>
+            <a:spLocks noGrp="1" noRot="1" noChangeAspect="1"/>
+          </p:cNvSpPr>
+          <p:nvPr>
+            <p:ph type="sldImg"/>
+          </p:nvPr>
+        </p:nvSpPr>
+        <p:spPr/>
+      </p:sp>
+      <p:sp>
+        <p:nvSpPr>
+          <p:cNvPr id="3" name="Notes Placeholder 2"/>
+          <p:cNvSpPr>
+            <a:spLocks noGrp="1"/>
+          </p:cNvSpPr>
+          <p:nvPr>
+            <p:ph type="body" idx="1"/>
+          </p:nvPr>
+        </p:nvSpPr>
+        <p:spPr/>
+        <p:txBody>
+          <a:bodyPr/>
+          <a:lstStyle/>
+          <a:p>
+            <a:r>
+              <a:rPr lang="en-US" dirty="0"/>
+              <a:t>見るものがなくなったら入口をふり返る。入口の見え方の変化（明るい・小さい・遠い等）を聞く。そのまま池から出てきてもらい、次の理想の池へ。</a:t>
+            </a:r>
+            <a:endParaRPr lang="en-US" dirty="0"/>
+          </a:p>
+        </p:txBody>
+      </p:sp>
+      <p:sp>
+        <p:nvSpPr>
+          <p:cNvPr id="4" name="Slide Number Placeholder 3"/>
+          <p:cNvSpPr>
+            <a:spLocks noGrp="1"/>
+          </p:cNvSpPr>
+          <p:nvPr>
+            <p:ph type="sldNum" sz="quarter" idx="10"/>
+          </p:nvPr>
+        </p:nvSpPr>
+        <p:spPr/>
+        <p:txBody>
+          <a:bodyPr/>
+          <a:lstStyle/>
+          <a:p>
+            <a:fld id="{F7021451-1387-4CA6-816F-3879F97B5CBC}" type="slidenum">
+              <a:rPr lang="en-US"/>
+              <a:t>55</a:t>
+            </a:fld>
+            <a:endParaRPr lang="en-US"/>
+          </a:p>
+        </p:txBody>
+      </p:sp>
+    </p:spTree>
+    <p:extLst>
+      <p:ext uri="{BB962C8B-B14F-4D97-AF65-F5344CB8AC3E}">
+        <p14:creationId xmlns:p14="http://schemas.microsoft.com/office/powerpoint/2010/main" val="1024086991"/>
+      </p:ext>
+    </p:extLst>
+  </p:cSld>
+  <p:clrMapOvr>
+    <a:masterClrMapping/>
+  </p:clrMapOvr>
+</p:notes>
+</file>
+
+<file path=ppt/notesSlides/notesSlide56.xml><?xml version="1.0" encoding="utf-8"?>
+<p:notes xmlns:a="http://schemas.openxmlformats.org/drawingml/2006/main" xmlns:r="http://schemas.openxmlformats.org/officeDocument/2006/relationships" xmlns:p="http://schemas.openxmlformats.org/presentationml/2006/main">
+  <p:cSld>
+    <p:spTree>
+      <p:nvGrpSpPr>
+        <p:cNvPr id="1" name=""/>
+        <p:cNvGrpSpPr/>
+        <p:nvPr/>
+      </p:nvGrpSpPr>
+      <p:grpSpPr>
+        <a:xfrm>
+          <a:off x="0" y="0"/>
+          <a:ext cx="0" cy="0"/>
+          <a:chOff x="0" y="0"/>
+          <a:chExt cx="0" cy="0"/>
+        </a:xfrm>
+      </p:grpSpPr>
+      <p:sp>
+        <p:nvSpPr>
+          <p:cNvPr id="2" name="Slide Image Placeholder 1"/>
+          <p:cNvSpPr>
+            <a:spLocks noGrp="1" noRot="1" noChangeAspect="1"/>
+          </p:cNvSpPr>
+          <p:nvPr>
+            <p:ph type="sldImg"/>
+          </p:nvPr>
+        </p:nvSpPr>
+        <p:spPr/>
+      </p:sp>
+      <p:sp>
+        <p:nvSpPr>
+          <p:cNvPr id="3" name="Notes Placeholder 2"/>
+          <p:cNvSpPr>
+            <a:spLocks noGrp="1"/>
+          </p:cNvSpPr>
+          <p:nvPr>
+            <p:ph type="body" idx="1"/>
+          </p:nvPr>
+        </p:nvSpPr>
+        <p:spPr/>
+        <p:txBody>
+          <a:bodyPr/>
+          <a:lstStyle/>
+          <a:p>
+            <a:r>
+              <a:rPr lang="en-US" dirty="0"/>
+              <a:t>感情の池から出てきたのを確かめてから。理想は本人のイメージのまま（由香が決めない）。</a:t>
+            </a:r>
+            <a:endParaRPr lang="en-US" dirty="0"/>
+          </a:p>
+        </p:txBody>
+      </p:sp>
+      <p:sp>
+        <p:nvSpPr>
+          <p:cNvPr id="4" name="Slide Number Placeholder 3"/>
+          <p:cNvSpPr>
+            <a:spLocks noGrp="1"/>
+          </p:cNvSpPr>
+          <p:nvPr>
+            <p:ph type="sldNum" sz="quarter" idx="10"/>
+          </p:nvPr>
+        </p:nvSpPr>
+        <p:spPr/>
+        <p:txBody>
+          <a:bodyPr/>
+          <a:lstStyle/>
+          <a:p>
+            <a:fld id="{F7021451-1387-4CA6-816F-3879F97B5CBC}" type="slidenum">
+              <a:rPr lang="en-US"/>
+              <a:t>56</a:t>
+            </a:fld>
+            <a:endParaRPr lang="en-US"/>
+          </a:p>
+        </p:txBody>
+      </p:sp>
+    </p:spTree>
+    <p:extLst>
+      <p:ext uri="{BB962C8B-B14F-4D97-AF65-F5344CB8AC3E}">
+        <p14:creationId xmlns:p14="http://schemas.microsoft.com/office/powerpoint/2010/main" val="1024086991"/>
+      </p:ext>
+    </p:extLst>
+  </p:cSld>
+  <p:clrMapOvr>
+    <a:masterClrMapping/>
+  </p:clrMapOvr>
+</p:notes>
+</file>
+
+<file path=ppt/notesSlides/notesSlide57.xml><?xml version="1.0" encoding="utf-8"?>
+<p:notes xmlns:a="http://schemas.openxmlformats.org/drawingml/2006/main" xmlns:r="http://schemas.openxmlformats.org/officeDocument/2006/relationships" xmlns:p="http://schemas.openxmlformats.org/presentationml/2006/main">
+  <p:cSld>
+    <p:spTree>
+      <p:nvGrpSpPr>
+        <p:cNvPr id="1" name=""/>
+        <p:cNvGrpSpPr/>
+        <p:nvPr/>
+      </p:nvGrpSpPr>
+      <p:grpSpPr>
+        <a:xfrm>
+          <a:off x="0" y="0"/>
+          <a:ext cx="0" cy="0"/>
+          <a:chOff x="0" y="0"/>
+          <a:chExt cx="0" cy="0"/>
+        </a:xfrm>
+      </p:grpSpPr>
+      <p:sp>
+        <p:nvSpPr>
+          <p:cNvPr id="2" name="Slide Image Placeholder 1"/>
+          <p:cNvSpPr>
+            <a:spLocks noGrp="1" noRot="1" noChangeAspect="1"/>
+          </p:cNvSpPr>
+          <p:nvPr>
+            <p:ph type="sldImg"/>
+          </p:nvPr>
+        </p:nvSpPr>
+        <p:spPr/>
+      </p:sp>
+      <p:sp>
+        <p:nvSpPr>
+          <p:cNvPr id="3" name="Notes Placeholder 2"/>
+          <p:cNvSpPr>
+            <a:spLocks noGrp="1"/>
+          </p:cNvSpPr>
+          <p:nvPr>
+            <p:ph type="body" idx="1"/>
+          </p:nvPr>
+        </p:nvSpPr>
+        <p:spPr/>
+        <p:txBody>
+          <a:bodyPr/>
+          <a:lstStyle/>
+          <a:p>
+            <a:r>
+              <a:rPr lang="en-US" dirty="0"/>
+              <a:t>感情の池の色と比べてもらってもいい。</a:t>
+            </a:r>
+            <a:endParaRPr lang="en-US" dirty="0"/>
+          </a:p>
+        </p:txBody>
+      </p:sp>
+      <p:sp>
+        <p:nvSpPr>
+          <p:cNvPr id="4" name="Slide Number Placeholder 3"/>
+          <p:cNvSpPr>
+            <a:spLocks noGrp="1"/>
+          </p:cNvSpPr>
+          <p:nvPr>
+            <p:ph type="sldNum" sz="quarter" idx="10"/>
+          </p:nvPr>
+        </p:nvSpPr>
+        <p:spPr/>
+        <p:txBody>
+          <a:bodyPr/>
+          <a:lstStyle/>
+          <a:p>
+            <a:fld id="{F7021451-1387-4CA6-816F-3879F97B5CBC}" type="slidenum">
+              <a:rPr lang="en-US"/>
+              <a:t>57</a:t>
+            </a:fld>
+            <a:endParaRPr lang="en-US"/>
+          </a:p>
+        </p:txBody>
+      </p:sp>
+    </p:spTree>
+    <p:extLst>
+      <p:ext uri="{BB962C8B-B14F-4D97-AF65-F5344CB8AC3E}">
+        <p14:creationId xmlns:p14="http://schemas.microsoft.com/office/powerpoint/2010/main" val="1024086991"/>
+      </p:ext>
+    </p:extLst>
+  </p:cSld>
+  <p:clrMapOvr>
+    <a:masterClrMapping/>
+  </p:clrMapOvr>
+</p:notes>
+</file>
+
+<file path=ppt/notesSlides/notesSlide58.xml><?xml version="1.0" encoding="utf-8"?>
+<p:notes xmlns:a="http://schemas.openxmlformats.org/drawingml/2006/main" xmlns:r="http://schemas.openxmlformats.org/officeDocument/2006/relationships" xmlns:p="http://schemas.openxmlformats.org/presentationml/2006/main">
+  <p:cSld>
+    <p:spTree>
+      <p:nvGrpSpPr>
+        <p:cNvPr id="1" name=""/>
+        <p:cNvGrpSpPr/>
+        <p:nvPr/>
+      </p:nvGrpSpPr>
+      <p:grpSpPr>
+        <a:xfrm>
+          <a:off x="0" y="0"/>
+          <a:ext cx="0" cy="0"/>
+          <a:chOff x="0" y="0"/>
+          <a:chExt cx="0" cy="0"/>
+        </a:xfrm>
+      </p:grpSpPr>
+      <p:sp>
+        <p:nvSpPr>
+          <p:cNvPr id="2" name="Slide Image Placeholder 1"/>
+          <p:cNvSpPr>
+            <a:spLocks noGrp="1" noRot="1" noChangeAspect="1"/>
+          </p:cNvSpPr>
+          <p:nvPr>
+            <p:ph type="sldImg"/>
+          </p:nvPr>
+        </p:nvSpPr>
+        <p:spPr/>
+      </p:sp>
+      <p:sp>
+        <p:nvSpPr>
+          <p:cNvPr id="3" name="Notes Placeholder 2"/>
+          <p:cNvSpPr>
+            <a:spLocks noGrp="1"/>
+          </p:cNvSpPr>
+          <p:nvPr>
+            <p:ph type="body" idx="1"/>
+          </p:nvPr>
+        </p:nvSpPr>
+        <p:spPr/>
+        <p:txBody>
+          <a:bodyPr/>
+          <a:lstStyle/>
+          <a:p>
+            <a:r>
+              <a:rPr lang="en-US" dirty="0"/>
+              <a:t>入れない時は、池のふちから眺めるだけでもいい。</a:t>
+            </a:r>
+            <a:endParaRPr lang="en-US" dirty="0"/>
+          </a:p>
+        </p:txBody>
+      </p:sp>
+      <p:sp>
+        <p:nvSpPr>
+          <p:cNvPr id="4" name="Slide Number Placeholder 3"/>
+          <p:cNvSpPr>
+            <a:spLocks noGrp="1"/>
+          </p:cNvSpPr>
+          <p:nvPr>
+            <p:ph type="sldNum" sz="quarter" idx="10"/>
+          </p:nvPr>
+        </p:nvSpPr>
+        <p:spPr/>
+        <p:txBody>
+          <a:bodyPr/>
+          <a:lstStyle/>
+          <a:p>
+            <a:fld id="{F7021451-1387-4CA6-816F-3879F97B5CBC}" type="slidenum">
+              <a:rPr lang="en-US"/>
+              <a:t>58</a:t>
+            </a:fld>
+            <a:endParaRPr lang="en-US"/>
+          </a:p>
+        </p:txBody>
+      </p:sp>
+    </p:spTree>
+    <p:extLst>
+      <p:ext uri="{BB962C8B-B14F-4D97-AF65-F5344CB8AC3E}">
+        <p14:creationId xmlns:p14="http://schemas.microsoft.com/office/powerpoint/2010/main" val="1024086991"/>
+      </p:ext>
+    </p:extLst>
+  </p:cSld>
+  <p:clrMapOvr>
+    <a:masterClrMapping/>
+  </p:clrMapOvr>
+</p:notes>
+</file>
+
+<file path=ppt/notesSlides/notesSlide59.xml><?xml version="1.0" encoding="utf-8"?>
+<p:notes xmlns:a="http://schemas.openxmlformats.org/drawingml/2006/main" xmlns:r="http://schemas.openxmlformats.org/officeDocument/2006/relationships" xmlns:p="http://schemas.openxmlformats.org/presentationml/2006/main">
+  <p:cSld>
+    <p:spTree>
+      <p:nvGrpSpPr>
+        <p:cNvPr id="1" name=""/>
+        <p:cNvGrpSpPr/>
+        <p:nvPr/>
+      </p:nvGrpSpPr>
+      <p:grpSpPr>
+        <a:xfrm>
+          <a:off x="0" y="0"/>
+          <a:ext cx="0" cy="0"/>
+          <a:chOff x="0" y="0"/>
+          <a:chExt cx="0" cy="0"/>
+        </a:xfrm>
+      </p:grpSpPr>
+      <p:sp>
+        <p:nvSpPr>
+          <p:cNvPr id="2" name="Slide Image Placeholder 1"/>
+          <p:cNvSpPr>
+            <a:spLocks noGrp="1" noRot="1" noChangeAspect="1"/>
+          </p:cNvSpPr>
+          <p:nvPr>
+            <p:ph type="sldImg"/>
+          </p:nvPr>
+        </p:nvSpPr>
+        <p:spPr/>
+      </p:sp>
+      <p:sp>
+        <p:nvSpPr>
+          <p:cNvPr id="3" name="Notes Placeholder 2"/>
+          <p:cNvSpPr>
+            <a:spLocks noGrp="1"/>
+          </p:cNvSpPr>
+          <p:nvPr>
+            <p:ph type="body" idx="1"/>
+          </p:nvPr>
+        </p:nvSpPr>
+        <p:spPr/>
+        <p:txBody>
+          <a:bodyPr/>
+          <a:lstStyle/>
+          <a:p>
+            <a:r>
+              <a:rPr lang="en-US" dirty="0"/>
+              <a:t>見えたもの・聞こえたもの・体の感じ（特に胸のあたり）をそのまま受け取る。</a:t>
+            </a:r>
+            <a:endParaRPr lang="en-US" dirty="0"/>
+          </a:p>
+        </p:txBody>
+      </p:sp>
+      <p:sp>
+        <p:nvSpPr>
+          <p:cNvPr id="4" name="Slide Number Placeholder 3"/>
+          <p:cNvSpPr>
+            <a:spLocks noGrp="1"/>
+          </p:cNvSpPr>
+          <p:nvPr>
+            <p:ph type="sldNum" sz="quarter" idx="10"/>
+          </p:nvPr>
+        </p:nvSpPr>
+        <p:spPr/>
+        <p:txBody>
+          <a:bodyPr/>
+          <a:lstStyle/>
+          <a:p>
+            <a:fld id="{F7021451-1387-4CA6-816F-3879F97B5CBC}" type="slidenum">
+              <a:rPr lang="en-US"/>
+              <a:t>59</a:t>
             </a:fld>
             <a:endParaRPr lang="en-US"/>
           </a:p>
@@ -5066,6 +5538,798 @@
             <a:fld id="{F7021451-1387-4CA6-816F-3879F97B5CBC}" type="slidenum">
               <a:rPr lang="en-US"/>
               <a:t>6</a:t>
+            </a:fld>
+            <a:endParaRPr lang="en-US"/>
+          </a:p>
+        </p:txBody>
+      </p:sp>
+    </p:spTree>
+    <p:extLst>
+      <p:ext uri="{BB962C8B-B14F-4D97-AF65-F5344CB8AC3E}">
+        <p14:creationId xmlns:p14="http://schemas.microsoft.com/office/powerpoint/2010/main" val="1024086991"/>
+      </p:ext>
+    </p:extLst>
+  </p:cSld>
+  <p:clrMapOvr>
+    <a:masterClrMapping/>
+  </p:clrMapOvr>
+</p:notes>
+</file>
+
+<file path=ppt/notesSlides/notesSlide60.xml><?xml version="1.0" encoding="utf-8"?>
+<p:notes xmlns:a="http://schemas.openxmlformats.org/drawingml/2006/main" xmlns:r="http://schemas.openxmlformats.org/officeDocument/2006/relationships" xmlns:p="http://schemas.openxmlformats.org/presentationml/2006/main">
+  <p:cSld>
+    <p:spTree>
+      <p:nvGrpSpPr>
+        <p:cNvPr id="1" name=""/>
+        <p:cNvGrpSpPr/>
+        <p:nvPr/>
+      </p:nvGrpSpPr>
+      <p:grpSpPr>
+        <a:xfrm>
+          <a:off x="0" y="0"/>
+          <a:ext cx="0" cy="0"/>
+          <a:chOff x="0" y="0"/>
+          <a:chExt cx="0" cy="0"/>
+        </a:xfrm>
+      </p:grpSpPr>
+      <p:sp>
+        <p:nvSpPr>
+          <p:cNvPr id="2" name="Slide Image Placeholder 1"/>
+          <p:cNvSpPr>
+            <a:spLocks noGrp="1" noRot="1" noChangeAspect="1"/>
+          </p:cNvSpPr>
+          <p:nvPr>
+            <p:ph type="sldImg"/>
+          </p:nvPr>
+        </p:nvSpPr>
+        <p:spPr/>
+      </p:sp>
+      <p:sp>
+        <p:nvSpPr>
+          <p:cNvPr id="3" name="Notes Placeholder 2"/>
+          <p:cNvSpPr>
+            <a:spLocks noGrp="1"/>
+          </p:cNvSpPr>
+          <p:nvPr>
+            <p:ph type="body" idx="1"/>
+          </p:nvPr>
+        </p:nvSpPr>
+        <p:spPr/>
+        <p:txBody>
+          <a:bodyPr/>
+          <a:lstStyle/>
+          <a:p>
+            <a:r>
+              <a:rPr lang="en-US" dirty="0"/>
+              <a:t>見るものがなくなるまで繰り返す。</a:t>
+            </a:r>
+            <a:endParaRPr lang="en-US" dirty="0"/>
+          </a:p>
+        </p:txBody>
+      </p:sp>
+      <p:sp>
+        <p:nvSpPr>
+          <p:cNvPr id="4" name="Slide Number Placeholder 3"/>
+          <p:cNvSpPr>
+            <a:spLocks noGrp="1"/>
+          </p:cNvSpPr>
+          <p:nvPr>
+            <p:ph type="sldNum" sz="quarter" idx="10"/>
+          </p:nvPr>
+        </p:nvSpPr>
+        <p:spPr/>
+        <p:txBody>
+          <a:bodyPr/>
+          <a:lstStyle/>
+          <a:p>
+            <a:fld id="{F7021451-1387-4CA6-816F-3879F97B5CBC}" type="slidenum">
+              <a:rPr lang="en-US"/>
+              <a:t>60</a:t>
+            </a:fld>
+            <a:endParaRPr lang="en-US"/>
+          </a:p>
+        </p:txBody>
+      </p:sp>
+    </p:spTree>
+    <p:extLst>
+      <p:ext uri="{BB962C8B-B14F-4D97-AF65-F5344CB8AC3E}">
+        <p14:creationId xmlns:p14="http://schemas.microsoft.com/office/powerpoint/2010/main" val="1024086991"/>
+      </p:ext>
+    </p:extLst>
+  </p:cSld>
+  <p:clrMapOvr>
+    <a:masterClrMapping/>
+  </p:clrMapOvr>
+</p:notes>
+</file>
+
+<file path=ppt/notesSlides/notesSlide61.xml><?xml version="1.0" encoding="utf-8"?>
+<p:notes xmlns:a="http://schemas.openxmlformats.org/drawingml/2006/main" xmlns:r="http://schemas.openxmlformats.org/officeDocument/2006/relationships" xmlns:p="http://schemas.openxmlformats.org/presentationml/2006/main">
+  <p:cSld>
+    <p:spTree>
+      <p:nvGrpSpPr>
+        <p:cNvPr id="1" name=""/>
+        <p:cNvGrpSpPr/>
+        <p:nvPr/>
+      </p:nvGrpSpPr>
+      <p:grpSpPr>
+        <a:xfrm>
+          <a:off x="0" y="0"/>
+          <a:ext cx="0" cy="0"/>
+          <a:chOff x="0" y="0"/>
+          <a:chExt cx="0" cy="0"/>
+        </a:xfrm>
+      </p:grpSpPr>
+      <p:sp>
+        <p:nvSpPr>
+          <p:cNvPr id="2" name="Slide Image Placeholder 1"/>
+          <p:cNvSpPr>
+            <a:spLocks noGrp="1" noRot="1" noChangeAspect="1"/>
+          </p:cNvSpPr>
+          <p:nvPr>
+            <p:ph type="sldImg"/>
+          </p:nvPr>
+        </p:nvSpPr>
+        <p:spPr/>
+      </p:sp>
+      <p:sp>
+        <p:nvSpPr>
+          <p:cNvPr id="3" name="Notes Placeholder 2"/>
+          <p:cNvSpPr>
+            <a:spLocks noGrp="1"/>
+          </p:cNvSpPr>
+          <p:nvPr>
+            <p:ph type="body" idx="1"/>
+          </p:nvPr>
+        </p:nvSpPr>
+        <p:spPr/>
+        <p:txBody>
+          <a:bodyPr/>
+          <a:lstStyle/>
+          <a:p>
+            <a:r>
+              <a:rPr lang="en-US" dirty="0"/>
+              <a:t>終わったら池から出てきてもらい、胸の感じを確かめて、エネルギーへ。</a:t>
+            </a:r>
+            <a:endParaRPr lang="en-US" dirty="0"/>
+          </a:p>
+        </p:txBody>
+      </p:sp>
+      <p:sp>
+        <p:nvSpPr>
+          <p:cNvPr id="4" name="Slide Number Placeholder 3"/>
+          <p:cNvSpPr>
+            <a:spLocks noGrp="1"/>
+          </p:cNvSpPr>
+          <p:nvPr>
+            <p:ph type="sldNum" sz="quarter" idx="10"/>
+          </p:nvPr>
+        </p:nvSpPr>
+        <p:spPr/>
+        <p:txBody>
+          <a:bodyPr/>
+          <a:lstStyle/>
+          <a:p>
+            <a:fld id="{F7021451-1387-4CA6-816F-3879F97B5CBC}" type="slidenum">
+              <a:rPr lang="en-US"/>
+              <a:t>61</a:t>
+            </a:fld>
+            <a:endParaRPr lang="en-US"/>
+          </a:p>
+        </p:txBody>
+      </p:sp>
+    </p:spTree>
+    <p:extLst>
+      <p:ext uri="{BB962C8B-B14F-4D97-AF65-F5344CB8AC3E}">
+        <p14:creationId xmlns:p14="http://schemas.microsoft.com/office/powerpoint/2010/main" val="1024086991"/>
+      </p:ext>
+    </p:extLst>
+  </p:cSld>
+  <p:clrMapOvr>
+    <a:masterClrMapping/>
+  </p:clrMapOvr>
+</p:notes>
+</file>
+
+<file path=ppt/notesSlides/notesSlide62.xml><?xml version="1.0" encoding="utf-8"?>
+<p:notes xmlns:a="http://schemas.openxmlformats.org/drawingml/2006/main" xmlns:r="http://schemas.openxmlformats.org/officeDocument/2006/relationships" xmlns:p="http://schemas.openxmlformats.org/presentationml/2006/main">
+  <p:cSld>
+    <p:spTree>
+      <p:nvGrpSpPr>
+        <p:cNvPr id="1" name=""/>
+        <p:cNvGrpSpPr/>
+        <p:nvPr/>
+      </p:nvGrpSpPr>
+      <p:grpSpPr>
+        <a:xfrm>
+          <a:off x="0" y="0"/>
+          <a:ext cx="0" cy="0"/>
+          <a:chOff x="0" y="0"/>
+          <a:chExt cx="0" cy="0"/>
+        </a:xfrm>
+      </p:grpSpPr>
+      <p:sp>
+        <p:nvSpPr>
+          <p:cNvPr id="2" name="Slide Image Placeholder 1"/>
+          <p:cNvSpPr>
+            <a:spLocks noGrp="1" noRot="1" noChangeAspect="1"/>
+          </p:cNvSpPr>
+          <p:nvPr>
+            <p:ph type="sldImg"/>
+          </p:nvPr>
+        </p:nvSpPr>
+        <p:spPr/>
+      </p:sp>
+      <p:sp>
+        <p:nvSpPr>
+          <p:cNvPr id="3" name="Notes Placeholder 2"/>
+          <p:cNvSpPr>
+            <a:spLocks noGrp="1"/>
+          </p:cNvSpPr>
+          <p:nvPr>
+            <p:ph type="body" idx="1"/>
+          </p:nvPr>
+        </p:nvSpPr>
+        <p:spPr/>
+        <p:txBody>
+          <a:bodyPr/>
+          <a:lstStyle/>
+          <a:p>
+            <a:r>
+              <a:rPr lang="en-US" dirty="0"/>
+              <a:t>ワークで残ったものをエネルギーで取り除く。ご自身では痛すぎてできなかった所なので、120分版ではここを15分とる。前後で胸の痛み（1〜10・色・形・重さ）を確かめる。</a:t>
+            </a:r>
+            <a:endParaRPr lang="en-US" dirty="0"/>
+          </a:p>
+        </p:txBody>
+      </p:sp>
+      <p:sp>
+        <p:nvSpPr>
+          <p:cNvPr id="4" name="Slide Number Placeholder 3"/>
+          <p:cNvSpPr>
+            <a:spLocks noGrp="1"/>
+          </p:cNvSpPr>
+          <p:nvPr>
+            <p:ph type="sldNum" sz="quarter" idx="10"/>
+          </p:nvPr>
+        </p:nvSpPr>
+        <p:spPr/>
+        <p:txBody>
+          <a:bodyPr/>
+          <a:lstStyle/>
+          <a:p>
+            <a:fld id="{F7021451-1387-4CA6-816F-3879F97B5CBC}" type="slidenum">
+              <a:rPr lang="en-US"/>
+              <a:t>62</a:t>
+            </a:fld>
+            <a:endParaRPr lang="en-US"/>
+          </a:p>
+        </p:txBody>
+      </p:sp>
+    </p:spTree>
+    <p:extLst>
+      <p:ext uri="{BB962C8B-B14F-4D97-AF65-F5344CB8AC3E}">
+        <p14:creationId xmlns:p14="http://schemas.microsoft.com/office/powerpoint/2010/main" val="1024086991"/>
+      </p:ext>
+    </p:extLst>
+  </p:cSld>
+  <p:clrMapOvr>
+    <a:masterClrMapping/>
+  </p:clrMapOvr>
+</p:notes>
+</file>
+
+<file path=ppt/notesSlides/notesSlide63.xml><?xml version="1.0" encoding="utf-8"?>
+<p:notes xmlns:a="http://schemas.openxmlformats.org/drawingml/2006/main" xmlns:r="http://schemas.openxmlformats.org/officeDocument/2006/relationships" xmlns:p="http://schemas.openxmlformats.org/presentationml/2006/main">
+  <p:cSld>
+    <p:spTree>
+      <p:nvGrpSpPr>
+        <p:cNvPr id="1" name=""/>
+        <p:cNvGrpSpPr/>
+        <p:nvPr/>
+      </p:nvGrpSpPr>
+      <p:grpSpPr>
+        <a:xfrm>
+          <a:off x="0" y="0"/>
+          <a:ext cx="0" cy="0"/>
+          <a:chOff x="0" y="0"/>
+          <a:chExt cx="0" cy="0"/>
+        </a:xfrm>
+      </p:grpSpPr>
+      <p:sp>
+        <p:nvSpPr>
+          <p:cNvPr id="2" name="Slide Image Placeholder 1"/>
+          <p:cNvSpPr>
+            <a:spLocks noGrp="1" noRot="1" noChangeAspect="1"/>
+          </p:cNvSpPr>
+          <p:nvPr>
+            <p:ph type="sldImg"/>
+          </p:nvPr>
+        </p:nvSpPr>
+        <p:spPr/>
+      </p:sp>
+      <p:sp>
+        <p:nvSpPr>
+          <p:cNvPr id="3" name="Notes Placeholder 2"/>
+          <p:cNvSpPr>
+            <a:spLocks noGrp="1"/>
+          </p:cNvSpPr>
+          <p:nvPr>
+            <p:ph type="body" idx="1"/>
+          </p:nvPr>
+        </p:nvSpPr>
+        <p:spPr/>
+        <p:txBody>
+          <a:bodyPr/>
+          <a:lstStyle/>
+          <a:p>
+            <a:r>
+              <a:rPr lang="en-US" dirty="0"/>
+              <a:t>第1部の「1〜10で言うと、今の痛みはどのくらいですか？」で聞いた数字と比べる。色や形・重さの変化も聞く。由香が＿＿に打ち込む。</a:t>
+            </a:r>
+            <a:endParaRPr lang="en-US" dirty="0"/>
+          </a:p>
+        </p:txBody>
+      </p:sp>
+      <p:sp>
+        <p:nvSpPr>
+          <p:cNvPr id="4" name="Slide Number Placeholder 3"/>
+          <p:cNvSpPr>
+            <a:spLocks noGrp="1"/>
+          </p:cNvSpPr>
+          <p:nvPr>
+            <p:ph type="sldNum" sz="quarter" idx="10"/>
+          </p:nvPr>
+        </p:nvSpPr>
+        <p:spPr/>
+        <p:txBody>
+          <a:bodyPr/>
+          <a:lstStyle/>
+          <a:p>
+            <a:fld id="{F7021451-1387-4CA6-816F-3879F97B5CBC}" type="slidenum">
+              <a:rPr lang="en-US"/>
+              <a:t>63</a:t>
+            </a:fld>
+            <a:endParaRPr lang="en-US"/>
+          </a:p>
+        </p:txBody>
+      </p:sp>
+    </p:spTree>
+    <p:extLst>
+      <p:ext uri="{BB962C8B-B14F-4D97-AF65-F5344CB8AC3E}">
+        <p14:creationId xmlns:p14="http://schemas.microsoft.com/office/powerpoint/2010/main" val="1024086991"/>
+      </p:ext>
+    </p:extLst>
+  </p:cSld>
+  <p:clrMapOvr>
+    <a:masterClrMapping/>
+  </p:clrMapOvr>
+</p:notes>
+</file>
+
+<file path=ppt/notesSlides/notesSlide64.xml><?xml version="1.0" encoding="utf-8"?>
+<p:notes xmlns:a="http://schemas.openxmlformats.org/drawingml/2006/main" xmlns:r="http://schemas.openxmlformats.org/officeDocument/2006/relationships" xmlns:p="http://schemas.openxmlformats.org/presentationml/2006/main">
+  <p:cSld>
+    <p:spTree>
+      <p:nvGrpSpPr>
+        <p:cNvPr id="1" name=""/>
+        <p:cNvGrpSpPr/>
+        <p:nvPr/>
+      </p:nvGrpSpPr>
+      <p:grpSpPr>
+        <a:xfrm>
+          <a:off x="0" y="0"/>
+          <a:ext cx="0" cy="0"/>
+          <a:chOff x="0" y="0"/>
+          <a:chExt cx="0" cy="0"/>
+        </a:xfrm>
+      </p:grpSpPr>
+      <p:sp>
+        <p:nvSpPr>
+          <p:cNvPr id="2" name="Slide Image Placeholder 1"/>
+          <p:cNvSpPr>
+            <a:spLocks noGrp="1" noRot="1" noChangeAspect="1"/>
+          </p:cNvSpPr>
+          <p:nvPr>
+            <p:ph type="sldImg"/>
+          </p:nvPr>
+        </p:nvSpPr>
+        <p:spPr/>
+      </p:sp>
+      <p:sp>
+        <p:nvSpPr>
+          <p:cNvPr id="3" name="Notes Placeholder 2"/>
+          <p:cNvSpPr>
+            <a:spLocks noGrp="1"/>
+          </p:cNvSpPr>
+          <p:nvPr>
+            <p:ph type="body" idx="1"/>
+          </p:nvPr>
+        </p:nvSpPr>
+        <p:spPr/>
+        <p:txBody>
+          <a:bodyPr/>
+          <a:lstStyle/>
+          <a:p>
+            <a:r>
+              <a:rPr lang="en-US" dirty="0"/>
+              <a:t>本人の言葉で言ってもらう。</a:t>
+            </a:r>
+            <a:endParaRPr lang="en-US" dirty="0"/>
+          </a:p>
+        </p:txBody>
+      </p:sp>
+      <p:sp>
+        <p:nvSpPr>
+          <p:cNvPr id="4" name="Slide Number Placeholder 3"/>
+          <p:cNvSpPr>
+            <a:spLocks noGrp="1"/>
+          </p:cNvSpPr>
+          <p:nvPr>
+            <p:ph type="sldNum" sz="quarter" idx="10"/>
+          </p:nvPr>
+        </p:nvSpPr>
+        <p:spPr/>
+        <p:txBody>
+          <a:bodyPr/>
+          <a:lstStyle/>
+          <a:p>
+            <a:fld id="{F7021451-1387-4CA6-816F-3879F97B5CBC}" type="slidenum">
+              <a:rPr lang="en-US"/>
+              <a:t>64</a:t>
+            </a:fld>
+            <a:endParaRPr lang="en-US"/>
+          </a:p>
+        </p:txBody>
+      </p:sp>
+    </p:spTree>
+    <p:extLst>
+      <p:ext uri="{BB962C8B-B14F-4D97-AF65-F5344CB8AC3E}">
+        <p14:creationId xmlns:p14="http://schemas.microsoft.com/office/powerpoint/2010/main" val="1024086991"/>
+      </p:ext>
+    </p:extLst>
+  </p:cSld>
+  <p:clrMapOvr>
+    <a:masterClrMapping/>
+  </p:clrMapOvr>
+</p:notes>
+</file>
+
+<file path=ppt/notesSlides/notesSlide65.xml><?xml version="1.0" encoding="utf-8"?>
+<p:notes xmlns:a="http://schemas.openxmlformats.org/drawingml/2006/main" xmlns:r="http://schemas.openxmlformats.org/officeDocument/2006/relationships" xmlns:p="http://schemas.openxmlformats.org/presentationml/2006/main">
+  <p:cSld>
+    <p:spTree>
+      <p:nvGrpSpPr>
+        <p:cNvPr id="1" name=""/>
+        <p:cNvGrpSpPr/>
+        <p:nvPr/>
+      </p:nvGrpSpPr>
+      <p:grpSpPr>
+        <a:xfrm>
+          <a:off x="0" y="0"/>
+          <a:ext cx="0" cy="0"/>
+          <a:chOff x="0" y="0"/>
+          <a:chExt cx="0" cy="0"/>
+        </a:xfrm>
+      </p:grpSpPr>
+      <p:sp>
+        <p:nvSpPr>
+          <p:cNvPr id="2" name="Slide Image Placeholder 1"/>
+          <p:cNvSpPr>
+            <a:spLocks noGrp="1" noRot="1" noChangeAspect="1"/>
+          </p:cNvSpPr>
+          <p:nvPr>
+            <p:ph type="sldImg"/>
+          </p:nvPr>
+        </p:nvSpPr>
+        <p:spPr/>
+      </p:sp>
+      <p:sp>
+        <p:nvSpPr>
+          <p:cNvPr id="3" name="Notes Placeholder 2"/>
+          <p:cNvSpPr>
+            <a:spLocks noGrp="1"/>
+          </p:cNvSpPr>
+          <p:nvPr>
+            <p:ph type="body" idx="1"/>
+          </p:nvPr>
+        </p:nvSpPr>
+        <p:spPr/>
+        <p:txBody>
+          <a:bodyPr/>
+          <a:lstStyle/>
+          <a:p>
+            <a:r>
+              <a:rPr lang="en-US" dirty="0"/>
+              <a:t>「一度で終わりではなく、繰り返し向き合う」につなげる。</a:t>
+            </a:r>
+            <a:endParaRPr lang="en-US" dirty="0"/>
+          </a:p>
+        </p:txBody>
+      </p:sp>
+      <p:sp>
+        <p:nvSpPr>
+          <p:cNvPr id="4" name="Slide Number Placeholder 3"/>
+          <p:cNvSpPr>
+            <a:spLocks noGrp="1"/>
+          </p:cNvSpPr>
+          <p:nvPr>
+            <p:ph type="sldNum" sz="quarter" idx="10"/>
+          </p:nvPr>
+        </p:nvSpPr>
+        <p:spPr/>
+        <p:txBody>
+          <a:bodyPr/>
+          <a:lstStyle/>
+          <a:p>
+            <a:fld id="{F7021451-1387-4CA6-816F-3879F97B5CBC}" type="slidenum">
+              <a:rPr lang="en-US"/>
+              <a:t>65</a:t>
+            </a:fld>
+            <a:endParaRPr lang="en-US"/>
+          </a:p>
+        </p:txBody>
+      </p:sp>
+    </p:spTree>
+    <p:extLst>
+      <p:ext uri="{BB962C8B-B14F-4D97-AF65-F5344CB8AC3E}">
+        <p14:creationId xmlns:p14="http://schemas.microsoft.com/office/powerpoint/2010/main" val="1024086991"/>
+      </p:ext>
+    </p:extLst>
+  </p:cSld>
+  <p:clrMapOvr>
+    <a:masterClrMapping/>
+  </p:clrMapOvr>
+</p:notes>
+</file>
+
+<file path=ppt/notesSlides/notesSlide66.xml><?xml version="1.0" encoding="utf-8"?>
+<p:notes xmlns:a="http://schemas.openxmlformats.org/drawingml/2006/main" xmlns:r="http://schemas.openxmlformats.org/officeDocument/2006/relationships" xmlns:p="http://schemas.openxmlformats.org/presentationml/2006/main">
+  <p:cSld>
+    <p:spTree>
+      <p:nvGrpSpPr>
+        <p:cNvPr id="1" name=""/>
+        <p:cNvGrpSpPr/>
+        <p:nvPr/>
+      </p:nvGrpSpPr>
+      <p:grpSpPr>
+        <a:xfrm>
+          <a:off x="0" y="0"/>
+          <a:ext cx="0" cy="0"/>
+          <a:chOff x="0" y="0"/>
+          <a:chExt cx="0" cy="0"/>
+        </a:xfrm>
+      </p:grpSpPr>
+      <p:sp>
+        <p:nvSpPr>
+          <p:cNvPr id="2" name="Slide Image Placeholder 1"/>
+          <p:cNvSpPr>
+            <a:spLocks noGrp="1" noRot="1" noChangeAspect="1"/>
+          </p:cNvSpPr>
+          <p:nvPr>
+            <p:ph type="sldImg"/>
+          </p:nvPr>
+        </p:nvSpPr>
+        <p:spPr/>
+      </p:sp>
+      <p:sp>
+        <p:nvSpPr>
+          <p:cNvPr id="3" name="Notes Placeholder 2"/>
+          <p:cNvSpPr>
+            <a:spLocks noGrp="1"/>
+          </p:cNvSpPr>
+          <p:nvPr>
+            <p:ph type="body" idx="1"/>
+          </p:nvPr>
+        </p:nvSpPr>
+        <p:spPr/>
+        <p:txBody>
+          <a:bodyPr/>
+          <a:lstStyle/>
+          <a:p>
+            <a:r>
+              <a:rPr lang="en-US" dirty="0"/>
+              <a:t>由香さんの言葉。一度で外れなくても失敗ではなく、ほどいている途中だと伝える。</a:t>
+            </a:r>
+            <a:endParaRPr lang="en-US" dirty="0"/>
+          </a:p>
+        </p:txBody>
+      </p:sp>
+      <p:sp>
+        <p:nvSpPr>
+          <p:cNvPr id="4" name="Slide Number Placeholder 3"/>
+          <p:cNvSpPr>
+            <a:spLocks noGrp="1"/>
+          </p:cNvSpPr>
+          <p:nvPr>
+            <p:ph type="sldNum" sz="quarter" idx="10"/>
+          </p:nvPr>
+        </p:nvSpPr>
+        <p:spPr/>
+        <p:txBody>
+          <a:bodyPr/>
+          <a:lstStyle/>
+          <a:p>
+            <a:fld id="{F7021451-1387-4CA6-816F-3879F97B5CBC}" type="slidenum">
+              <a:rPr lang="en-US"/>
+              <a:t>66</a:t>
+            </a:fld>
+            <a:endParaRPr lang="en-US"/>
+          </a:p>
+        </p:txBody>
+      </p:sp>
+    </p:spTree>
+    <p:extLst>
+      <p:ext uri="{BB962C8B-B14F-4D97-AF65-F5344CB8AC3E}">
+        <p14:creationId xmlns:p14="http://schemas.microsoft.com/office/powerpoint/2010/main" val="1024086991"/>
+      </p:ext>
+    </p:extLst>
+  </p:cSld>
+  <p:clrMapOvr>
+    <a:masterClrMapping/>
+  </p:clrMapOvr>
+</p:notes>
+</file>
+
+<file path=ppt/notesSlides/notesSlide67.xml><?xml version="1.0" encoding="utf-8"?>
+<p:notes xmlns:a="http://schemas.openxmlformats.org/drawingml/2006/main" xmlns:r="http://schemas.openxmlformats.org/officeDocument/2006/relationships" xmlns:p="http://schemas.openxmlformats.org/presentationml/2006/main">
+  <p:cSld>
+    <p:spTree>
+      <p:nvGrpSpPr>
+        <p:cNvPr id="1" name=""/>
+        <p:cNvGrpSpPr/>
+        <p:nvPr/>
+      </p:nvGrpSpPr>
+      <p:grpSpPr>
+        <a:xfrm>
+          <a:off x="0" y="0"/>
+          <a:ext cx="0" cy="0"/>
+          <a:chOff x="0" y="0"/>
+          <a:chExt cx="0" cy="0"/>
+        </a:xfrm>
+      </p:grpSpPr>
+      <p:sp>
+        <p:nvSpPr>
+          <p:cNvPr id="2" name="Slide Image Placeholder 1"/>
+          <p:cNvSpPr>
+            <a:spLocks noGrp="1" noRot="1" noChangeAspect="1"/>
+          </p:cNvSpPr>
+          <p:nvPr>
+            <p:ph type="sldImg"/>
+          </p:nvPr>
+        </p:nvSpPr>
+        <p:spPr/>
+      </p:sp>
+      <p:sp>
+        <p:nvSpPr>
+          <p:cNvPr id="3" name="Notes Placeholder 2"/>
+          <p:cNvSpPr>
+            <a:spLocks noGrp="1"/>
+          </p:cNvSpPr>
+          <p:nvPr>
+            <p:ph type="body" idx="1"/>
+          </p:nvPr>
+        </p:nvSpPr>
+        <p:spPr/>
+        <p:txBody>
+          <a:bodyPr/>
+          <a:lstStyle/>
+          <a:p>
+            <a:r>
+              <a:rPr lang="en-US" dirty="0"/>
+              <a:t>すべての土台は絶対的安心感。「何をやっても、やらなくても大丈夫」「嫌なことをやめても、愛される」。</a:t>
+            </a:r>
+            <a:endParaRPr lang="en-US" dirty="0"/>
+          </a:p>
+        </p:txBody>
+      </p:sp>
+      <p:sp>
+        <p:nvSpPr>
+          <p:cNvPr id="4" name="Slide Number Placeholder 3"/>
+          <p:cNvSpPr>
+            <a:spLocks noGrp="1"/>
+          </p:cNvSpPr>
+          <p:nvPr>
+            <p:ph type="sldNum" sz="quarter" idx="10"/>
+          </p:nvPr>
+        </p:nvSpPr>
+        <p:spPr/>
+        <p:txBody>
+          <a:bodyPr/>
+          <a:lstStyle/>
+          <a:p>
+            <a:fld id="{F7021451-1387-4CA6-816F-3879F97B5CBC}" type="slidenum">
+              <a:rPr lang="en-US"/>
+              <a:t>67</a:t>
+            </a:fld>
+            <a:endParaRPr lang="en-US"/>
+          </a:p>
+        </p:txBody>
+      </p:sp>
+    </p:spTree>
+    <p:extLst>
+      <p:ext uri="{BB962C8B-B14F-4D97-AF65-F5344CB8AC3E}">
+        <p14:creationId xmlns:p14="http://schemas.microsoft.com/office/powerpoint/2010/main" val="1024086991"/>
+      </p:ext>
+    </p:extLst>
+  </p:cSld>
+  <p:clrMapOvr>
+    <a:masterClrMapping/>
+  </p:clrMapOvr>
+</p:notes>
+</file>
+
+<file path=ppt/notesSlides/notesSlide68.xml><?xml version="1.0" encoding="utf-8"?>
+<p:notes xmlns:a="http://schemas.openxmlformats.org/drawingml/2006/main" xmlns:r="http://schemas.openxmlformats.org/officeDocument/2006/relationships" xmlns:p="http://schemas.openxmlformats.org/presentationml/2006/main">
+  <p:cSld>
+    <p:spTree>
+      <p:nvGrpSpPr>
+        <p:cNvPr id="1" name=""/>
+        <p:cNvGrpSpPr/>
+        <p:nvPr/>
+      </p:nvGrpSpPr>
+      <p:grpSpPr>
+        <a:xfrm>
+          <a:off x="0" y="0"/>
+          <a:ext cx="0" cy="0"/>
+          <a:chOff x="0" y="0"/>
+          <a:chExt cx="0" cy="0"/>
+        </a:xfrm>
+      </p:grpSpPr>
+      <p:sp>
+        <p:nvSpPr>
+          <p:cNvPr id="2" name="Slide Image Placeholder 1"/>
+          <p:cNvSpPr>
+            <a:spLocks noGrp="1" noRot="1" noChangeAspect="1"/>
+          </p:cNvSpPr>
+          <p:nvPr>
+            <p:ph type="sldImg"/>
+          </p:nvPr>
+        </p:nvSpPr>
+        <p:spPr/>
+      </p:sp>
+      <p:sp>
+        <p:nvSpPr>
+          <p:cNvPr id="3" name="Notes Placeholder 2"/>
+          <p:cNvSpPr>
+            <a:spLocks noGrp="1"/>
+          </p:cNvSpPr>
+          <p:nvPr>
+            <p:ph type="body" idx="1"/>
+          </p:nvPr>
+        </p:nvSpPr>
+        <p:spPr/>
+        <p:txBody>
+          <a:bodyPr/>
+          <a:lstStyle/>
+          <a:p>
+            <a:r>
+              <a:rPr lang="en-US" dirty="0"/>
+              <a:t>終了。1週間後にLINEで「その後いかがですか？」と連絡する。</a:t>
+            </a:r>
+            <a:endParaRPr lang="en-US" dirty="0"/>
+          </a:p>
+        </p:txBody>
+      </p:sp>
+      <p:sp>
+        <p:nvSpPr>
+          <p:cNvPr id="4" name="Slide Number Placeholder 3"/>
+          <p:cNvSpPr>
+            <a:spLocks noGrp="1"/>
+          </p:cNvSpPr>
+          <p:nvPr>
+            <p:ph type="sldNum" sz="quarter" idx="10"/>
+          </p:nvPr>
+        </p:nvSpPr>
+        <p:spPr/>
+        <p:txBody>
+          <a:bodyPr/>
+          <a:lstStyle/>
+          <a:p>
+            <a:fld id="{F7021451-1387-4CA6-816F-3879F97B5CBC}" type="slidenum">
+              <a:rPr lang="en-US"/>
+              <a:t>68</a:t>
             </a:fld>
             <a:endParaRPr lang="en-US"/>
           </a:p>
@@ -9025,7 +10289,7 @@
                   <a:schemeClr val="tx1"/>
                 </a:solidFill>
               </a:rPr>
-              <a:t>思い込みを</a:t>
+              <a:t>思い込みの</a:t>
             </a:r>
             <a:endParaRPr lang="en-US" sz="1400" dirty="0"/>
           </a:p>
@@ -9039,7 +10303,21 @@
                   <a:schemeClr val="tx1"/>
                 </a:solidFill>
               </a:rPr>
-              <a:t>書き換える</a:t>
+              <a:t>書き換え／</a:t>
+            </a:r>
+            <a:endParaRPr lang="en-US" sz="1400" dirty="0"/>
+          </a:p>
+          <a:p>
+            <a:pPr algn="ctr" indent="0" marL="0">
+              <a:buNone/>
+            </a:pPr>
+            <a:r>
+              <a:rPr lang="en-US" sz="1400" dirty="0">
+                <a:solidFill>
+                  <a:schemeClr val="tx1"/>
+                </a:solidFill>
+              </a:rPr>
+              <a:t>感情の統合</a:t>
             </a:r>
             <a:endParaRPr lang="en-US" sz="1400" dirty="0"/>
           </a:p>
@@ -14895,7 +16173,7 @@
                 <a:ea typeface="Yu Mincho" pitchFamily="34" charset="-122"/>
                 <a:cs typeface="Yu Mincho" pitchFamily="34" charset="-120"/>
               </a:rPr>
-              <a:t>ワーク　思い込みを書き換える</a:t>
+              <a:t>ワークA　思い込みを書き換える</a:t>
             </a:r>
             <a:endParaRPr lang="en-US" sz="3600" dirty="0"/>
           </a:p>
@@ -22140,7 +23418,7 @@
                 <a:ea typeface="Yu Mincho" pitchFamily="34" charset="-122"/>
                 <a:cs typeface="Yu Mincho" pitchFamily="34" charset="-120"/>
               </a:rPr>
-              <a:t>エネルギーで取り除く</a:t>
+              <a:t>ワークB　感情を統合する</a:t>
             </a:r>
             <a:endParaRPr lang="en-US" sz="3600" dirty="0"/>
           </a:p>
@@ -22178,7 +23456,7 @@
                   <a:schemeClr val="tx1"/>
                 </a:solidFill>
               </a:rPr>
-              <a:t>残っている痛みを、やさしく手放していきます（95〜110分）</a:t>
+              <a:t>出てきた感情を、そのまま感じていきます（45〜95分）</a:t>
             </a:r>
             <a:endParaRPr lang="en-US" sz="1600" dirty="0"/>
           </a:p>
@@ -22192,7 +23470,7 @@
                   <a:schemeClr val="tx1"/>
                 </a:solidFill>
               </a:rPr>
-              <a:t>はじめる前に、今の気持ちと胸の感じを確かめます。終わったら、感じたことを言葉にしてみましょう</a:t>
+              <a:t>目を閉じて、ゆっくり息を吐いてください</a:t>
             </a:r>
             <a:endParaRPr lang="en-US" sz="1600" dirty="0"/>
           </a:p>
@@ -22225,21 +23503,127 @@
       </p:grpSpPr>
       <p:sp>
         <p:nvSpPr>
-          <p:cNvPr id="2" name="frame"/>
+          <p:cNvPr id="2" name="misenai_band"/>
           <p:cNvSpPr/>
           <p:nvPr/>
         </p:nvSpPr>
         <p:spPr>
           <a:xfrm>
-            <a:off x="228600" y="137160"/>
-            <a:ext cx="8686800" cy="4526280"/>
-          </a:xfrm>
-          <a:prstGeom prst="rect">
-            <a:avLst/>
-          </a:prstGeom>
-          <a:ln w="12700">
+            <a:off x="457200" y="182880"/>
+            <a:ext cx="8229600" cy="502920"/>
+          </a:xfrm>
+          <a:prstGeom prst="roundRect">
+            <a:avLst>
+              <a:gd name="adj" fmla="val 18182"/>
+            </a:avLst>
+          </a:prstGeom>
+          <a:solidFill>
+            <a:srgbClr val="8C6A34"/>
+          </a:solidFill>
+          <a:ln/>
+        </p:spPr>
+        <p:txBody>
+          <a:bodyPr/>
+          <a:p/>
+        </p:txBody>
+      </p:sp>
+      <p:sp>
+        <p:nvSpPr>
+          <p:cNvPr id="3" name="misenai"/>
+          <p:cNvSpPr txBox="1"/>
+          <p:nvPr/>
+        </p:nvSpPr>
+        <p:spPr>
+          <a:xfrm>
+            <a:off x="457200" y="182880"/>
+            <a:ext cx="8229600" cy="502920"/>
+          </a:xfrm>
+          <a:prstGeom prst="rect">
+            <a:avLst/>
+          </a:prstGeom>
+          <a:noFill/>
+          <a:ln/>
+        </p:spPr>
+        <p:txBody>
+          <a:bodyPr wrap="square" lIns="0" tIns="0" rIns="0" bIns="0" rtlCol="0" anchor="ctr"/>
+          <a:lstStyle/>
+          <a:p>
+            <a:pPr algn="ctr" indent="0" marL="0">
+              <a:buNone/>
+            </a:pPr>
+            <a:r>
+              <a:rPr lang="en-US" sz="1800" b="1" dirty="0">
+                <a:solidFill>
+                  <a:schemeClr val="bg1"/>
+                </a:solidFill>
+              </a:rPr>
+              <a:t>【共有停止】</a:t>
+            </a:r>
+            <a:endParaRPr lang="en-US" sz="1800" dirty="0"/>
+          </a:p>
+        </p:txBody>
+      </p:sp>
+      <p:sp>
+        <p:nvSpPr>
+          <p:cNvPr id="4" name="facil_title"/>
+          <p:cNvSpPr txBox="1"/>
+          <p:nvPr/>
+        </p:nvSpPr>
+        <p:spPr>
+          <a:xfrm>
+            <a:off x="457200" y="777240"/>
+            <a:ext cx="8229600" cy="411480"/>
+          </a:xfrm>
+          <a:prstGeom prst="rect">
+            <a:avLst/>
+          </a:prstGeom>
+          <a:noFill/>
+          <a:ln/>
+        </p:spPr>
+        <p:txBody>
+          <a:bodyPr wrap="square" lIns="0" tIns="0" rIns="0" bIns="0" rtlCol="0" anchor="t"/>
+          <a:lstStyle/>
+          <a:p>
+            <a:pPr indent="0" marL="0">
+              <a:buNone/>
+            </a:pPr>
+            <a:r>
+              <a:rPr lang="en-US" sz="2200" b="1" dirty="0">
+                <a:solidFill>
+                  <a:schemeClr val="accent2"/>
+                </a:solidFill>
+                <a:latin typeface="Yu Mincho" pitchFamily="34" charset="0"/>
+                <a:ea typeface="Yu Mincho" pitchFamily="34" charset="-122"/>
+                <a:cs typeface="Yu Mincho" pitchFamily="34" charset="-120"/>
+              </a:rPr>
+              <a:t>感情の統合（誘導）の進め方</a:t>
+            </a:r>
+            <a:endParaRPr lang="en-US" sz="2200" dirty="0"/>
+          </a:p>
+        </p:txBody>
+      </p:sp>
+      <p:sp>
+        <p:nvSpPr>
+          <p:cNvPr id="5" name="facil_card"/>
+          <p:cNvSpPr/>
+          <p:nvPr/>
+        </p:nvSpPr>
+        <p:spPr>
+          <a:xfrm>
+            <a:off x="457200" y="1188720"/>
+            <a:ext cx="5394960" cy="3383280"/>
+          </a:xfrm>
+          <a:prstGeom prst="roundRect">
+            <a:avLst>
+              <a:gd name="adj" fmla="val 3243"/>
+            </a:avLst>
+          </a:prstGeom>
+          <a:solidFill>
+            <a:srgbClr val="FFF8E8"/>
+          </a:solidFill>
+          <a:ln w="9525">
             <a:solidFill>
-              <a:srgbClr val="B08A4E"/>
+              <a:srgbClr val="E9D9B6"/>
             </a:solidFill>
             <a:prstDash val="solid"/>
           </a:ln>
@@ -22251,14 +23635,14 @@
       </p:sp>
       <p:sp>
         <p:nvSpPr>
-          <p:cNvPr id="3" name="qlabel"/>
+          <p:cNvPr id="6" name="facil_list"/>
           <p:cNvSpPr txBox="1"/>
           <p:nvPr/>
         </p:nvSpPr>
         <p:spPr>
           <a:xfrm>
-            <a:off x="457200" y="320040"/>
-            <a:ext cx="8229600" cy="365760"/>
+            <a:off x="594360" y="1280160"/>
+            <a:ext cx="5120640" cy="3200400"/>
           </a:xfrm>
           <a:prstGeom prst="rect">
             <a:avLst/>
@@ -22267,134 +23651,159 @@
           <a:ln/>
         </p:spPr>
         <p:txBody>
-          <a:bodyPr wrap="square" lIns="0" tIns="0" rIns="0" bIns="0" rtlCol="0" anchor="t"/>
-          <a:lstStyle/>
-          <a:p>
-            <a:pPr algn="ctr" indent="0" marL="0">
-              <a:buNone/>
-            </a:pPr>
-            <a:r>
-              <a:rPr lang="en-US" sz="1300" b="1" dirty="0">
-                <a:solidFill>
-                  <a:schemeClr val="accent2"/>
-                </a:solidFill>
-              </a:rPr>
-              <a:t>ふり返り</a:t>
-            </a:r>
-            <a:endParaRPr lang="en-US" sz="1300" dirty="0"/>
-          </a:p>
-        </p:txBody>
-      </p:sp>
-      <p:sp>
-        <p:nvSpPr>
-          <p:cNvPr id="4" name="Text 0"/>
-          <p:cNvSpPr/>
-          <p:nvPr>
-            <p:ph idx="100" type="title" hasCustomPrompt="1"/>
-          </p:nvPr>
-        </p:nvSpPr>
-        <p:spPr>
-          <a:xfrm>
-            <a:off x="914400" y="1554480"/>
-            <a:ext cx="7315200" cy="1554480"/>
-          </a:xfrm>
-          <a:prstGeom prst="rect">
-            <a:avLst/>
-          </a:prstGeom>
-          <a:noFill/>
-          <a:ln/>
-        </p:spPr>
-        <p:txBody>
-          <a:bodyPr wrap="square" rtlCol="0" anchor="ctr"/>
-          <a:lstStyle/>
-          <a:p>
-            <a:pPr algn="ctr" indent="0" marL="0">
-              <a:buNone/>
-            </a:pPr>
-            <a:r>
-              <a:rPr lang="en-US" sz="3200" b="1" dirty="0">
-                <a:solidFill>
-                  <a:schemeClr val="tx2"/>
-                </a:solidFill>
-                <a:latin typeface="Yu Mincho" pitchFamily="34" charset="0"/>
-                <a:ea typeface="Yu Mincho" pitchFamily="34" charset="-122"/>
-                <a:cs typeface="Yu Mincho" pitchFamily="34" charset="-120"/>
-              </a:rPr>
-              <a:t>最初に「1〜10」で聞いた</a:t>
-            </a:r>
-            <a:endParaRPr lang="en-US" sz="3200" dirty="0"/>
-          </a:p>
-          <a:p>
-            <a:pPr algn="ctr" indent="0" marL="0">
-              <a:buNone/>
-            </a:pPr>
-            <a:r>
-              <a:rPr lang="en-US" sz="3200" b="1" dirty="0">
-                <a:solidFill>
-                  <a:schemeClr val="tx2"/>
-                </a:solidFill>
-                <a:latin typeface="Yu Mincho" pitchFamily="34" charset="0"/>
-                <a:ea typeface="Yu Mincho" pitchFamily="34" charset="-122"/>
-                <a:cs typeface="Yu Mincho" pitchFamily="34" charset="-120"/>
-              </a:rPr>
-              <a:t>胸の痛みは、</a:t>
-            </a:r>
-            <a:endParaRPr lang="en-US" sz="3200" dirty="0"/>
-          </a:p>
-          <a:p>
-            <a:pPr algn="ctr" indent="0" marL="0">
-              <a:buNone/>
-            </a:pPr>
-            <a:r>
-              <a:rPr lang="en-US" sz="3200" b="1" dirty="0">
-                <a:solidFill>
-                  <a:schemeClr val="tx2"/>
-                </a:solidFill>
-                <a:latin typeface="Yu Mincho" pitchFamily="34" charset="0"/>
-                <a:ea typeface="Yu Mincho" pitchFamily="34" charset="-122"/>
-                <a:cs typeface="Yu Mincho" pitchFamily="34" charset="-120"/>
-              </a:rPr>
-              <a:t>いまどのくらいですか？</a:t>
-            </a:r>
-            <a:endParaRPr lang="en-US" sz="3200" dirty="0"/>
-          </a:p>
-        </p:txBody>
-      </p:sp>
-      <p:sp>
-        <p:nvSpPr>
-          <p:cNvPr id="5" name="Text 0"/>
-          <p:cNvSpPr/>
-          <p:nvPr>
-            <p:ph idx="101" type="body" hasCustomPrompt="1"/>
-          </p:nvPr>
-        </p:nvSpPr>
-        <p:spPr>
-          <a:xfrm>
-            <a:off x="914400" y="3200400"/>
-            <a:ext cx="7315200" cy="731520"/>
-          </a:xfrm>
-          <a:prstGeom prst="rect">
-            <a:avLst/>
-          </a:prstGeom>
-          <a:noFill/>
-          <a:ln/>
-        </p:spPr>
-        <p:txBody>
-          <a:bodyPr wrap="square" rtlCol="0" anchor="t"/>
-          <a:lstStyle/>
-          <a:p>
-            <a:pPr algn="ctr" indent="0" marL="0">
-              <a:buNone/>
-            </a:pPr>
-            <a:r>
-              <a:rPr lang="en-US" sz="1500" dirty="0">
-                <a:solidFill>
-                  <a:schemeClr val="accent2"/>
-                </a:solidFill>
-              </a:rPr>
-              <a:t>はじめ：＿＿　→　いま：＿＿</a:t>
-            </a:r>
-            <a:endParaRPr lang="en-US" sz="1500" dirty="0"/>
+          <a:bodyPr wrap="square" lIns="1016" tIns="1016" rIns="1016" bIns="1016" rtlCol="0" anchor="t"/>
+          <a:lstStyle/>
+          <a:p>
+            <a:pPr marL="342900" indent="-342900">
+              <a:spcAft>
+                <a:spcPts val="300"/>
+              </a:spcAft>
+              <a:buSzPct val="100000"/>
+              <a:buFont typeface="+mj-lt"/>
+              <a:buAutoNum type="arabicPeriod" startAt="1"/>
+            </a:pPr>
+            <a:r>
+              <a:rPr lang="en-US" sz="1200" dirty="0">
+                <a:solidFill>
+                  <a:schemeClr val="tx1"/>
+                </a:solidFill>
+              </a:rPr>
+              <a:t>出てきた感情を否定しない。ポジティブに変えない</a:t>
+            </a:r>
+            <a:endParaRPr lang="en-US" sz="1200" dirty="0"/>
+          </a:p>
+          <a:p>
+            <a:pPr marL="342900" indent="-342900">
+              <a:spcAft>
+                <a:spcPts val="300"/>
+              </a:spcAft>
+              <a:buSzPct val="100000"/>
+              <a:buFont typeface="+mj-lt"/>
+              <a:buAutoNum type="arabicPeriod" startAt="1"/>
+            </a:pPr>
+            <a:r>
+              <a:rPr lang="en-US" sz="1200" dirty="0">
+                <a:solidFill>
+                  <a:schemeClr val="tx1"/>
+                </a:solidFill>
+              </a:rPr>
+              <a:t>その感情の池に入っていく → 池の色 → 入れそうか</a:t>
+            </a:r>
+            <a:endParaRPr lang="en-US" sz="1200" dirty="0"/>
+          </a:p>
+          <a:p>
+            <a:pPr marL="342900" indent="-342900">
+              <a:spcAft>
+                <a:spcPts val="300"/>
+              </a:spcAft>
+              <a:buSzPct val="100000"/>
+              <a:buFont typeface="+mj-lt"/>
+              <a:buAutoNum type="arabicPeriod" startAt="1"/>
+            </a:pPr>
+            <a:r>
+              <a:rPr lang="en-US" sz="1200" dirty="0">
+                <a:solidFill>
+                  <a:schemeClr val="tx1"/>
+                </a:solidFill>
+              </a:rPr>
+              <a:t>入れたら「何が見えますか？」</a:t>
+            </a:r>
+            <a:endParaRPr lang="en-US" sz="1200" dirty="0"/>
+          </a:p>
+          <a:p>
+            <a:pPr marL="342900" indent="-342900">
+              <a:spcAft>
+                <a:spcPts val="300"/>
+              </a:spcAft>
+              <a:buSzPct val="100000"/>
+              <a:buFont typeface="+mj-lt"/>
+              <a:buAutoNum type="arabicPeriod" startAt="1"/>
+            </a:pPr>
+            <a:r>
+              <a:rPr lang="en-US" sz="1200" dirty="0">
+                <a:solidFill>
+                  <a:schemeClr val="tx1"/>
+                </a:solidFill>
+              </a:rPr>
+              <a:t>「先に進んでみましょう」を、見るものがなくなるまで繰り返す</a:t>
+            </a:r>
+            <a:endParaRPr lang="en-US" sz="1200" dirty="0"/>
+          </a:p>
+          <a:p>
+            <a:pPr marL="342900" indent="-342900">
+              <a:spcAft>
+                <a:spcPts val="300"/>
+              </a:spcAft>
+              <a:buSzPct val="100000"/>
+              <a:buFont typeface="+mj-lt"/>
+              <a:buAutoNum type="arabicPeriod" startAt="1"/>
+            </a:pPr>
+            <a:r>
+              <a:rPr lang="en-US" sz="1200" dirty="0">
+                <a:solidFill>
+                  <a:schemeClr val="tx1"/>
+                </a:solidFill>
+              </a:rPr>
+              <a:t>見るものがなくなったら、入ってきた入口を見る</a:t>
+            </a:r>
+            <a:endParaRPr lang="en-US" sz="1200" dirty="0"/>
+          </a:p>
+          <a:p>
+            <a:pPr marL="342900" indent="-342900">
+              <a:spcAft>
+                <a:spcPts val="300"/>
+              </a:spcAft>
+              <a:buSzPct val="100000"/>
+              <a:buFont typeface="+mj-lt"/>
+              <a:buAutoNum type="arabicPeriod" startAt="1"/>
+            </a:pPr>
+            <a:r>
+              <a:rPr lang="en-US" sz="1200" dirty="0">
+                <a:solidFill>
+                  <a:schemeClr val="tx1"/>
+                </a:solidFill>
+              </a:rPr>
+              <a:t>出てきたら、今度は理想の池に入る（同じ流れで）</a:t>
+            </a:r>
+            <a:endParaRPr lang="en-US" sz="1200" dirty="0"/>
+          </a:p>
+          <a:p>
+            <a:pPr marL="342900" indent="-342900">
+              <a:spcAft>
+                <a:spcPts val="300"/>
+              </a:spcAft>
+              <a:buSzPct val="100000"/>
+              <a:buFont typeface="+mj-lt"/>
+              <a:buAutoNum type="arabicPeriod" startAt="1"/>
+            </a:pPr>
+            <a:r>
+              <a:rPr lang="en-US" sz="1200" dirty="0">
+                <a:solidFill>
+                  <a:schemeClr val="tx1"/>
+                </a:solidFill>
+              </a:rPr>
+              <a:t>入れない・苦しい時は止めて、息を吐き切る（池の外から見るだけでもOK）</a:t>
+            </a:r>
+            <a:endParaRPr lang="en-US" sz="1200" dirty="0"/>
+          </a:p>
+          <a:p>
+            <a:pPr marL="342900" indent="-342900">
+              <a:spcAft>
+                <a:spcPts val="300"/>
+              </a:spcAft>
+              <a:buSzPct val="100000"/>
+              <a:buFont typeface="+mj-lt"/>
+              <a:buAutoNum type="arabicPeriod" startAt="1"/>
+            </a:pPr>
+            <a:r>
+              <a:rPr lang="en-US" sz="1200" dirty="0">
+                <a:solidFill>
+                  <a:schemeClr val="tx1"/>
+                </a:solidFill>
+              </a:rPr>
+              <a:t>胸の痛みが動いたら、そのまま感じてもらう</a:t>
+            </a:r>
+            <a:endParaRPr lang="en-US" sz="1200" dirty="0"/>
           </a:p>
         </p:txBody>
       </p:sp>
@@ -22752,7 +24161,7 @@
                   <a:schemeClr val="accent2"/>
                 </a:solidFill>
               </a:rPr>
-              <a:t>ふり返り</a:t>
+              <a:t>感情の統合</a:t>
             </a:r>
             <a:endParaRPr lang="en-US" sz="1300" dirty="0"/>
           </a:p>
@@ -22793,7 +24202,7 @@
                 <a:ea typeface="Yu Mincho" pitchFamily="34" charset="-122"/>
                 <a:cs typeface="Yu Mincho" pitchFamily="34" charset="-120"/>
               </a:rPr>
-              <a:t>今日、いちばん</a:t>
+              <a:t>出てきた感情の</a:t>
             </a:r>
             <a:endParaRPr lang="en-US" sz="3200" dirty="0"/>
           </a:p>
@@ -22810,64 +24219,9 @@
                 <a:ea typeface="Yu Mincho" pitchFamily="34" charset="-122"/>
                 <a:cs typeface="Yu Mincho" pitchFamily="34" charset="-120"/>
               </a:rPr>
-              <a:t>変わったと感じることは</a:t>
+              <a:t>池に入っていきます</a:t>
             </a:r>
             <a:endParaRPr lang="en-US" sz="3200" dirty="0"/>
-          </a:p>
-          <a:p>
-            <a:pPr algn="ctr" indent="0" marL="0">
-              <a:buNone/>
-            </a:pPr>
-            <a:r>
-              <a:rPr lang="en-US" sz="3200" b="1" dirty="0">
-                <a:solidFill>
-                  <a:schemeClr val="tx2"/>
-                </a:solidFill>
-                <a:latin typeface="Yu Mincho" pitchFamily="34" charset="0"/>
-                <a:ea typeface="Yu Mincho" pitchFamily="34" charset="-122"/>
-                <a:cs typeface="Yu Mincho" pitchFamily="34" charset="-120"/>
-              </a:rPr>
-              <a:t>何ですか？</a:t>
-            </a:r>
-            <a:endParaRPr lang="en-US" sz="3200" dirty="0"/>
-          </a:p>
-        </p:txBody>
-      </p:sp>
-      <p:sp>
-        <p:nvSpPr>
-          <p:cNvPr id="5" name="Text 0"/>
-          <p:cNvSpPr/>
-          <p:nvPr>
-            <p:ph idx="101" type="body" hasCustomPrompt="1"/>
-          </p:nvPr>
-        </p:nvSpPr>
-        <p:spPr>
-          <a:xfrm>
-            <a:off x="914400" y="3200400"/>
-            <a:ext cx="7315200" cy="731520"/>
-          </a:xfrm>
-          <a:prstGeom prst="rect">
-            <a:avLst/>
-          </a:prstGeom>
-          <a:noFill/>
-          <a:ln/>
-        </p:spPr>
-        <p:txBody>
-          <a:bodyPr wrap="square" rtlCol="0" anchor="t"/>
-          <a:lstStyle/>
-          <a:p>
-            <a:pPr algn="ctr" indent="0" marL="0">
-              <a:buNone/>
-            </a:pPr>
-            <a:r>
-              <a:rPr lang="en-US" sz="1500" dirty="0">
-                <a:solidFill>
-                  <a:schemeClr val="accent2"/>
-                </a:solidFill>
-              </a:rPr>
-              <a:t>それが、今日持ち帰るものです</a:t>
-            </a:r>
-            <a:endParaRPr lang="en-US" sz="1500" dirty="0"/>
           </a:p>
         </p:txBody>
       </p:sp>
@@ -22997,7 +24351,7 @@
                   <a:schemeClr val="accent2"/>
                 </a:solidFill>
               </a:rPr>
-              <a:t>これから</a:t>
+              <a:t>感情の統合</a:t>
             </a:r>
             <a:endParaRPr lang="en-US" sz="1300" dirty="0"/>
           </a:p>
@@ -23038,7 +24392,7 @@
                 <a:ea typeface="Yu Mincho" pitchFamily="34" charset="-122"/>
                 <a:cs typeface="Yu Mincho" pitchFamily="34" charset="-120"/>
               </a:rPr>
-              <a:t>次に同じ感情が出てきたら、</a:t>
+              <a:t>その池は、</a:t>
             </a:r>
             <a:endParaRPr lang="en-US" sz="3200" dirty="0"/>
           </a:p>
@@ -23055,24 +24409,7 @@
                 <a:ea typeface="Yu Mincho" pitchFamily="34" charset="-122"/>
                 <a:cs typeface="Yu Mincho" pitchFamily="34" charset="-120"/>
               </a:rPr>
-              <a:t>自分にどんな言葉を</a:t>
-            </a:r>
-            <a:endParaRPr lang="en-US" sz="3200" dirty="0"/>
-          </a:p>
-          <a:p>
-            <a:pPr algn="ctr" indent="0" marL="0">
-              <a:buNone/>
-            </a:pPr>
-            <a:r>
-              <a:rPr lang="en-US" sz="3200" b="1" dirty="0">
-                <a:solidFill>
-                  <a:schemeClr val="tx2"/>
-                </a:solidFill>
-                <a:latin typeface="Yu Mincho" pitchFamily="34" charset="0"/>
-                <a:ea typeface="Yu Mincho" pitchFamily="34" charset="-122"/>
-                <a:cs typeface="Yu Mincho" pitchFamily="34" charset="-120"/>
-              </a:rPr>
-              <a:t>かけてあげたいですか？</a:t>
+              <a:t>色に見えますか？</a:t>
             </a:r>
             <a:endParaRPr lang="en-US" sz="3200" dirty="0"/>
           </a:p>
@@ -23110,7 +24447,7 @@
                   <a:schemeClr val="accent2"/>
                 </a:solidFill>
               </a:rPr>
-              <a:t>気づいたら、責めずに見つめる。そして、今の自分で選び直す</a:t>
+              <a:t>見えたら、どんな色ですか？</a:t>
             </a:r>
             <a:endParaRPr lang="en-US" sz="1500" dirty="0"/>
           </a:p>
@@ -23188,14 +24525,40 @@
       </p:grpSpPr>
       <p:sp>
         <p:nvSpPr>
-          <p:cNvPr id="2" name="magic_main"/>
+          <p:cNvPr id="2" name="frame"/>
+          <p:cNvSpPr/>
+          <p:nvPr/>
+        </p:nvSpPr>
+        <p:spPr>
+          <a:xfrm>
+            <a:off x="228600" y="137160"/>
+            <a:ext cx="8686800" cy="4526280"/>
+          </a:xfrm>
+          <a:prstGeom prst="rect">
+            <a:avLst/>
+          </a:prstGeom>
+          <a:ln w="12700">
+            <a:solidFill>
+              <a:srgbClr val="B08A4E"/>
+            </a:solidFill>
+            <a:prstDash val="solid"/>
+          </a:ln>
+        </p:spPr>
+        <p:txBody>
+          <a:bodyPr/>
+          <a:p/>
+        </p:txBody>
+      </p:sp>
+      <p:sp>
+        <p:nvSpPr>
+          <p:cNvPr id="3" name="qlabel"/>
           <p:cNvSpPr txBox="1"/>
           <p:nvPr/>
         </p:nvSpPr>
         <p:spPr>
           <a:xfrm>
-            <a:off x="548640" y="1005840"/>
-            <a:ext cx="8046720" cy="2103120"/>
+            <a:off x="457200" y="320040"/>
+            <a:ext cx="8229600" cy="365760"/>
           </a:xfrm>
           <a:prstGeom prst="rect">
             <a:avLst/>
@@ -23204,14 +24567,52 @@
           <a:ln/>
         </p:spPr>
         <p:txBody>
-          <a:bodyPr wrap="square" lIns="1016" tIns="1016" rIns="1016" bIns="1016" rtlCol="0" anchor="ctr"/>
+          <a:bodyPr wrap="square" lIns="0" tIns="0" rIns="0" bIns="0" rtlCol="0" anchor="t"/>
           <a:lstStyle/>
           <a:p>
             <a:pPr algn="ctr" indent="0" marL="0">
               <a:buNone/>
             </a:pPr>
             <a:r>
-              <a:rPr lang="en-US" sz="3400" b="1" dirty="0">
+              <a:rPr lang="en-US" sz="1300" b="1" dirty="0">
+                <a:solidFill>
+                  <a:schemeClr val="accent2"/>
+                </a:solidFill>
+              </a:rPr>
+              <a:t>感情の統合</a:t>
+            </a:r>
+            <a:endParaRPr lang="en-US" sz="1300" dirty="0"/>
+          </a:p>
+        </p:txBody>
+      </p:sp>
+      <p:sp>
+        <p:nvSpPr>
+          <p:cNvPr id="4" name="Text 0"/>
+          <p:cNvSpPr/>
+          <p:nvPr>
+            <p:ph idx="100" type="title" hasCustomPrompt="1"/>
+          </p:nvPr>
+        </p:nvSpPr>
+        <p:spPr>
+          <a:xfrm>
+            <a:off x="914400" y="1554480"/>
+            <a:ext cx="7315200" cy="1554480"/>
+          </a:xfrm>
+          <a:prstGeom prst="rect">
+            <a:avLst/>
+          </a:prstGeom>
+          <a:noFill/>
+          <a:ln/>
+        </p:spPr>
+        <p:txBody>
+          <a:bodyPr wrap="square" rtlCol="0" anchor="ctr"/>
+          <a:lstStyle/>
+          <a:p>
+            <a:pPr algn="ctr" indent="0" marL="0">
+              <a:buNone/>
+            </a:pPr>
+            <a:r>
+              <a:rPr lang="en-US" sz="3200" b="1" dirty="0">
                 <a:solidFill>
                   <a:schemeClr val="tx2"/>
                 </a:solidFill>
@@ -23219,16 +24620,16 @@
                 <a:ea typeface="Yu Mincho" pitchFamily="34" charset="-122"/>
                 <a:cs typeface="Yu Mincho" pitchFamily="34" charset="-120"/>
               </a:rPr>
-              <a:t>根深いものは、</a:t>
-            </a:r>
-            <a:endParaRPr lang="en-US" sz="3400" dirty="0"/>
+              <a:t>入ってみること、</a:t>
+            </a:r>
+            <a:endParaRPr lang="en-US" sz="3200" dirty="0"/>
           </a:p>
           <a:p>
             <a:pPr algn="ctr" indent="0" marL="0">
               <a:buNone/>
             </a:pPr>
             <a:r>
-              <a:rPr lang="en-US" sz="3400" b="1" dirty="0">
+              <a:rPr lang="en-US" sz="3200" b="1" dirty="0">
                 <a:solidFill>
                   <a:schemeClr val="tx2"/>
                 </a:solidFill>
@@ -23236,39 +24637,24 @@
                 <a:ea typeface="Yu Mincho" pitchFamily="34" charset="-122"/>
                 <a:cs typeface="Yu Mincho" pitchFamily="34" charset="-120"/>
               </a:rPr>
-              <a:t>何度も何度も</a:t>
-            </a:r>
-            <a:endParaRPr lang="en-US" sz="3400" dirty="0"/>
-          </a:p>
-          <a:p>
-            <a:pPr algn="ctr" indent="0" marL="0">
-              <a:buNone/>
-            </a:pPr>
-            <a:r>
-              <a:rPr lang="en-US" sz="3400" b="1" dirty="0">
-                <a:solidFill>
-                  <a:schemeClr val="tx2"/>
-                </a:solidFill>
-                <a:latin typeface="Yu Mincho" pitchFamily="34" charset="0"/>
-                <a:ea typeface="Yu Mincho" pitchFamily="34" charset="-122"/>
-                <a:cs typeface="Yu Mincho" pitchFamily="34" charset="-120"/>
-              </a:rPr>
-              <a:t>自分に魔法をかけて、とっていく</a:t>
-            </a:r>
-            <a:endParaRPr lang="en-US" sz="3400" dirty="0"/>
-          </a:p>
-        </p:txBody>
-      </p:sp>
-      <p:sp>
-        <p:nvSpPr>
-          <p:cNvPr id="3" name="magic_sub"/>
-          <p:cNvSpPr txBox="1"/>
-          <p:nvPr/>
-        </p:nvSpPr>
-        <p:spPr>
-          <a:xfrm>
-            <a:off x="731520" y="3246120"/>
-            <a:ext cx="7680960" cy="548640"/>
+              <a:t>できそうですか？</a:t>
+            </a:r>
+            <a:endParaRPr lang="en-US" sz="3200" dirty="0"/>
+          </a:p>
+        </p:txBody>
+      </p:sp>
+      <p:sp>
+        <p:nvSpPr>
+          <p:cNvPr id="5" name="Text 0"/>
+          <p:cNvSpPr/>
+          <p:nvPr>
+            <p:ph idx="101" type="body" hasCustomPrompt="1"/>
+          </p:nvPr>
+        </p:nvSpPr>
+        <p:spPr>
+          <a:xfrm>
+            <a:off x="914400" y="3200400"/>
+            <a:ext cx="7315200" cy="731520"/>
           </a:xfrm>
           <a:prstGeom prst="rect">
             <a:avLst/>
@@ -23277,21 +24663,66 @@
           <a:ln/>
         </p:spPr>
         <p:txBody>
-          <a:bodyPr wrap="square" lIns="1016" tIns="1016" rIns="1016" bIns="1016" rtlCol="0" anchor="ctr"/>
+          <a:bodyPr wrap="square" rtlCol="0" anchor="t"/>
           <a:lstStyle/>
           <a:p>
             <a:pPr algn="ctr" indent="0" marL="0">
               <a:buNone/>
             </a:pPr>
             <a:r>
-              <a:rPr lang="en-US" sz="1800" b="1" dirty="0">
-                <a:solidFill>
-                  <a:schemeClr val="tx2"/>
-                </a:solidFill>
-              </a:rPr>
-              <a:t>あなたが自分にかける言葉が、魔法になります</a:t>
-            </a:r>
-            <a:endParaRPr lang="en-US" sz="1800" dirty="0"/>
+              <a:rPr lang="en-US" sz="1500" dirty="0">
+                <a:solidFill>
+                  <a:schemeClr val="accent2"/>
+                </a:solidFill>
+              </a:rPr>
+              <a:t>無理に入らなくて大丈夫です</a:t>
+            </a:r>
+            <a:endParaRPr lang="en-US" sz="1500" dirty="0"/>
+          </a:p>
+        </p:txBody>
+      </p:sp>
+      <p:sp>
+        <p:nvSpPr>
+          <p:cNvPr id="25" name="Slide Number Placeholder 0"/>
+          <p:cNvSpPr>
+            <a:spLocks noGrp="1"/>
+          </p:cNvSpPr>
+          <p:nvPr>
+            <p:ph type="sldNum" sz="quarter" idx="4294967295"/>
+          </p:nvPr>
+        </p:nvSpPr>
+        <p:spPr>
+          <a:xfrm>
+            <a:off x="8229600" y="4754880"/>
+            <a:ext cx="457200" cy="274320"/>
+          </a:xfrm>
+          <a:prstGeom prst="rect">
+            <a:avLst/>
+          </a:prstGeom>
+          <a:extLst>
+            <a:ext uri="{C572A759-6A51-4108-AA02-DFA0A04FC94B}">
+              <ma14:wrappingTextBoxFlag xmlns:ma14="http://schemas.microsoft.com/office/mac/drawingml/2011/main" val="0"/>
+            </a:ext>
+          </a:extLst>
+        </p:spPr>
+        <p:txBody>
+          <a:bodyPr/>
+          <a:lstStyle>
+            <a:lvl1pPr>
+              <a:defRPr sz="900">
+                <a:solidFill>
+                  <a:srgbClr val="B08A4E"/>
+                </a:solidFill>
+              </a:defRPr>
+            </a:lvl1pPr>
+          </a:lstStyle>
+          <a:p>
+            <a:pPr algn="r"/>
+            <a:fld id="{F7021451-1387-4CA6-816F-3879F97B5CBC}" type="slidenum">
+              <a:rPr b="0" lang="en-US"/>
+              <a:t>52</a:t>
+            </a:fld>
+            <a:endParaRPr lang="en-US"/>
           </a:p>
         </p:txBody>
       </p:sp>
@@ -23306,6 +24737,3079 @@
 <file path=ppt/slides/slide53.xml><?xml version="1.0" encoding="utf-8"?>
 <p:sld xmlns:a="http://schemas.openxmlformats.org/drawingml/2006/main" xmlns:r="http://schemas.openxmlformats.org/officeDocument/2006/relationships" xmlns:p="http://schemas.openxmlformats.org/presentationml/2006/main">
   <p:cSld name="Slide 53">
+    <p:spTree>
+      <p:nvGrpSpPr>
+        <p:cNvPr id="1" name=""/>
+        <p:cNvGrpSpPr/>
+        <p:nvPr/>
+      </p:nvGrpSpPr>
+      <p:grpSpPr>
+        <a:xfrm>
+          <a:off x="0" y="0"/>
+          <a:ext cx="0" cy="0"/>
+          <a:chOff x="0" y="0"/>
+          <a:chExt cx="0" cy="0"/>
+        </a:xfrm>
+      </p:grpSpPr>
+      <p:sp>
+        <p:nvSpPr>
+          <p:cNvPr id="2" name="frame"/>
+          <p:cNvSpPr/>
+          <p:nvPr/>
+        </p:nvSpPr>
+        <p:spPr>
+          <a:xfrm>
+            <a:off x="228600" y="137160"/>
+            <a:ext cx="8686800" cy="4526280"/>
+          </a:xfrm>
+          <a:prstGeom prst="rect">
+            <a:avLst/>
+          </a:prstGeom>
+          <a:ln w="12700">
+            <a:solidFill>
+              <a:srgbClr val="B08A4E"/>
+            </a:solidFill>
+            <a:prstDash val="solid"/>
+          </a:ln>
+        </p:spPr>
+        <p:txBody>
+          <a:bodyPr/>
+          <a:p/>
+        </p:txBody>
+      </p:sp>
+      <p:sp>
+        <p:nvSpPr>
+          <p:cNvPr id="3" name="qlabel"/>
+          <p:cNvSpPr txBox="1"/>
+          <p:nvPr/>
+        </p:nvSpPr>
+        <p:spPr>
+          <a:xfrm>
+            <a:off x="457200" y="320040"/>
+            <a:ext cx="8229600" cy="365760"/>
+          </a:xfrm>
+          <a:prstGeom prst="rect">
+            <a:avLst/>
+          </a:prstGeom>
+          <a:noFill/>
+          <a:ln/>
+        </p:spPr>
+        <p:txBody>
+          <a:bodyPr wrap="square" lIns="0" tIns="0" rIns="0" bIns="0" rtlCol="0" anchor="t"/>
+          <a:lstStyle/>
+          <a:p>
+            <a:pPr algn="ctr" indent="0" marL="0">
+              <a:buNone/>
+            </a:pPr>
+            <a:r>
+              <a:rPr lang="en-US" sz="1300" b="1" dirty="0">
+                <a:solidFill>
+                  <a:schemeClr val="accent2"/>
+                </a:solidFill>
+              </a:rPr>
+              <a:t>感情の統合</a:t>
+            </a:r>
+            <a:endParaRPr lang="en-US" sz="1300" dirty="0"/>
+          </a:p>
+        </p:txBody>
+      </p:sp>
+      <p:sp>
+        <p:nvSpPr>
+          <p:cNvPr id="4" name="Text 0"/>
+          <p:cNvSpPr/>
+          <p:nvPr>
+            <p:ph idx="100" type="title" hasCustomPrompt="1"/>
+          </p:nvPr>
+        </p:nvSpPr>
+        <p:spPr>
+          <a:xfrm>
+            <a:off x="914400" y="1554480"/>
+            <a:ext cx="7315200" cy="1554480"/>
+          </a:xfrm>
+          <a:prstGeom prst="rect">
+            <a:avLst/>
+          </a:prstGeom>
+          <a:noFill/>
+          <a:ln/>
+        </p:spPr>
+        <p:txBody>
+          <a:bodyPr wrap="square" rtlCol="0" anchor="ctr"/>
+          <a:lstStyle/>
+          <a:p>
+            <a:pPr algn="ctr" indent="0" marL="0">
+              <a:buNone/>
+            </a:pPr>
+            <a:r>
+              <a:rPr lang="en-US" sz="3200" b="1" dirty="0">
+                <a:solidFill>
+                  <a:schemeClr val="tx2"/>
+                </a:solidFill>
+                <a:latin typeface="Yu Mincho" pitchFamily="34" charset="0"/>
+                <a:ea typeface="Yu Mincho" pitchFamily="34" charset="-122"/>
+                <a:cs typeface="Yu Mincho" pitchFamily="34" charset="-120"/>
+              </a:rPr>
+              <a:t>池に入れたら、</a:t>
+            </a:r>
+            <a:endParaRPr lang="en-US" sz="3200" dirty="0"/>
+          </a:p>
+          <a:p>
+            <a:pPr algn="ctr" indent="0" marL="0">
+              <a:buNone/>
+            </a:pPr>
+            <a:r>
+              <a:rPr lang="en-US" sz="3200" b="1" dirty="0">
+                <a:solidFill>
+                  <a:schemeClr val="tx2"/>
+                </a:solidFill>
+                <a:latin typeface="Yu Mincho" pitchFamily="34" charset="0"/>
+                <a:ea typeface="Yu Mincho" pitchFamily="34" charset="-122"/>
+                <a:cs typeface="Yu Mincho" pitchFamily="34" charset="-120"/>
+              </a:rPr>
+              <a:t>何が見えますか？</a:t>
+            </a:r>
+            <a:endParaRPr lang="en-US" sz="3200" dirty="0"/>
+          </a:p>
+        </p:txBody>
+      </p:sp>
+      <p:sp>
+        <p:nvSpPr>
+          <p:cNvPr id="25" name="Slide Number Placeholder 0"/>
+          <p:cNvSpPr>
+            <a:spLocks noGrp="1"/>
+          </p:cNvSpPr>
+          <p:nvPr>
+            <p:ph type="sldNum" sz="quarter" idx="4294967295"/>
+          </p:nvPr>
+        </p:nvSpPr>
+        <p:spPr>
+          <a:xfrm>
+            <a:off x="8229600" y="4754880"/>
+            <a:ext cx="457200" cy="274320"/>
+          </a:xfrm>
+          <a:prstGeom prst="rect">
+            <a:avLst/>
+          </a:prstGeom>
+          <a:extLst>
+            <a:ext uri="{C572A759-6A51-4108-AA02-DFA0A04FC94B}">
+              <ma14:wrappingTextBoxFlag xmlns:ma14="http://schemas.microsoft.com/office/mac/drawingml/2011/main" val="0"/>
+            </a:ext>
+          </a:extLst>
+        </p:spPr>
+        <p:txBody>
+          <a:bodyPr/>
+          <a:lstStyle>
+            <a:lvl1pPr>
+              <a:defRPr sz="900">
+                <a:solidFill>
+                  <a:srgbClr val="B08A4E"/>
+                </a:solidFill>
+              </a:defRPr>
+            </a:lvl1pPr>
+          </a:lstStyle>
+          <a:p>
+            <a:pPr algn="r"/>
+            <a:fld id="{F7021451-1387-4CA6-816F-3879F97B5CBC}" type="slidenum">
+              <a:rPr b="0" lang="en-US"/>
+              <a:t>53</a:t>
+            </a:fld>
+            <a:endParaRPr lang="en-US"/>
+          </a:p>
+        </p:txBody>
+      </p:sp>
+    </p:spTree>
+  </p:cSld>
+  <p:clrMapOvr>
+    <a:masterClrMapping/>
+  </p:clrMapOvr>
+</p:sld>
+</file>
+
+<file path=ppt/slides/slide54.xml><?xml version="1.0" encoding="utf-8"?>
+<p:sld xmlns:a="http://schemas.openxmlformats.org/drawingml/2006/main" xmlns:r="http://schemas.openxmlformats.org/officeDocument/2006/relationships" xmlns:p="http://schemas.openxmlformats.org/presentationml/2006/main">
+  <p:cSld name="Slide 54">
+    <p:spTree>
+      <p:nvGrpSpPr>
+        <p:cNvPr id="1" name=""/>
+        <p:cNvGrpSpPr/>
+        <p:nvPr/>
+      </p:nvGrpSpPr>
+      <p:grpSpPr>
+        <a:xfrm>
+          <a:off x="0" y="0"/>
+          <a:ext cx="0" cy="0"/>
+          <a:chOff x="0" y="0"/>
+          <a:chExt cx="0" cy="0"/>
+        </a:xfrm>
+      </p:grpSpPr>
+      <p:sp>
+        <p:nvSpPr>
+          <p:cNvPr id="2" name="frame"/>
+          <p:cNvSpPr/>
+          <p:nvPr/>
+        </p:nvSpPr>
+        <p:spPr>
+          <a:xfrm>
+            <a:off x="228600" y="137160"/>
+            <a:ext cx="8686800" cy="4526280"/>
+          </a:xfrm>
+          <a:prstGeom prst="rect">
+            <a:avLst/>
+          </a:prstGeom>
+          <a:ln w="12700">
+            <a:solidFill>
+              <a:srgbClr val="B08A4E"/>
+            </a:solidFill>
+            <a:prstDash val="solid"/>
+          </a:ln>
+        </p:spPr>
+        <p:txBody>
+          <a:bodyPr/>
+          <a:p/>
+        </p:txBody>
+      </p:sp>
+      <p:sp>
+        <p:nvSpPr>
+          <p:cNvPr id="3" name="qlabel"/>
+          <p:cNvSpPr txBox="1"/>
+          <p:nvPr/>
+        </p:nvSpPr>
+        <p:spPr>
+          <a:xfrm>
+            <a:off x="457200" y="320040"/>
+            <a:ext cx="8229600" cy="365760"/>
+          </a:xfrm>
+          <a:prstGeom prst="rect">
+            <a:avLst/>
+          </a:prstGeom>
+          <a:noFill/>
+          <a:ln/>
+        </p:spPr>
+        <p:txBody>
+          <a:bodyPr wrap="square" lIns="0" tIns="0" rIns="0" bIns="0" rtlCol="0" anchor="t"/>
+          <a:lstStyle/>
+          <a:p>
+            <a:pPr algn="ctr" indent="0" marL="0">
+              <a:buNone/>
+            </a:pPr>
+            <a:r>
+              <a:rPr lang="en-US" sz="1300" b="1" dirty="0">
+                <a:solidFill>
+                  <a:schemeClr val="accent2"/>
+                </a:solidFill>
+              </a:rPr>
+              <a:t>感情の統合</a:t>
+            </a:r>
+            <a:endParaRPr lang="en-US" sz="1300" dirty="0"/>
+          </a:p>
+        </p:txBody>
+      </p:sp>
+      <p:sp>
+        <p:nvSpPr>
+          <p:cNvPr id="4" name="Text 0"/>
+          <p:cNvSpPr/>
+          <p:nvPr>
+            <p:ph idx="100" type="title" hasCustomPrompt="1"/>
+          </p:nvPr>
+        </p:nvSpPr>
+        <p:spPr>
+          <a:xfrm>
+            <a:off x="914400" y="1554480"/>
+            <a:ext cx="7315200" cy="1554480"/>
+          </a:xfrm>
+          <a:prstGeom prst="rect">
+            <a:avLst/>
+          </a:prstGeom>
+          <a:noFill/>
+          <a:ln/>
+        </p:spPr>
+        <p:txBody>
+          <a:bodyPr wrap="square" rtlCol="0" anchor="ctr"/>
+          <a:lstStyle/>
+          <a:p>
+            <a:pPr algn="ctr" indent="0" marL="0">
+              <a:buNone/>
+            </a:pPr>
+            <a:r>
+              <a:rPr lang="en-US" sz="3200" b="1" dirty="0">
+                <a:solidFill>
+                  <a:schemeClr val="tx2"/>
+                </a:solidFill>
+                <a:latin typeface="Yu Mincho" pitchFamily="34" charset="0"/>
+                <a:ea typeface="Yu Mincho" pitchFamily="34" charset="-122"/>
+                <a:cs typeface="Yu Mincho" pitchFamily="34" charset="-120"/>
+              </a:rPr>
+              <a:t>先に進んで</a:t>
+            </a:r>
+            <a:endParaRPr lang="en-US" sz="3200" dirty="0"/>
+          </a:p>
+          <a:p>
+            <a:pPr algn="ctr" indent="0" marL="0">
+              <a:buNone/>
+            </a:pPr>
+            <a:r>
+              <a:rPr lang="en-US" sz="3200" b="1" dirty="0">
+                <a:solidFill>
+                  <a:schemeClr val="tx2"/>
+                </a:solidFill>
+                <a:latin typeface="Yu Mincho" pitchFamily="34" charset="0"/>
+                <a:ea typeface="Yu Mincho" pitchFamily="34" charset="-122"/>
+                <a:cs typeface="Yu Mincho" pitchFamily="34" charset="-120"/>
+              </a:rPr>
+              <a:t>みましょう</a:t>
+            </a:r>
+            <a:endParaRPr lang="en-US" sz="3200" dirty="0"/>
+          </a:p>
+        </p:txBody>
+      </p:sp>
+      <p:sp>
+        <p:nvSpPr>
+          <p:cNvPr id="5" name="Text 0"/>
+          <p:cNvSpPr/>
+          <p:nvPr>
+            <p:ph idx="101" type="body" hasCustomPrompt="1"/>
+          </p:nvPr>
+        </p:nvSpPr>
+        <p:spPr>
+          <a:xfrm>
+            <a:off x="914400" y="3200400"/>
+            <a:ext cx="7315200" cy="731520"/>
+          </a:xfrm>
+          <a:prstGeom prst="rect">
+            <a:avLst/>
+          </a:prstGeom>
+          <a:noFill/>
+          <a:ln/>
+        </p:spPr>
+        <p:txBody>
+          <a:bodyPr wrap="square" rtlCol="0" anchor="t"/>
+          <a:lstStyle/>
+          <a:p>
+            <a:pPr algn="ctr" indent="0" marL="0">
+              <a:buNone/>
+            </a:pPr>
+            <a:r>
+              <a:rPr lang="en-US" sz="1500" dirty="0">
+                <a:solidFill>
+                  <a:schemeClr val="accent2"/>
+                </a:solidFill>
+              </a:rPr>
+              <a:t>何が見えますか？</a:t>
+            </a:r>
+            <a:endParaRPr lang="en-US" sz="1500" dirty="0"/>
+          </a:p>
+        </p:txBody>
+      </p:sp>
+      <p:sp>
+        <p:nvSpPr>
+          <p:cNvPr id="25" name="Slide Number Placeholder 0"/>
+          <p:cNvSpPr>
+            <a:spLocks noGrp="1"/>
+          </p:cNvSpPr>
+          <p:nvPr>
+            <p:ph type="sldNum" sz="quarter" idx="4294967295"/>
+          </p:nvPr>
+        </p:nvSpPr>
+        <p:spPr>
+          <a:xfrm>
+            <a:off x="8229600" y="4754880"/>
+            <a:ext cx="457200" cy="274320"/>
+          </a:xfrm>
+          <a:prstGeom prst="rect">
+            <a:avLst/>
+          </a:prstGeom>
+          <a:extLst>
+            <a:ext uri="{C572A759-6A51-4108-AA02-DFA0A04FC94B}">
+              <ma14:wrappingTextBoxFlag xmlns:ma14="http://schemas.microsoft.com/office/mac/drawingml/2011/main" val="0"/>
+            </a:ext>
+          </a:extLst>
+        </p:spPr>
+        <p:txBody>
+          <a:bodyPr/>
+          <a:lstStyle>
+            <a:lvl1pPr>
+              <a:defRPr sz="900">
+                <a:solidFill>
+                  <a:srgbClr val="B08A4E"/>
+                </a:solidFill>
+              </a:defRPr>
+            </a:lvl1pPr>
+          </a:lstStyle>
+          <a:p>
+            <a:pPr algn="r"/>
+            <a:fld id="{F7021451-1387-4CA6-816F-3879F97B5CBC}" type="slidenum">
+              <a:rPr b="0" lang="en-US"/>
+              <a:t>54</a:t>
+            </a:fld>
+            <a:endParaRPr lang="en-US"/>
+          </a:p>
+        </p:txBody>
+      </p:sp>
+    </p:spTree>
+  </p:cSld>
+  <p:clrMapOvr>
+    <a:masterClrMapping/>
+  </p:clrMapOvr>
+</p:sld>
+</file>
+
+<file path=ppt/slides/slide55.xml><?xml version="1.0" encoding="utf-8"?>
+<p:sld xmlns:a="http://schemas.openxmlformats.org/drawingml/2006/main" xmlns:r="http://schemas.openxmlformats.org/officeDocument/2006/relationships" xmlns:p="http://schemas.openxmlformats.org/presentationml/2006/main">
+  <p:cSld name="Slide 55">
+    <p:spTree>
+      <p:nvGrpSpPr>
+        <p:cNvPr id="1" name=""/>
+        <p:cNvGrpSpPr/>
+        <p:nvPr/>
+      </p:nvGrpSpPr>
+      <p:grpSpPr>
+        <a:xfrm>
+          <a:off x="0" y="0"/>
+          <a:ext cx="0" cy="0"/>
+          <a:chOff x="0" y="0"/>
+          <a:chExt cx="0" cy="0"/>
+        </a:xfrm>
+      </p:grpSpPr>
+      <p:sp>
+        <p:nvSpPr>
+          <p:cNvPr id="2" name="frame"/>
+          <p:cNvSpPr/>
+          <p:nvPr/>
+        </p:nvSpPr>
+        <p:spPr>
+          <a:xfrm>
+            <a:off x="228600" y="137160"/>
+            <a:ext cx="8686800" cy="4526280"/>
+          </a:xfrm>
+          <a:prstGeom prst="rect">
+            <a:avLst/>
+          </a:prstGeom>
+          <a:ln w="12700">
+            <a:solidFill>
+              <a:srgbClr val="B08A4E"/>
+            </a:solidFill>
+            <a:prstDash val="solid"/>
+          </a:ln>
+        </p:spPr>
+        <p:txBody>
+          <a:bodyPr/>
+          <a:p/>
+        </p:txBody>
+      </p:sp>
+      <p:sp>
+        <p:nvSpPr>
+          <p:cNvPr id="3" name="qlabel"/>
+          <p:cNvSpPr txBox="1"/>
+          <p:nvPr/>
+        </p:nvSpPr>
+        <p:spPr>
+          <a:xfrm>
+            <a:off x="457200" y="320040"/>
+            <a:ext cx="8229600" cy="365760"/>
+          </a:xfrm>
+          <a:prstGeom prst="rect">
+            <a:avLst/>
+          </a:prstGeom>
+          <a:noFill/>
+          <a:ln/>
+        </p:spPr>
+        <p:txBody>
+          <a:bodyPr wrap="square" lIns="0" tIns="0" rIns="0" bIns="0" rtlCol="0" anchor="t"/>
+          <a:lstStyle/>
+          <a:p>
+            <a:pPr algn="ctr" indent="0" marL="0">
+              <a:buNone/>
+            </a:pPr>
+            <a:r>
+              <a:rPr lang="en-US" sz="1300" b="1" dirty="0">
+                <a:solidFill>
+                  <a:schemeClr val="accent2"/>
+                </a:solidFill>
+              </a:rPr>
+              <a:t>感情の統合</a:t>
+            </a:r>
+            <a:endParaRPr lang="en-US" sz="1300" dirty="0"/>
+          </a:p>
+        </p:txBody>
+      </p:sp>
+      <p:sp>
+        <p:nvSpPr>
+          <p:cNvPr id="4" name="Text 0"/>
+          <p:cNvSpPr/>
+          <p:nvPr>
+            <p:ph idx="100" type="title" hasCustomPrompt="1"/>
+          </p:nvPr>
+        </p:nvSpPr>
+        <p:spPr>
+          <a:xfrm>
+            <a:off x="914400" y="1554480"/>
+            <a:ext cx="7315200" cy="1554480"/>
+          </a:xfrm>
+          <a:prstGeom prst="rect">
+            <a:avLst/>
+          </a:prstGeom>
+          <a:noFill/>
+          <a:ln/>
+        </p:spPr>
+        <p:txBody>
+          <a:bodyPr wrap="square" rtlCol="0" anchor="ctr"/>
+          <a:lstStyle/>
+          <a:p>
+            <a:pPr algn="ctr" indent="0" marL="0">
+              <a:buNone/>
+            </a:pPr>
+            <a:r>
+              <a:rPr lang="en-US" sz="3200" b="1" dirty="0">
+                <a:solidFill>
+                  <a:schemeClr val="tx2"/>
+                </a:solidFill>
+                <a:latin typeface="Yu Mincho" pitchFamily="34" charset="0"/>
+                <a:ea typeface="Yu Mincho" pitchFamily="34" charset="-122"/>
+                <a:cs typeface="Yu Mincho" pitchFamily="34" charset="-120"/>
+              </a:rPr>
+              <a:t>そこから、入ってきた入口を</a:t>
+            </a:r>
+            <a:endParaRPr lang="en-US" sz="3200" dirty="0"/>
+          </a:p>
+          <a:p>
+            <a:pPr algn="ctr" indent="0" marL="0">
+              <a:buNone/>
+            </a:pPr>
+            <a:r>
+              <a:rPr lang="en-US" sz="3200" b="1" dirty="0">
+                <a:solidFill>
+                  <a:schemeClr val="tx2"/>
+                </a:solidFill>
+                <a:latin typeface="Yu Mincho" pitchFamily="34" charset="0"/>
+                <a:ea typeface="Yu Mincho" pitchFamily="34" charset="-122"/>
+                <a:cs typeface="Yu Mincho" pitchFamily="34" charset="-120"/>
+              </a:rPr>
+              <a:t>見てみましょう</a:t>
+            </a:r>
+            <a:endParaRPr lang="en-US" sz="3200" dirty="0"/>
+          </a:p>
+          <a:p>
+            <a:pPr algn="ctr" indent="0" marL="0">
+              <a:buNone/>
+            </a:pPr>
+            <a:r>
+              <a:rPr lang="en-US" sz="3200" b="1" dirty="0">
+                <a:solidFill>
+                  <a:schemeClr val="tx2"/>
+                </a:solidFill>
+                <a:latin typeface="Yu Mincho" pitchFamily="34" charset="0"/>
+                <a:ea typeface="Yu Mincho" pitchFamily="34" charset="-122"/>
+                <a:cs typeface="Yu Mincho" pitchFamily="34" charset="-120"/>
+              </a:rPr>
+              <a:t>何が見えますか？</a:t>
+            </a:r>
+            <a:endParaRPr lang="en-US" sz="3200" dirty="0"/>
+          </a:p>
+        </p:txBody>
+      </p:sp>
+      <p:sp>
+        <p:nvSpPr>
+          <p:cNvPr id="25" name="Slide Number Placeholder 0"/>
+          <p:cNvSpPr>
+            <a:spLocks noGrp="1"/>
+          </p:cNvSpPr>
+          <p:nvPr>
+            <p:ph type="sldNum" sz="quarter" idx="4294967295"/>
+          </p:nvPr>
+        </p:nvSpPr>
+        <p:spPr>
+          <a:xfrm>
+            <a:off x="8229600" y="4754880"/>
+            <a:ext cx="457200" cy="274320"/>
+          </a:xfrm>
+          <a:prstGeom prst="rect">
+            <a:avLst/>
+          </a:prstGeom>
+          <a:extLst>
+            <a:ext uri="{C572A759-6A51-4108-AA02-DFA0A04FC94B}">
+              <ma14:wrappingTextBoxFlag xmlns:ma14="http://schemas.microsoft.com/office/mac/drawingml/2011/main" val="0"/>
+            </a:ext>
+          </a:extLst>
+        </p:spPr>
+        <p:txBody>
+          <a:bodyPr/>
+          <a:lstStyle>
+            <a:lvl1pPr>
+              <a:defRPr sz="900">
+                <a:solidFill>
+                  <a:srgbClr val="B08A4E"/>
+                </a:solidFill>
+              </a:defRPr>
+            </a:lvl1pPr>
+          </a:lstStyle>
+          <a:p>
+            <a:pPr algn="r"/>
+            <a:fld id="{F7021451-1387-4CA6-816F-3879F97B5CBC}" type="slidenum">
+              <a:rPr b="0" lang="en-US"/>
+              <a:t>55</a:t>
+            </a:fld>
+            <a:endParaRPr lang="en-US"/>
+          </a:p>
+        </p:txBody>
+      </p:sp>
+    </p:spTree>
+  </p:cSld>
+  <p:clrMapOvr>
+    <a:masterClrMapping/>
+  </p:clrMapOvr>
+</p:sld>
+</file>
+
+<file path=ppt/slides/slide56.xml><?xml version="1.0" encoding="utf-8"?>
+<p:sld xmlns:a="http://schemas.openxmlformats.org/drawingml/2006/main" xmlns:r="http://schemas.openxmlformats.org/officeDocument/2006/relationships" xmlns:p="http://schemas.openxmlformats.org/presentationml/2006/main">
+  <p:cSld name="Slide 56">
+    <p:spTree>
+      <p:nvGrpSpPr>
+        <p:cNvPr id="1" name=""/>
+        <p:cNvGrpSpPr/>
+        <p:nvPr/>
+      </p:nvGrpSpPr>
+      <p:grpSpPr>
+        <a:xfrm>
+          <a:off x="0" y="0"/>
+          <a:ext cx="0" cy="0"/>
+          <a:chOff x="0" y="0"/>
+          <a:chExt cx="0" cy="0"/>
+        </a:xfrm>
+      </p:grpSpPr>
+      <p:sp>
+        <p:nvSpPr>
+          <p:cNvPr id="2" name="frame"/>
+          <p:cNvSpPr/>
+          <p:nvPr/>
+        </p:nvSpPr>
+        <p:spPr>
+          <a:xfrm>
+            <a:off x="228600" y="137160"/>
+            <a:ext cx="8686800" cy="4526280"/>
+          </a:xfrm>
+          <a:prstGeom prst="rect">
+            <a:avLst/>
+          </a:prstGeom>
+          <a:ln w="12700">
+            <a:solidFill>
+              <a:srgbClr val="B08A4E"/>
+            </a:solidFill>
+            <a:prstDash val="solid"/>
+          </a:ln>
+        </p:spPr>
+        <p:txBody>
+          <a:bodyPr/>
+          <a:p/>
+        </p:txBody>
+      </p:sp>
+      <p:sp>
+        <p:nvSpPr>
+          <p:cNvPr id="3" name="qlabel"/>
+          <p:cNvSpPr txBox="1"/>
+          <p:nvPr/>
+        </p:nvSpPr>
+        <p:spPr>
+          <a:xfrm>
+            <a:off x="457200" y="320040"/>
+            <a:ext cx="8229600" cy="365760"/>
+          </a:xfrm>
+          <a:prstGeom prst="rect">
+            <a:avLst/>
+          </a:prstGeom>
+          <a:noFill/>
+          <a:ln/>
+        </p:spPr>
+        <p:txBody>
+          <a:bodyPr wrap="square" lIns="0" tIns="0" rIns="0" bIns="0" rtlCol="0" anchor="t"/>
+          <a:lstStyle/>
+          <a:p>
+            <a:pPr algn="ctr" indent="0" marL="0">
+              <a:buNone/>
+            </a:pPr>
+            <a:r>
+              <a:rPr lang="en-US" sz="1300" b="1" dirty="0">
+                <a:solidFill>
+                  <a:schemeClr val="accent2"/>
+                </a:solidFill>
+              </a:rPr>
+              <a:t>感情の統合　理想の池</a:t>
+            </a:r>
+            <a:endParaRPr lang="en-US" sz="1300" dirty="0"/>
+          </a:p>
+        </p:txBody>
+      </p:sp>
+      <p:sp>
+        <p:nvSpPr>
+          <p:cNvPr id="4" name="Text 0"/>
+          <p:cNvSpPr/>
+          <p:nvPr>
+            <p:ph idx="100" type="title" hasCustomPrompt="1"/>
+          </p:nvPr>
+        </p:nvSpPr>
+        <p:spPr>
+          <a:xfrm>
+            <a:off x="914400" y="1554480"/>
+            <a:ext cx="7315200" cy="1554480"/>
+          </a:xfrm>
+          <a:prstGeom prst="rect">
+            <a:avLst/>
+          </a:prstGeom>
+          <a:noFill/>
+          <a:ln/>
+        </p:spPr>
+        <p:txBody>
+          <a:bodyPr wrap="square" rtlCol="0" anchor="ctr"/>
+          <a:lstStyle/>
+          <a:p>
+            <a:pPr algn="ctr" indent="0" marL="0">
+              <a:buNone/>
+            </a:pPr>
+            <a:r>
+              <a:rPr lang="en-US" sz="3200" b="1" dirty="0">
+                <a:solidFill>
+                  <a:schemeClr val="tx2"/>
+                </a:solidFill>
+                <a:latin typeface="Yu Mincho" pitchFamily="34" charset="0"/>
+                <a:ea typeface="Yu Mincho" pitchFamily="34" charset="-122"/>
+                <a:cs typeface="Yu Mincho" pitchFamily="34" charset="-120"/>
+              </a:rPr>
+              <a:t>池から出てきたら、</a:t>
+            </a:r>
+            <a:endParaRPr lang="en-US" sz="3200" dirty="0"/>
+          </a:p>
+          <a:p>
+            <a:pPr algn="ctr" indent="0" marL="0">
+              <a:buNone/>
+            </a:pPr>
+            <a:r>
+              <a:rPr lang="en-US" sz="3200" b="1" dirty="0">
+                <a:solidFill>
+                  <a:schemeClr val="tx2"/>
+                </a:solidFill>
+                <a:latin typeface="Yu Mincho" pitchFamily="34" charset="0"/>
+                <a:ea typeface="Yu Mincho" pitchFamily="34" charset="-122"/>
+                <a:cs typeface="Yu Mincho" pitchFamily="34" charset="-120"/>
+              </a:rPr>
+              <a:t>今度は理想の池に</a:t>
+            </a:r>
+            <a:endParaRPr lang="en-US" sz="3200" dirty="0"/>
+          </a:p>
+          <a:p>
+            <a:pPr algn="ctr" indent="0" marL="0">
+              <a:buNone/>
+            </a:pPr>
+            <a:r>
+              <a:rPr lang="en-US" sz="3200" b="1" dirty="0">
+                <a:solidFill>
+                  <a:schemeClr val="tx2"/>
+                </a:solidFill>
+                <a:latin typeface="Yu Mincho" pitchFamily="34" charset="0"/>
+                <a:ea typeface="Yu Mincho" pitchFamily="34" charset="-122"/>
+                <a:cs typeface="Yu Mincho" pitchFamily="34" charset="-120"/>
+              </a:rPr>
+              <a:t>入っていきます</a:t>
+            </a:r>
+            <a:endParaRPr lang="en-US" sz="3200" dirty="0"/>
+          </a:p>
+        </p:txBody>
+      </p:sp>
+      <p:sp>
+        <p:nvSpPr>
+          <p:cNvPr id="25" name="Slide Number Placeholder 0"/>
+          <p:cNvSpPr>
+            <a:spLocks noGrp="1"/>
+          </p:cNvSpPr>
+          <p:nvPr>
+            <p:ph type="sldNum" sz="quarter" idx="4294967295"/>
+          </p:nvPr>
+        </p:nvSpPr>
+        <p:spPr>
+          <a:xfrm>
+            <a:off x="8229600" y="4754880"/>
+            <a:ext cx="457200" cy="274320"/>
+          </a:xfrm>
+          <a:prstGeom prst="rect">
+            <a:avLst/>
+          </a:prstGeom>
+          <a:extLst>
+            <a:ext uri="{C572A759-6A51-4108-AA02-DFA0A04FC94B}">
+              <ma14:wrappingTextBoxFlag xmlns:ma14="http://schemas.microsoft.com/office/mac/drawingml/2011/main" val="0"/>
+            </a:ext>
+          </a:extLst>
+        </p:spPr>
+        <p:txBody>
+          <a:bodyPr/>
+          <a:lstStyle>
+            <a:lvl1pPr>
+              <a:defRPr sz="900">
+                <a:solidFill>
+                  <a:srgbClr val="B08A4E"/>
+                </a:solidFill>
+              </a:defRPr>
+            </a:lvl1pPr>
+          </a:lstStyle>
+          <a:p>
+            <a:pPr algn="r"/>
+            <a:fld id="{F7021451-1387-4CA6-816F-3879F97B5CBC}" type="slidenum">
+              <a:rPr b="0" lang="en-US"/>
+              <a:t>56</a:t>
+            </a:fld>
+            <a:endParaRPr lang="en-US"/>
+          </a:p>
+        </p:txBody>
+      </p:sp>
+    </p:spTree>
+  </p:cSld>
+  <p:clrMapOvr>
+    <a:masterClrMapping/>
+  </p:clrMapOvr>
+</p:sld>
+</file>
+
+<file path=ppt/slides/slide57.xml><?xml version="1.0" encoding="utf-8"?>
+<p:sld xmlns:a="http://schemas.openxmlformats.org/drawingml/2006/main" xmlns:r="http://schemas.openxmlformats.org/officeDocument/2006/relationships" xmlns:p="http://schemas.openxmlformats.org/presentationml/2006/main">
+  <p:cSld name="Slide 57">
+    <p:spTree>
+      <p:nvGrpSpPr>
+        <p:cNvPr id="1" name=""/>
+        <p:cNvGrpSpPr/>
+        <p:nvPr/>
+      </p:nvGrpSpPr>
+      <p:grpSpPr>
+        <a:xfrm>
+          <a:off x="0" y="0"/>
+          <a:ext cx="0" cy="0"/>
+          <a:chOff x="0" y="0"/>
+          <a:chExt cx="0" cy="0"/>
+        </a:xfrm>
+      </p:grpSpPr>
+      <p:sp>
+        <p:nvSpPr>
+          <p:cNvPr id="2" name="frame"/>
+          <p:cNvSpPr/>
+          <p:nvPr/>
+        </p:nvSpPr>
+        <p:spPr>
+          <a:xfrm>
+            <a:off x="228600" y="137160"/>
+            <a:ext cx="8686800" cy="4526280"/>
+          </a:xfrm>
+          <a:prstGeom prst="rect">
+            <a:avLst/>
+          </a:prstGeom>
+          <a:ln w="12700">
+            <a:solidFill>
+              <a:srgbClr val="B08A4E"/>
+            </a:solidFill>
+            <a:prstDash val="solid"/>
+          </a:ln>
+        </p:spPr>
+        <p:txBody>
+          <a:bodyPr/>
+          <a:p/>
+        </p:txBody>
+      </p:sp>
+      <p:sp>
+        <p:nvSpPr>
+          <p:cNvPr id="3" name="qlabel"/>
+          <p:cNvSpPr txBox="1"/>
+          <p:nvPr/>
+        </p:nvSpPr>
+        <p:spPr>
+          <a:xfrm>
+            <a:off x="457200" y="320040"/>
+            <a:ext cx="8229600" cy="365760"/>
+          </a:xfrm>
+          <a:prstGeom prst="rect">
+            <a:avLst/>
+          </a:prstGeom>
+          <a:noFill/>
+          <a:ln/>
+        </p:spPr>
+        <p:txBody>
+          <a:bodyPr wrap="square" lIns="0" tIns="0" rIns="0" bIns="0" rtlCol="0" anchor="t"/>
+          <a:lstStyle/>
+          <a:p>
+            <a:pPr algn="ctr" indent="0" marL="0">
+              <a:buNone/>
+            </a:pPr>
+            <a:r>
+              <a:rPr lang="en-US" sz="1300" b="1" dirty="0">
+                <a:solidFill>
+                  <a:schemeClr val="accent2"/>
+                </a:solidFill>
+              </a:rPr>
+              <a:t>感情の統合　理想の池</a:t>
+            </a:r>
+            <a:endParaRPr lang="en-US" sz="1300" dirty="0"/>
+          </a:p>
+        </p:txBody>
+      </p:sp>
+      <p:sp>
+        <p:nvSpPr>
+          <p:cNvPr id="4" name="Text 0"/>
+          <p:cNvSpPr/>
+          <p:nvPr>
+            <p:ph idx="100" type="title" hasCustomPrompt="1"/>
+          </p:nvPr>
+        </p:nvSpPr>
+        <p:spPr>
+          <a:xfrm>
+            <a:off x="914400" y="1554480"/>
+            <a:ext cx="7315200" cy="1554480"/>
+          </a:xfrm>
+          <a:prstGeom prst="rect">
+            <a:avLst/>
+          </a:prstGeom>
+          <a:noFill/>
+          <a:ln/>
+        </p:spPr>
+        <p:txBody>
+          <a:bodyPr wrap="square" rtlCol="0" anchor="ctr"/>
+          <a:lstStyle/>
+          <a:p>
+            <a:pPr algn="ctr" indent="0" marL="0">
+              <a:buNone/>
+            </a:pPr>
+            <a:r>
+              <a:rPr lang="en-US" sz="3200" b="1" dirty="0">
+                <a:solidFill>
+                  <a:schemeClr val="tx2"/>
+                </a:solidFill>
+                <a:latin typeface="Yu Mincho" pitchFamily="34" charset="0"/>
+                <a:ea typeface="Yu Mincho" pitchFamily="34" charset="-122"/>
+                <a:cs typeface="Yu Mincho" pitchFamily="34" charset="-120"/>
+              </a:rPr>
+              <a:t>その池は、</a:t>
+            </a:r>
+            <a:endParaRPr lang="en-US" sz="3200" dirty="0"/>
+          </a:p>
+          <a:p>
+            <a:pPr algn="ctr" indent="0" marL="0">
+              <a:buNone/>
+            </a:pPr>
+            <a:r>
+              <a:rPr lang="en-US" sz="3200" b="1" dirty="0">
+                <a:solidFill>
+                  <a:schemeClr val="tx2"/>
+                </a:solidFill>
+                <a:latin typeface="Yu Mincho" pitchFamily="34" charset="0"/>
+                <a:ea typeface="Yu Mincho" pitchFamily="34" charset="-122"/>
+                <a:cs typeface="Yu Mincho" pitchFamily="34" charset="-120"/>
+              </a:rPr>
+              <a:t>色に見えますか？</a:t>
+            </a:r>
+            <a:endParaRPr lang="en-US" sz="3200" dirty="0"/>
+          </a:p>
+        </p:txBody>
+      </p:sp>
+      <p:sp>
+        <p:nvSpPr>
+          <p:cNvPr id="5" name="Text 0"/>
+          <p:cNvSpPr/>
+          <p:nvPr>
+            <p:ph idx="101" type="body" hasCustomPrompt="1"/>
+          </p:nvPr>
+        </p:nvSpPr>
+        <p:spPr>
+          <a:xfrm>
+            <a:off x="914400" y="3200400"/>
+            <a:ext cx="7315200" cy="731520"/>
+          </a:xfrm>
+          <a:prstGeom prst="rect">
+            <a:avLst/>
+          </a:prstGeom>
+          <a:noFill/>
+          <a:ln/>
+        </p:spPr>
+        <p:txBody>
+          <a:bodyPr wrap="square" rtlCol="0" anchor="t"/>
+          <a:lstStyle/>
+          <a:p>
+            <a:pPr algn="ctr" indent="0" marL="0">
+              <a:buNone/>
+            </a:pPr>
+            <a:r>
+              <a:rPr lang="en-US" sz="1500" dirty="0">
+                <a:solidFill>
+                  <a:schemeClr val="accent2"/>
+                </a:solidFill>
+              </a:rPr>
+              <a:t>見えたら、どんな色ですか？</a:t>
+            </a:r>
+            <a:endParaRPr lang="en-US" sz="1500" dirty="0"/>
+          </a:p>
+        </p:txBody>
+      </p:sp>
+      <p:sp>
+        <p:nvSpPr>
+          <p:cNvPr id="25" name="Slide Number Placeholder 0"/>
+          <p:cNvSpPr>
+            <a:spLocks noGrp="1"/>
+          </p:cNvSpPr>
+          <p:nvPr>
+            <p:ph type="sldNum" sz="quarter" idx="4294967295"/>
+          </p:nvPr>
+        </p:nvSpPr>
+        <p:spPr>
+          <a:xfrm>
+            <a:off x="8229600" y="4754880"/>
+            <a:ext cx="457200" cy="274320"/>
+          </a:xfrm>
+          <a:prstGeom prst="rect">
+            <a:avLst/>
+          </a:prstGeom>
+          <a:extLst>
+            <a:ext uri="{C572A759-6A51-4108-AA02-DFA0A04FC94B}">
+              <ma14:wrappingTextBoxFlag xmlns:ma14="http://schemas.microsoft.com/office/mac/drawingml/2011/main" val="0"/>
+            </a:ext>
+          </a:extLst>
+        </p:spPr>
+        <p:txBody>
+          <a:bodyPr/>
+          <a:lstStyle>
+            <a:lvl1pPr>
+              <a:defRPr sz="900">
+                <a:solidFill>
+                  <a:srgbClr val="B08A4E"/>
+                </a:solidFill>
+              </a:defRPr>
+            </a:lvl1pPr>
+          </a:lstStyle>
+          <a:p>
+            <a:pPr algn="r"/>
+            <a:fld id="{F7021451-1387-4CA6-816F-3879F97B5CBC}" type="slidenum">
+              <a:rPr b="0" lang="en-US"/>
+              <a:t>57</a:t>
+            </a:fld>
+            <a:endParaRPr lang="en-US"/>
+          </a:p>
+        </p:txBody>
+      </p:sp>
+    </p:spTree>
+  </p:cSld>
+  <p:clrMapOvr>
+    <a:masterClrMapping/>
+  </p:clrMapOvr>
+</p:sld>
+</file>
+
+<file path=ppt/slides/slide58.xml><?xml version="1.0" encoding="utf-8"?>
+<p:sld xmlns:a="http://schemas.openxmlformats.org/drawingml/2006/main" xmlns:r="http://schemas.openxmlformats.org/officeDocument/2006/relationships" xmlns:p="http://schemas.openxmlformats.org/presentationml/2006/main">
+  <p:cSld name="Slide 58">
+    <p:spTree>
+      <p:nvGrpSpPr>
+        <p:cNvPr id="1" name=""/>
+        <p:cNvGrpSpPr/>
+        <p:nvPr/>
+      </p:nvGrpSpPr>
+      <p:grpSpPr>
+        <a:xfrm>
+          <a:off x="0" y="0"/>
+          <a:ext cx="0" cy="0"/>
+          <a:chOff x="0" y="0"/>
+          <a:chExt cx="0" cy="0"/>
+        </a:xfrm>
+      </p:grpSpPr>
+      <p:sp>
+        <p:nvSpPr>
+          <p:cNvPr id="2" name="frame"/>
+          <p:cNvSpPr/>
+          <p:nvPr/>
+        </p:nvSpPr>
+        <p:spPr>
+          <a:xfrm>
+            <a:off x="228600" y="137160"/>
+            <a:ext cx="8686800" cy="4526280"/>
+          </a:xfrm>
+          <a:prstGeom prst="rect">
+            <a:avLst/>
+          </a:prstGeom>
+          <a:ln w="12700">
+            <a:solidFill>
+              <a:srgbClr val="B08A4E"/>
+            </a:solidFill>
+            <a:prstDash val="solid"/>
+          </a:ln>
+        </p:spPr>
+        <p:txBody>
+          <a:bodyPr/>
+          <a:p/>
+        </p:txBody>
+      </p:sp>
+      <p:sp>
+        <p:nvSpPr>
+          <p:cNvPr id="3" name="qlabel"/>
+          <p:cNvSpPr txBox="1"/>
+          <p:nvPr/>
+        </p:nvSpPr>
+        <p:spPr>
+          <a:xfrm>
+            <a:off x="457200" y="320040"/>
+            <a:ext cx="8229600" cy="365760"/>
+          </a:xfrm>
+          <a:prstGeom prst="rect">
+            <a:avLst/>
+          </a:prstGeom>
+          <a:noFill/>
+          <a:ln/>
+        </p:spPr>
+        <p:txBody>
+          <a:bodyPr wrap="square" lIns="0" tIns="0" rIns="0" bIns="0" rtlCol="0" anchor="t"/>
+          <a:lstStyle/>
+          <a:p>
+            <a:pPr algn="ctr" indent="0" marL="0">
+              <a:buNone/>
+            </a:pPr>
+            <a:r>
+              <a:rPr lang="en-US" sz="1300" b="1" dirty="0">
+                <a:solidFill>
+                  <a:schemeClr val="accent2"/>
+                </a:solidFill>
+              </a:rPr>
+              <a:t>感情の統合　理想の池</a:t>
+            </a:r>
+            <a:endParaRPr lang="en-US" sz="1300" dirty="0"/>
+          </a:p>
+        </p:txBody>
+      </p:sp>
+      <p:sp>
+        <p:nvSpPr>
+          <p:cNvPr id="4" name="Text 0"/>
+          <p:cNvSpPr/>
+          <p:nvPr>
+            <p:ph idx="100" type="title" hasCustomPrompt="1"/>
+          </p:nvPr>
+        </p:nvSpPr>
+        <p:spPr>
+          <a:xfrm>
+            <a:off x="914400" y="1554480"/>
+            <a:ext cx="7315200" cy="1554480"/>
+          </a:xfrm>
+          <a:prstGeom prst="rect">
+            <a:avLst/>
+          </a:prstGeom>
+          <a:noFill/>
+          <a:ln/>
+        </p:spPr>
+        <p:txBody>
+          <a:bodyPr wrap="square" rtlCol="0" anchor="ctr"/>
+          <a:lstStyle/>
+          <a:p>
+            <a:pPr algn="ctr" indent="0" marL="0">
+              <a:buNone/>
+            </a:pPr>
+            <a:r>
+              <a:rPr lang="en-US" sz="3200" b="1" dirty="0">
+                <a:solidFill>
+                  <a:schemeClr val="tx2"/>
+                </a:solidFill>
+                <a:latin typeface="Yu Mincho" pitchFamily="34" charset="0"/>
+                <a:ea typeface="Yu Mincho" pitchFamily="34" charset="-122"/>
+                <a:cs typeface="Yu Mincho" pitchFamily="34" charset="-120"/>
+              </a:rPr>
+              <a:t>入ってみること、</a:t>
+            </a:r>
+            <a:endParaRPr lang="en-US" sz="3200" dirty="0"/>
+          </a:p>
+          <a:p>
+            <a:pPr algn="ctr" indent="0" marL="0">
+              <a:buNone/>
+            </a:pPr>
+            <a:r>
+              <a:rPr lang="en-US" sz="3200" b="1" dirty="0">
+                <a:solidFill>
+                  <a:schemeClr val="tx2"/>
+                </a:solidFill>
+                <a:latin typeface="Yu Mincho" pitchFamily="34" charset="0"/>
+                <a:ea typeface="Yu Mincho" pitchFamily="34" charset="-122"/>
+                <a:cs typeface="Yu Mincho" pitchFamily="34" charset="-120"/>
+              </a:rPr>
+              <a:t>できそうですか？</a:t>
+            </a:r>
+            <a:endParaRPr lang="en-US" sz="3200" dirty="0"/>
+          </a:p>
+        </p:txBody>
+      </p:sp>
+      <p:sp>
+        <p:nvSpPr>
+          <p:cNvPr id="25" name="Slide Number Placeholder 0"/>
+          <p:cNvSpPr>
+            <a:spLocks noGrp="1"/>
+          </p:cNvSpPr>
+          <p:nvPr>
+            <p:ph type="sldNum" sz="quarter" idx="4294967295"/>
+          </p:nvPr>
+        </p:nvSpPr>
+        <p:spPr>
+          <a:xfrm>
+            <a:off x="8229600" y="4754880"/>
+            <a:ext cx="457200" cy="274320"/>
+          </a:xfrm>
+          <a:prstGeom prst="rect">
+            <a:avLst/>
+          </a:prstGeom>
+          <a:extLst>
+            <a:ext uri="{C572A759-6A51-4108-AA02-DFA0A04FC94B}">
+              <ma14:wrappingTextBoxFlag xmlns:ma14="http://schemas.microsoft.com/office/mac/drawingml/2011/main" val="0"/>
+            </a:ext>
+          </a:extLst>
+        </p:spPr>
+        <p:txBody>
+          <a:bodyPr/>
+          <a:lstStyle>
+            <a:lvl1pPr>
+              <a:defRPr sz="900">
+                <a:solidFill>
+                  <a:srgbClr val="B08A4E"/>
+                </a:solidFill>
+              </a:defRPr>
+            </a:lvl1pPr>
+          </a:lstStyle>
+          <a:p>
+            <a:pPr algn="r"/>
+            <a:fld id="{F7021451-1387-4CA6-816F-3879F97B5CBC}" type="slidenum">
+              <a:rPr b="0" lang="en-US"/>
+              <a:t>58</a:t>
+            </a:fld>
+            <a:endParaRPr lang="en-US"/>
+          </a:p>
+        </p:txBody>
+      </p:sp>
+    </p:spTree>
+  </p:cSld>
+  <p:clrMapOvr>
+    <a:masterClrMapping/>
+  </p:clrMapOvr>
+</p:sld>
+</file>
+
+<file path=ppt/slides/slide59.xml><?xml version="1.0" encoding="utf-8"?>
+<p:sld xmlns:a="http://schemas.openxmlformats.org/drawingml/2006/main" xmlns:r="http://schemas.openxmlformats.org/officeDocument/2006/relationships" xmlns:p="http://schemas.openxmlformats.org/presentationml/2006/main">
+  <p:cSld name="Slide 59">
+    <p:spTree>
+      <p:nvGrpSpPr>
+        <p:cNvPr id="1" name=""/>
+        <p:cNvGrpSpPr/>
+        <p:nvPr/>
+      </p:nvGrpSpPr>
+      <p:grpSpPr>
+        <a:xfrm>
+          <a:off x="0" y="0"/>
+          <a:ext cx="0" cy="0"/>
+          <a:chOff x="0" y="0"/>
+          <a:chExt cx="0" cy="0"/>
+        </a:xfrm>
+      </p:grpSpPr>
+      <p:sp>
+        <p:nvSpPr>
+          <p:cNvPr id="2" name="frame"/>
+          <p:cNvSpPr/>
+          <p:nvPr/>
+        </p:nvSpPr>
+        <p:spPr>
+          <a:xfrm>
+            <a:off x="228600" y="137160"/>
+            <a:ext cx="8686800" cy="4526280"/>
+          </a:xfrm>
+          <a:prstGeom prst="rect">
+            <a:avLst/>
+          </a:prstGeom>
+          <a:ln w="12700">
+            <a:solidFill>
+              <a:srgbClr val="B08A4E"/>
+            </a:solidFill>
+            <a:prstDash val="solid"/>
+          </a:ln>
+        </p:spPr>
+        <p:txBody>
+          <a:bodyPr/>
+          <a:p/>
+        </p:txBody>
+      </p:sp>
+      <p:sp>
+        <p:nvSpPr>
+          <p:cNvPr id="3" name="qlabel"/>
+          <p:cNvSpPr txBox="1"/>
+          <p:nvPr/>
+        </p:nvSpPr>
+        <p:spPr>
+          <a:xfrm>
+            <a:off x="457200" y="320040"/>
+            <a:ext cx="8229600" cy="365760"/>
+          </a:xfrm>
+          <a:prstGeom prst="rect">
+            <a:avLst/>
+          </a:prstGeom>
+          <a:noFill/>
+          <a:ln/>
+        </p:spPr>
+        <p:txBody>
+          <a:bodyPr wrap="square" lIns="0" tIns="0" rIns="0" bIns="0" rtlCol="0" anchor="t"/>
+          <a:lstStyle/>
+          <a:p>
+            <a:pPr algn="ctr" indent="0" marL="0">
+              <a:buNone/>
+            </a:pPr>
+            <a:r>
+              <a:rPr lang="en-US" sz="1300" b="1" dirty="0">
+                <a:solidFill>
+                  <a:schemeClr val="accent2"/>
+                </a:solidFill>
+              </a:rPr>
+              <a:t>感情の統合　理想の池</a:t>
+            </a:r>
+            <a:endParaRPr lang="en-US" sz="1300" dirty="0"/>
+          </a:p>
+        </p:txBody>
+      </p:sp>
+      <p:sp>
+        <p:nvSpPr>
+          <p:cNvPr id="4" name="Text 0"/>
+          <p:cNvSpPr/>
+          <p:nvPr>
+            <p:ph idx="100" type="title" hasCustomPrompt="1"/>
+          </p:nvPr>
+        </p:nvSpPr>
+        <p:spPr>
+          <a:xfrm>
+            <a:off x="914400" y="1554480"/>
+            <a:ext cx="7315200" cy="1554480"/>
+          </a:xfrm>
+          <a:prstGeom prst="rect">
+            <a:avLst/>
+          </a:prstGeom>
+          <a:noFill/>
+          <a:ln/>
+        </p:spPr>
+        <p:txBody>
+          <a:bodyPr wrap="square" rtlCol="0" anchor="ctr"/>
+          <a:lstStyle/>
+          <a:p>
+            <a:pPr algn="ctr" indent="0" marL="0">
+              <a:buNone/>
+            </a:pPr>
+            <a:r>
+              <a:rPr lang="en-US" sz="3200" b="1" dirty="0">
+                <a:solidFill>
+                  <a:schemeClr val="tx2"/>
+                </a:solidFill>
+                <a:latin typeface="Yu Mincho" pitchFamily="34" charset="0"/>
+                <a:ea typeface="Yu Mincho" pitchFamily="34" charset="-122"/>
+                <a:cs typeface="Yu Mincho" pitchFamily="34" charset="-120"/>
+              </a:rPr>
+              <a:t>池に入れたら、</a:t>
+            </a:r>
+            <a:endParaRPr lang="en-US" sz="3200" dirty="0"/>
+          </a:p>
+          <a:p>
+            <a:pPr algn="ctr" indent="0" marL="0">
+              <a:buNone/>
+            </a:pPr>
+            <a:r>
+              <a:rPr lang="en-US" sz="3200" b="1" dirty="0">
+                <a:solidFill>
+                  <a:schemeClr val="tx2"/>
+                </a:solidFill>
+                <a:latin typeface="Yu Mincho" pitchFamily="34" charset="0"/>
+                <a:ea typeface="Yu Mincho" pitchFamily="34" charset="-122"/>
+                <a:cs typeface="Yu Mincho" pitchFamily="34" charset="-120"/>
+              </a:rPr>
+              <a:t>何が見えますか？</a:t>
+            </a:r>
+            <a:endParaRPr lang="en-US" sz="3200" dirty="0"/>
+          </a:p>
+        </p:txBody>
+      </p:sp>
+      <p:sp>
+        <p:nvSpPr>
+          <p:cNvPr id="25" name="Slide Number Placeholder 0"/>
+          <p:cNvSpPr>
+            <a:spLocks noGrp="1"/>
+          </p:cNvSpPr>
+          <p:nvPr>
+            <p:ph type="sldNum" sz="quarter" idx="4294967295"/>
+          </p:nvPr>
+        </p:nvSpPr>
+        <p:spPr>
+          <a:xfrm>
+            <a:off x="8229600" y="4754880"/>
+            <a:ext cx="457200" cy="274320"/>
+          </a:xfrm>
+          <a:prstGeom prst="rect">
+            <a:avLst/>
+          </a:prstGeom>
+          <a:extLst>
+            <a:ext uri="{C572A759-6A51-4108-AA02-DFA0A04FC94B}">
+              <ma14:wrappingTextBoxFlag xmlns:ma14="http://schemas.microsoft.com/office/mac/drawingml/2011/main" val="0"/>
+            </a:ext>
+          </a:extLst>
+        </p:spPr>
+        <p:txBody>
+          <a:bodyPr/>
+          <a:lstStyle>
+            <a:lvl1pPr>
+              <a:defRPr sz="900">
+                <a:solidFill>
+                  <a:srgbClr val="B08A4E"/>
+                </a:solidFill>
+              </a:defRPr>
+            </a:lvl1pPr>
+          </a:lstStyle>
+          <a:p>
+            <a:pPr algn="r"/>
+            <a:fld id="{F7021451-1387-4CA6-816F-3879F97B5CBC}" type="slidenum">
+              <a:rPr b="0" lang="en-US"/>
+              <a:t>59</a:t>
+            </a:fld>
+            <a:endParaRPr lang="en-US"/>
+          </a:p>
+        </p:txBody>
+      </p:sp>
+    </p:spTree>
+  </p:cSld>
+  <p:clrMapOvr>
+    <a:masterClrMapping/>
+  </p:clrMapOvr>
+</p:sld>
+</file>
+
+<file path=ppt/slides/slide6.xml><?xml version="1.0" encoding="utf-8"?>
+<p:sld xmlns:a="http://schemas.openxmlformats.org/drawingml/2006/main" xmlns:r="http://schemas.openxmlformats.org/officeDocument/2006/relationships" xmlns:p="http://schemas.openxmlformats.org/presentationml/2006/main">
+  <p:cSld name="Slide 6">
+    <p:spTree>
+      <p:nvGrpSpPr>
+        <p:cNvPr id="1" name=""/>
+        <p:cNvGrpSpPr/>
+        <p:nvPr/>
+      </p:nvGrpSpPr>
+      <p:grpSpPr>
+        <a:xfrm>
+          <a:off x="0" y="0"/>
+          <a:ext cx="0" cy="0"/>
+          <a:chOff x="0" y="0"/>
+          <a:chExt cx="0" cy="0"/>
+        </a:xfrm>
+      </p:grpSpPr>
+      <p:sp>
+        <p:nvSpPr>
+          <p:cNvPr id="2" name="frame"/>
+          <p:cNvSpPr/>
+          <p:nvPr/>
+        </p:nvSpPr>
+        <p:spPr>
+          <a:xfrm>
+            <a:off x="228600" y="137160"/>
+            <a:ext cx="8686800" cy="4526280"/>
+          </a:xfrm>
+          <a:prstGeom prst="rect">
+            <a:avLst/>
+          </a:prstGeom>
+          <a:ln w="12700">
+            <a:solidFill>
+              <a:srgbClr val="B08A4E"/>
+            </a:solidFill>
+            <a:prstDash val="solid"/>
+          </a:ln>
+        </p:spPr>
+        <p:txBody>
+          <a:bodyPr/>
+          <a:p/>
+        </p:txBody>
+      </p:sp>
+      <p:sp>
+        <p:nvSpPr>
+          <p:cNvPr id="3" name="qlabel"/>
+          <p:cNvSpPr txBox="1"/>
+          <p:nvPr/>
+        </p:nvSpPr>
+        <p:spPr>
+          <a:xfrm>
+            <a:off x="457200" y="320040"/>
+            <a:ext cx="8229600" cy="365760"/>
+          </a:xfrm>
+          <a:prstGeom prst="rect">
+            <a:avLst/>
+          </a:prstGeom>
+          <a:noFill/>
+          <a:ln/>
+        </p:spPr>
+        <p:txBody>
+          <a:bodyPr wrap="square" lIns="0" tIns="0" rIns="0" bIns="0" rtlCol="0" anchor="t"/>
+          <a:lstStyle/>
+          <a:p>
+            <a:pPr algn="ctr" indent="0" marL="0">
+              <a:buNone/>
+            </a:pPr>
+            <a:r>
+              <a:rPr lang="en-US" sz="1300" b="1" dirty="0">
+                <a:solidFill>
+                  <a:schemeClr val="accent2"/>
+                </a:solidFill>
+              </a:rPr>
+              <a:t>どのような事でお悩みですか？</a:t>
+            </a:r>
+            <a:endParaRPr lang="en-US" sz="1300" dirty="0"/>
+          </a:p>
+        </p:txBody>
+      </p:sp>
+      <p:sp>
+        <p:nvSpPr>
+          <p:cNvPr id="4" name="Text 0"/>
+          <p:cNvSpPr/>
+          <p:nvPr>
+            <p:ph idx="100" type="title" hasCustomPrompt="1"/>
+          </p:nvPr>
+        </p:nvSpPr>
+        <p:spPr>
+          <a:xfrm>
+            <a:off x="914400" y="1554480"/>
+            <a:ext cx="7315200" cy="1554480"/>
+          </a:xfrm>
+          <a:prstGeom prst="rect">
+            <a:avLst/>
+          </a:prstGeom>
+          <a:noFill/>
+          <a:ln/>
+        </p:spPr>
+        <p:txBody>
+          <a:bodyPr wrap="square" rtlCol="0" anchor="ctr"/>
+          <a:lstStyle/>
+          <a:p>
+            <a:pPr algn="ctr" indent="0" marL="0">
+              <a:buNone/>
+            </a:pPr>
+            <a:r>
+              <a:rPr lang="en-US" sz="3200" b="1" dirty="0">
+                <a:solidFill>
+                  <a:schemeClr val="tx2"/>
+                </a:solidFill>
+                <a:latin typeface="Yu Mincho" pitchFamily="34" charset="0"/>
+                <a:ea typeface="Yu Mincho" pitchFamily="34" charset="-122"/>
+                <a:cs typeface="Yu Mincho" pitchFamily="34" charset="-120"/>
+              </a:rPr>
+              <a:t>それは、いつからですか？</a:t>
+            </a:r>
+            <a:endParaRPr lang="en-US" sz="3200" dirty="0"/>
+          </a:p>
+        </p:txBody>
+      </p:sp>
+      <p:sp>
+        <p:nvSpPr>
+          <p:cNvPr id="5" name="Text 0"/>
+          <p:cNvSpPr/>
+          <p:nvPr>
+            <p:ph idx="101" type="body" hasCustomPrompt="1"/>
+          </p:nvPr>
+        </p:nvSpPr>
+        <p:spPr>
+          <a:xfrm>
+            <a:off x="914400" y="3200400"/>
+            <a:ext cx="7315200" cy="731520"/>
+          </a:xfrm>
+          <a:prstGeom prst="rect">
+            <a:avLst/>
+          </a:prstGeom>
+          <a:noFill/>
+          <a:ln/>
+        </p:spPr>
+        <p:txBody>
+          <a:bodyPr wrap="square" rtlCol="0" anchor="t"/>
+          <a:lstStyle/>
+          <a:p>
+            <a:pPr algn="ctr" indent="0" marL="0">
+              <a:buNone/>
+            </a:pPr>
+            <a:r>
+              <a:rPr lang="en-US" sz="1500" dirty="0">
+                <a:solidFill>
+                  <a:schemeClr val="accent2"/>
+                </a:solidFill>
+              </a:rPr>
+              <a:t>どのくらいの期間、続いていますか？</a:t>
+            </a:r>
+            <a:endParaRPr lang="en-US" sz="1500" dirty="0"/>
+          </a:p>
+        </p:txBody>
+      </p:sp>
+      <p:sp>
+        <p:nvSpPr>
+          <p:cNvPr id="25" name="Slide Number Placeholder 0"/>
+          <p:cNvSpPr>
+            <a:spLocks noGrp="1"/>
+          </p:cNvSpPr>
+          <p:nvPr>
+            <p:ph type="sldNum" sz="quarter" idx="4294967295"/>
+          </p:nvPr>
+        </p:nvSpPr>
+        <p:spPr>
+          <a:xfrm>
+            <a:off x="8229600" y="4754880"/>
+            <a:ext cx="457200" cy="274320"/>
+          </a:xfrm>
+          <a:prstGeom prst="rect">
+            <a:avLst/>
+          </a:prstGeom>
+          <a:extLst>
+            <a:ext uri="{C572A759-6A51-4108-AA02-DFA0A04FC94B}">
+              <ma14:wrappingTextBoxFlag xmlns:ma14="http://schemas.microsoft.com/office/mac/drawingml/2011/main" val="0"/>
+            </a:ext>
+          </a:extLst>
+        </p:spPr>
+        <p:txBody>
+          <a:bodyPr/>
+          <a:lstStyle>
+            <a:lvl1pPr>
+              <a:defRPr sz="900">
+                <a:solidFill>
+                  <a:srgbClr val="B08A4E"/>
+                </a:solidFill>
+              </a:defRPr>
+            </a:lvl1pPr>
+          </a:lstStyle>
+          <a:p>
+            <a:pPr algn="r"/>
+            <a:fld id="{F7021451-1387-4CA6-816F-3879F97B5CBC}" type="slidenum">
+              <a:rPr b="0" lang="en-US"/>
+              <a:t>6</a:t>
+            </a:fld>
+            <a:endParaRPr lang="en-US"/>
+          </a:p>
+        </p:txBody>
+      </p:sp>
+    </p:spTree>
+  </p:cSld>
+  <p:clrMapOvr>
+    <a:masterClrMapping/>
+  </p:clrMapOvr>
+</p:sld>
+</file>
+
+<file path=ppt/slides/slide60.xml><?xml version="1.0" encoding="utf-8"?>
+<p:sld xmlns:a="http://schemas.openxmlformats.org/drawingml/2006/main" xmlns:r="http://schemas.openxmlformats.org/officeDocument/2006/relationships" xmlns:p="http://schemas.openxmlformats.org/presentationml/2006/main">
+  <p:cSld name="Slide 60">
+    <p:spTree>
+      <p:nvGrpSpPr>
+        <p:cNvPr id="1" name=""/>
+        <p:cNvGrpSpPr/>
+        <p:nvPr/>
+      </p:nvGrpSpPr>
+      <p:grpSpPr>
+        <a:xfrm>
+          <a:off x="0" y="0"/>
+          <a:ext cx="0" cy="0"/>
+          <a:chOff x="0" y="0"/>
+          <a:chExt cx="0" cy="0"/>
+        </a:xfrm>
+      </p:grpSpPr>
+      <p:sp>
+        <p:nvSpPr>
+          <p:cNvPr id="2" name="frame"/>
+          <p:cNvSpPr/>
+          <p:nvPr/>
+        </p:nvSpPr>
+        <p:spPr>
+          <a:xfrm>
+            <a:off x="228600" y="137160"/>
+            <a:ext cx="8686800" cy="4526280"/>
+          </a:xfrm>
+          <a:prstGeom prst="rect">
+            <a:avLst/>
+          </a:prstGeom>
+          <a:ln w="12700">
+            <a:solidFill>
+              <a:srgbClr val="B08A4E"/>
+            </a:solidFill>
+            <a:prstDash val="solid"/>
+          </a:ln>
+        </p:spPr>
+        <p:txBody>
+          <a:bodyPr/>
+          <a:p/>
+        </p:txBody>
+      </p:sp>
+      <p:sp>
+        <p:nvSpPr>
+          <p:cNvPr id="3" name="qlabel"/>
+          <p:cNvSpPr txBox="1"/>
+          <p:nvPr/>
+        </p:nvSpPr>
+        <p:spPr>
+          <a:xfrm>
+            <a:off x="457200" y="320040"/>
+            <a:ext cx="8229600" cy="365760"/>
+          </a:xfrm>
+          <a:prstGeom prst="rect">
+            <a:avLst/>
+          </a:prstGeom>
+          <a:noFill/>
+          <a:ln/>
+        </p:spPr>
+        <p:txBody>
+          <a:bodyPr wrap="square" lIns="0" tIns="0" rIns="0" bIns="0" rtlCol="0" anchor="t"/>
+          <a:lstStyle/>
+          <a:p>
+            <a:pPr algn="ctr" indent="0" marL="0">
+              <a:buNone/>
+            </a:pPr>
+            <a:r>
+              <a:rPr lang="en-US" sz="1300" b="1" dirty="0">
+                <a:solidFill>
+                  <a:schemeClr val="accent2"/>
+                </a:solidFill>
+              </a:rPr>
+              <a:t>感情の統合　理想の池</a:t>
+            </a:r>
+            <a:endParaRPr lang="en-US" sz="1300" dirty="0"/>
+          </a:p>
+        </p:txBody>
+      </p:sp>
+      <p:sp>
+        <p:nvSpPr>
+          <p:cNvPr id="4" name="Text 0"/>
+          <p:cNvSpPr/>
+          <p:nvPr>
+            <p:ph idx="100" type="title" hasCustomPrompt="1"/>
+          </p:nvPr>
+        </p:nvSpPr>
+        <p:spPr>
+          <a:xfrm>
+            <a:off x="914400" y="1554480"/>
+            <a:ext cx="7315200" cy="1554480"/>
+          </a:xfrm>
+          <a:prstGeom prst="rect">
+            <a:avLst/>
+          </a:prstGeom>
+          <a:noFill/>
+          <a:ln/>
+        </p:spPr>
+        <p:txBody>
+          <a:bodyPr wrap="square" rtlCol="0" anchor="ctr"/>
+          <a:lstStyle/>
+          <a:p>
+            <a:pPr algn="ctr" indent="0" marL="0">
+              <a:buNone/>
+            </a:pPr>
+            <a:r>
+              <a:rPr lang="en-US" sz="3200" b="1" dirty="0">
+                <a:solidFill>
+                  <a:schemeClr val="tx2"/>
+                </a:solidFill>
+                <a:latin typeface="Yu Mincho" pitchFamily="34" charset="0"/>
+                <a:ea typeface="Yu Mincho" pitchFamily="34" charset="-122"/>
+                <a:cs typeface="Yu Mincho" pitchFamily="34" charset="-120"/>
+              </a:rPr>
+              <a:t>先に進んで</a:t>
+            </a:r>
+            <a:endParaRPr lang="en-US" sz="3200" dirty="0"/>
+          </a:p>
+          <a:p>
+            <a:pPr algn="ctr" indent="0" marL="0">
+              <a:buNone/>
+            </a:pPr>
+            <a:r>
+              <a:rPr lang="en-US" sz="3200" b="1" dirty="0">
+                <a:solidFill>
+                  <a:schemeClr val="tx2"/>
+                </a:solidFill>
+                <a:latin typeface="Yu Mincho" pitchFamily="34" charset="0"/>
+                <a:ea typeface="Yu Mincho" pitchFamily="34" charset="-122"/>
+                <a:cs typeface="Yu Mincho" pitchFamily="34" charset="-120"/>
+              </a:rPr>
+              <a:t>みましょう</a:t>
+            </a:r>
+            <a:endParaRPr lang="en-US" sz="3200" dirty="0"/>
+          </a:p>
+        </p:txBody>
+      </p:sp>
+      <p:sp>
+        <p:nvSpPr>
+          <p:cNvPr id="5" name="Text 0"/>
+          <p:cNvSpPr/>
+          <p:nvPr>
+            <p:ph idx="101" type="body" hasCustomPrompt="1"/>
+          </p:nvPr>
+        </p:nvSpPr>
+        <p:spPr>
+          <a:xfrm>
+            <a:off x="914400" y="3200400"/>
+            <a:ext cx="7315200" cy="731520"/>
+          </a:xfrm>
+          <a:prstGeom prst="rect">
+            <a:avLst/>
+          </a:prstGeom>
+          <a:noFill/>
+          <a:ln/>
+        </p:spPr>
+        <p:txBody>
+          <a:bodyPr wrap="square" rtlCol="0" anchor="t"/>
+          <a:lstStyle/>
+          <a:p>
+            <a:pPr algn="ctr" indent="0" marL="0">
+              <a:buNone/>
+            </a:pPr>
+            <a:r>
+              <a:rPr lang="en-US" sz="1500" dirty="0">
+                <a:solidFill>
+                  <a:schemeClr val="accent2"/>
+                </a:solidFill>
+              </a:rPr>
+              <a:t>何が見えますか？</a:t>
+            </a:r>
+            <a:endParaRPr lang="en-US" sz="1500" dirty="0"/>
+          </a:p>
+        </p:txBody>
+      </p:sp>
+      <p:sp>
+        <p:nvSpPr>
+          <p:cNvPr id="25" name="Slide Number Placeholder 0"/>
+          <p:cNvSpPr>
+            <a:spLocks noGrp="1"/>
+          </p:cNvSpPr>
+          <p:nvPr>
+            <p:ph type="sldNum" sz="quarter" idx="4294967295"/>
+          </p:nvPr>
+        </p:nvSpPr>
+        <p:spPr>
+          <a:xfrm>
+            <a:off x="8229600" y="4754880"/>
+            <a:ext cx="457200" cy="274320"/>
+          </a:xfrm>
+          <a:prstGeom prst="rect">
+            <a:avLst/>
+          </a:prstGeom>
+          <a:extLst>
+            <a:ext uri="{C572A759-6A51-4108-AA02-DFA0A04FC94B}">
+              <ma14:wrappingTextBoxFlag xmlns:ma14="http://schemas.microsoft.com/office/mac/drawingml/2011/main" val="0"/>
+            </a:ext>
+          </a:extLst>
+        </p:spPr>
+        <p:txBody>
+          <a:bodyPr/>
+          <a:lstStyle>
+            <a:lvl1pPr>
+              <a:defRPr sz="900">
+                <a:solidFill>
+                  <a:srgbClr val="B08A4E"/>
+                </a:solidFill>
+              </a:defRPr>
+            </a:lvl1pPr>
+          </a:lstStyle>
+          <a:p>
+            <a:pPr algn="r"/>
+            <a:fld id="{F7021451-1387-4CA6-816F-3879F97B5CBC}" type="slidenum">
+              <a:rPr b="0" lang="en-US"/>
+              <a:t>60</a:t>
+            </a:fld>
+            <a:endParaRPr lang="en-US"/>
+          </a:p>
+        </p:txBody>
+      </p:sp>
+    </p:spTree>
+  </p:cSld>
+  <p:clrMapOvr>
+    <a:masterClrMapping/>
+  </p:clrMapOvr>
+</p:sld>
+</file>
+
+<file path=ppt/slides/slide61.xml><?xml version="1.0" encoding="utf-8"?>
+<p:sld xmlns:a="http://schemas.openxmlformats.org/drawingml/2006/main" xmlns:r="http://schemas.openxmlformats.org/officeDocument/2006/relationships" xmlns:p="http://schemas.openxmlformats.org/presentationml/2006/main">
+  <p:cSld name="Slide 61">
+    <p:spTree>
+      <p:nvGrpSpPr>
+        <p:cNvPr id="1" name=""/>
+        <p:cNvGrpSpPr/>
+        <p:nvPr/>
+      </p:nvGrpSpPr>
+      <p:grpSpPr>
+        <a:xfrm>
+          <a:off x="0" y="0"/>
+          <a:ext cx="0" cy="0"/>
+          <a:chOff x="0" y="0"/>
+          <a:chExt cx="0" cy="0"/>
+        </a:xfrm>
+      </p:grpSpPr>
+      <p:sp>
+        <p:nvSpPr>
+          <p:cNvPr id="2" name="frame"/>
+          <p:cNvSpPr/>
+          <p:nvPr/>
+        </p:nvSpPr>
+        <p:spPr>
+          <a:xfrm>
+            <a:off x="228600" y="137160"/>
+            <a:ext cx="8686800" cy="4526280"/>
+          </a:xfrm>
+          <a:prstGeom prst="rect">
+            <a:avLst/>
+          </a:prstGeom>
+          <a:ln w="12700">
+            <a:solidFill>
+              <a:srgbClr val="B08A4E"/>
+            </a:solidFill>
+            <a:prstDash val="solid"/>
+          </a:ln>
+        </p:spPr>
+        <p:txBody>
+          <a:bodyPr/>
+          <a:p/>
+        </p:txBody>
+      </p:sp>
+      <p:sp>
+        <p:nvSpPr>
+          <p:cNvPr id="3" name="qlabel"/>
+          <p:cNvSpPr txBox="1"/>
+          <p:nvPr/>
+        </p:nvSpPr>
+        <p:spPr>
+          <a:xfrm>
+            <a:off x="457200" y="320040"/>
+            <a:ext cx="8229600" cy="365760"/>
+          </a:xfrm>
+          <a:prstGeom prst="rect">
+            <a:avLst/>
+          </a:prstGeom>
+          <a:noFill/>
+          <a:ln/>
+        </p:spPr>
+        <p:txBody>
+          <a:bodyPr wrap="square" lIns="0" tIns="0" rIns="0" bIns="0" rtlCol="0" anchor="t"/>
+          <a:lstStyle/>
+          <a:p>
+            <a:pPr algn="ctr" indent="0" marL="0">
+              <a:buNone/>
+            </a:pPr>
+            <a:r>
+              <a:rPr lang="en-US" sz="1300" b="1" dirty="0">
+                <a:solidFill>
+                  <a:schemeClr val="accent2"/>
+                </a:solidFill>
+              </a:rPr>
+              <a:t>感情の統合　理想の池</a:t>
+            </a:r>
+            <a:endParaRPr lang="en-US" sz="1300" dirty="0"/>
+          </a:p>
+        </p:txBody>
+      </p:sp>
+      <p:sp>
+        <p:nvSpPr>
+          <p:cNvPr id="4" name="Text 0"/>
+          <p:cNvSpPr/>
+          <p:nvPr>
+            <p:ph idx="100" type="title" hasCustomPrompt="1"/>
+          </p:nvPr>
+        </p:nvSpPr>
+        <p:spPr>
+          <a:xfrm>
+            <a:off x="914400" y="1554480"/>
+            <a:ext cx="7315200" cy="1554480"/>
+          </a:xfrm>
+          <a:prstGeom prst="rect">
+            <a:avLst/>
+          </a:prstGeom>
+          <a:noFill/>
+          <a:ln/>
+        </p:spPr>
+        <p:txBody>
+          <a:bodyPr wrap="square" rtlCol="0" anchor="ctr"/>
+          <a:lstStyle/>
+          <a:p>
+            <a:pPr algn="ctr" indent="0" marL="0">
+              <a:buNone/>
+            </a:pPr>
+            <a:r>
+              <a:rPr lang="en-US" sz="3200" b="1" dirty="0">
+                <a:solidFill>
+                  <a:schemeClr val="tx2"/>
+                </a:solidFill>
+                <a:latin typeface="Yu Mincho" pitchFamily="34" charset="0"/>
+                <a:ea typeface="Yu Mincho" pitchFamily="34" charset="-122"/>
+                <a:cs typeface="Yu Mincho" pitchFamily="34" charset="-120"/>
+              </a:rPr>
+              <a:t>そこから、入ってきた入口を</a:t>
+            </a:r>
+            <a:endParaRPr lang="en-US" sz="3200" dirty="0"/>
+          </a:p>
+          <a:p>
+            <a:pPr algn="ctr" indent="0" marL="0">
+              <a:buNone/>
+            </a:pPr>
+            <a:r>
+              <a:rPr lang="en-US" sz="3200" b="1" dirty="0">
+                <a:solidFill>
+                  <a:schemeClr val="tx2"/>
+                </a:solidFill>
+                <a:latin typeface="Yu Mincho" pitchFamily="34" charset="0"/>
+                <a:ea typeface="Yu Mincho" pitchFamily="34" charset="-122"/>
+                <a:cs typeface="Yu Mincho" pitchFamily="34" charset="-120"/>
+              </a:rPr>
+              <a:t>見てみましょう</a:t>
+            </a:r>
+            <a:endParaRPr lang="en-US" sz="3200" dirty="0"/>
+          </a:p>
+          <a:p>
+            <a:pPr algn="ctr" indent="0" marL="0">
+              <a:buNone/>
+            </a:pPr>
+            <a:r>
+              <a:rPr lang="en-US" sz="3200" b="1" dirty="0">
+                <a:solidFill>
+                  <a:schemeClr val="tx2"/>
+                </a:solidFill>
+                <a:latin typeface="Yu Mincho" pitchFamily="34" charset="0"/>
+                <a:ea typeface="Yu Mincho" pitchFamily="34" charset="-122"/>
+                <a:cs typeface="Yu Mincho" pitchFamily="34" charset="-120"/>
+              </a:rPr>
+              <a:t>何が見えますか？</a:t>
+            </a:r>
+            <a:endParaRPr lang="en-US" sz="3200" dirty="0"/>
+          </a:p>
+        </p:txBody>
+      </p:sp>
+      <p:sp>
+        <p:nvSpPr>
+          <p:cNvPr id="25" name="Slide Number Placeholder 0"/>
+          <p:cNvSpPr>
+            <a:spLocks noGrp="1"/>
+          </p:cNvSpPr>
+          <p:nvPr>
+            <p:ph type="sldNum" sz="quarter" idx="4294967295"/>
+          </p:nvPr>
+        </p:nvSpPr>
+        <p:spPr>
+          <a:xfrm>
+            <a:off x="8229600" y="4754880"/>
+            <a:ext cx="457200" cy="274320"/>
+          </a:xfrm>
+          <a:prstGeom prst="rect">
+            <a:avLst/>
+          </a:prstGeom>
+          <a:extLst>
+            <a:ext uri="{C572A759-6A51-4108-AA02-DFA0A04FC94B}">
+              <ma14:wrappingTextBoxFlag xmlns:ma14="http://schemas.microsoft.com/office/mac/drawingml/2011/main" val="0"/>
+            </a:ext>
+          </a:extLst>
+        </p:spPr>
+        <p:txBody>
+          <a:bodyPr/>
+          <a:lstStyle>
+            <a:lvl1pPr>
+              <a:defRPr sz="900">
+                <a:solidFill>
+                  <a:srgbClr val="B08A4E"/>
+                </a:solidFill>
+              </a:defRPr>
+            </a:lvl1pPr>
+          </a:lstStyle>
+          <a:p>
+            <a:pPr algn="r"/>
+            <a:fld id="{F7021451-1387-4CA6-816F-3879F97B5CBC}" type="slidenum">
+              <a:rPr b="0" lang="en-US"/>
+              <a:t>61</a:t>
+            </a:fld>
+            <a:endParaRPr lang="en-US"/>
+          </a:p>
+        </p:txBody>
+      </p:sp>
+    </p:spTree>
+  </p:cSld>
+  <p:clrMapOvr>
+    <a:masterClrMapping/>
+  </p:clrMapOvr>
+</p:sld>
+</file>
+
+<file path=ppt/slides/slide62.xml><?xml version="1.0" encoding="utf-8"?>
+<p:sld xmlns:a="http://schemas.openxmlformats.org/drawingml/2006/main" xmlns:r="http://schemas.openxmlformats.org/officeDocument/2006/relationships" xmlns:p="http://schemas.openxmlformats.org/presentationml/2006/main">
+  <p:cSld name="Slide 62">
+    <p:spTree>
+      <p:nvGrpSpPr>
+        <p:cNvPr id="1" name=""/>
+        <p:cNvGrpSpPr/>
+        <p:nvPr/>
+      </p:nvGrpSpPr>
+      <p:grpSpPr>
+        <a:xfrm>
+          <a:off x="0" y="0"/>
+          <a:ext cx="0" cy="0"/>
+          <a:chOff x="0" y="0"/>
+          <a:chExt cx="0" cy="0"/>
+        </a:xfrm>
+      </p:grpSpPr>
+      <p:sp>
+        <p:nvSpPr>
+          <p:cNvPr id="2" name="Text 0"/>
+          <p:cNvSpPr/>
+          <p:nvPr>
+            <p:ph idx="100" type="title" hasCustomPrompt="1"/>
+          </p:nvPr>
+        </p:nvSpPr>
+        <p:spPr>
+          <a:xfrm>
+            <a:off x="731520" y="1828800"/>
+            <a:ext cx="7680960" cy="914400"/>
+          </a:xfrm>
+          <a:prstGeom prst="rect">
+            <a:avLst/>
+          </a:prstGeom>
+          <a:noFill/>
+          <a:ln/>
+        </p:spPr>
+        <p:txBody>
+          <a:bodyPr wrap="square" rtlCol="0" anchor="ctr"/>
+          <a:lstStyle/>
+          <a:p>
+            <a:pPr algn="ctr" indent="0" marL="0">
+              <a:buNone/>
+            </a:pPr>
+            <a:r>
+              <a:rPr lang="en-US" sz="3600" b="1" dirty="0">
+                <a:solidFill>
+                  <a:schemeClr val="accent2"/>
+                </a:solidFill>
+                <a:latin typeface="Yu Mincho" pitchFamily="34" charset="0"/>
+                <a:ea typeface="Yu Mincho" pitchFamily="34" charset="-122"/>
+                <a:cs typeface="Yu Mincho" pitchFamily="34" charset="-120"/>
+              </a:rPr>
+              <a:t>エネルギーで取り除く</a:t>
+            </a:r>
+            <a:endParaRPr lang="en-US" sz="3600" dirty="0"/>
+          </a:p>
+        </p:txBody>
+      </p:sp>
+      <p:sp>
+        <p:nvSpPr>
+          <p:cNvPr id="3" name="Text 0"/>
+          <p:cNvSpPr/>
+          <p:nvPr>
+            <p:ph idx="101" type="body" hasCustomPrompt="1"/>
+          </p:nvPr>
+        </p:nvSpPr>
+        <p:spPr>
+          <a:xfrm>
+            <a:off x="731520" y="2788920"/>
+            <a:ext cx="7680960" cy="822960"/>
+          </a:xfrm>
+          <a:prstGeom prst="rect">
+            <a:avLst/>
+          </a:prstGeom>
+          <a:noFill/>
+          <a:ln/>
+        </p:spPr>
+        <p:txBody>
+          <a:bodyPr wrap="square" rtlCol="0" anchor="t"/>
+          <a:lstStyle/>
+          <a:p>
+            <a:pPr algn="ctr" indent="0" marL="0">
+              <a:buNone/>
+            </a:pPr>
+            <a:r>
+              <a:rPr lang="en-US" sz="1600" dirty="0">
+                <a:solidFill>
+                  <a:schemeClr val="tx1"/>
+                </a:solidFill>
+              </a:rPr>
+              <a:t>残っている痛みを、やさしく手放していきます（95〜110分）</a:t>
+            </a:r>
+            <a:endParaRPr lang="en-US" sz="1600" dirty="0"/>
+          </a:p>
+          <a:p>
+            <a:pPr algn="ctr" indent="0" marL="0">
+              <a:buNone/>
+            </a:pPr>
+            <a:r>
+              <a:rPr lang="en-US" sz="1600" dirty="0">
+                <a:solidFill>
+                  <a:schemeClr val="tx1"/>
+                </a:solidFill>
+              </a:rPr>
+              <a:t>はじめる前に、今の気持ちと胸の感じを確かめます。終わったら、感じたことを言葉にしてみましょう</a:t>
+            </a:r>
+            <a:endParaRPr lang="en-US" sz="1600" dirty="0"/>
+          </a:p>
+        </p:txBody>
+      </p:sp>
+    </p:spTree>
+  </p:cSld>
+  <p:clrMapOvr>
+    <a:masterClrMapping/>
+  </p:clrMapOvr>
+</p:sld>
+</file>
+
+<file path=ppt/slides/slide63.xml><?xml version="1.0" encoding="utf-8"?>
+<p:sld xmlns:a="http://schemas.openxmlformats.org/drawingml/2006/main" xmlns:r="http://schemas.openxmlformats.org/officeDocument/2006/relationships" xmlns:p="http://schemas.openxmlformats.org/presentationml/2006/main">
+  <p:cSld name="Slide 63">
+    <p:spTree>
+      <p:nvGrpSpPr>
+        <p:cNvPr id="1" name=""/>
+        <p:cNvGrpSpPr/>
+        <p:nvPr/>
+      </p:nvGrpSpPr>
+      <p:grpSpPr>
+        <a:xfrm>
+          <a:off x="0" y="0"/>
+          <a:ext cx="0" cy="0"/>
+          <a:chOff x="0" y="0"/>
+          <a:chExt cx="0" cy="0"/>
+        </a:xfrm>
+      </p:grpSpPr>
+      <p:sp>
+        <p:nvSpPr>
+          <p:cNvPr id="2" name="frame"/>
+          <p:cNvSpPr/>
+          <p:nvPr/>
+        </p:nvSpPr>
+        <p:spPr>
+          <a:xfrm>
+            <a:off x="228600" y="137160"/>
+            <a:ext cx="8686800" cy="4526280"/>
+          </a:xfrm>
+          <a:prstGeom prst="rect">
+            <a:avLst/>
+          </a:prstGeom>
+          <a:ln w="12700">
+            <a:solidFill>
+              <a:srgbClr val="B08A4E"/>
+            </a:solidFill>
+            <a:prstDash val="solid"/>
+          </a:ln>
+        </p:spPr>
+        <p:txBody>
+          <a:bodyPr/>
+          <a:p/>
+        </p:txBody>
+      </p:sp>
+      <p:sp>
+        <p:nvSpPr>
+          <p:cNvPr id="3" name="qlabel"/>
+          <p:cNvSpPr txBox="1"/>
+          <p:nvPr/>
+        </p:nvSpPr>
+        <p:spPr>
+          <a:xfrm>
+            <a:off x="457200" y="320040"/>
+            <a:ext cx="8229600" cy="365760"/>
+          </a:xfrm>
+          <a:prstGeom prst="rect">
+            <a:avLst/>
+          </a:prstGeom>
+          <a:noFill/>
+          <a:ln/>
+        </p:spPr>
+        <p:txBody>
+          <a:bodyPr wrap="square" lIns="0" tIns="0" rIns="0" bIns="0" rtlCol="0" anchor="t"/>
+          <a:lstStyle/>
+          <a:p>
+            <a:pPr algn="ctr" indent="0" marL="0">
+              <a:buNone/>
+            </a:pPr>
+            <a:r>
+              <a:rPr lang="en-US" sz="1300" b="1" dirty="0">
+                <a:solidFill>
+                  <a:schemeClr val="accent2"/>
+                </a:solidFill>
+              </a:rPr>
+              <a:t>ふり返り</a:t>
+            </a:r>
+            <a:endParaRPr lang="en-US" sz="1300" dirty="0"/>
+          </a:p>
+        </p:txBody>
+      </p:sp>
+      <p:sp>
+        <p:nvSpPr>
+          <p:cNvPr id="4" name="Text 0"/>
+          <p:cNvSpPr/>
+          <p:nvPr>
+            <p:ph idx="100" type="title" hasCustomPrompt="1"/>
+          </p:nvPr>
+        </p:nvSpPr>
+        <p:spPr>
+          <a:xfrm>
+            <a:off x="914400" y="1554480"/>
+            <a:ext cx="7315200" cy="1554480"/>
+          </a:xfrm>
+          <a:prstGeom prst="rect">
+            <a:avLst/>
+          </a:prstGeom>
+          <a:noFill/>
+          <a:ln/>
+        </p:spPr>
+        <p:txBody>
+          <a:bodyPr wrap="square" rtlCol="0" anchor="ctr"/>
+          <a:lstStyle/>
+          <a:p>
+            <a:pPr algn="ctr" indent="0" marL="0">
+              <a:buNone/>
+            </a:pPr>
+            <a:r>
+              <a:rPr lang="en-US" sz="3200" b="1" dirty="0">
+                <a:solidFill>
+                  <a:schemeClr val="tx2"/>
+                </a:solidFill>
+                <a:latin typeface="Yu Mincho" pitchFamily="34" charset="0"/>
+                <a:ea typeface="Yu Mincho" pitchFamily="34" charset="-122"/>
+                <a:cs typeface="Yu Mincho" pitchFamily="34" charset="-120"/>
+              </a:rPr>
+              <a:t>最初に「1〜10」で聞いた</a:t>
+            </a:r>
+            <a:endParaRPr lang="en-US" sz="3200" dirty="0"/>
+          </a:p>
+          <a:p>
+            <a:pPr algn="ctr" indent="0" marL="0">
+              <a:buNone/>
+            </a:pPr>
+            <a:r>
+              <a:rPr lang="en-US" sz="3200" b="1" dirty="0">
+                <a:solidFill>
+                  <a:schemeClr val="tx2"/>
+                </a:solidFill>
+                <a:latin typeface="Yu Mincho" pitchFamily="34" charset="0"/>
+                <a:ea typeface="Yu Mincho" pitchFamily="34" charset="-122"/>
+                <a:cs typeface="Yu Mincho" pitchFamily="34" charset="-120"/>
+              </a:rPr>
+              <a:t>胸の痛みは、</a:t>
+            </a:r>
+            <a:endParaRPr lang="en-US" sz="3200" dirty="0"/>
+          </a:p>
+          <a:p>
+            <a:pPr algn="ctr" indent="0" marL="0">
+              <a:buNone/>
+            </a:pPr>
+            <a:r>
+              <a:rPr lang="en-US" sz="3200" b="1" dirty="0">
+                <a:solidFill>
+                  <a:schemeClr val="tx2"/>
+                </a:solidFill>
+                <a:latin typeface="Yu Mincho" pitchFamily="34" charset="0"/>
+                <a:ea typeface="Yu Mincho" pitchFamily="34" charset="-122"/>
+                <a:cs typeface="Yu Mincho" pitchFamily="34" charset="-120"/>
+              </a:rPr>
+              <a:t>いまどのくらいですか？</a:t>
+            </a:r>
+            <a:endParaRPr lang="en-US" sz="3200" dirty="0"/>
+          </a:p>
+        </p:txBody>
+      </p:sp>
+      <p:sp>
+        <p:nvSpPr>
+          <p:cNvPr id="5" name="Text 0"/>
+          <p:cNvSpPr/>
+          <p:nvPr>
+            <p:ph idx="101" type="body" hasCustomPrompt="1"/>
+          </p:nvPr>
+        </p:nvSpPr>
+        <p:spPr>
+          <a:xfrm>
+            <a:off x="914400" y="3200400"/>
+            <a:ext cx="7315200" cy="731520"/>
+          </a:xfrm>
+          <a:prstGeom prst="rect">
+            <a:avLst/>
+          </a:prstGeom>
+          <a:noFill/>
+          <a:ln/>
+        </p:spPr>
+        <p:txBody>
+          <a:bodyPr wrap="square" rtlCol="0" anchor="t"/>
+          <a:lstStyle/>
+          <a:p>
+            <a:pPr algn="ctr" indent="0" marL="0">
+              <a:buNone/>
+            </a:pPr>
+            <a:r>
+              <a:rPr lang="en-US" sz="1500" dirty="0">
+                <a:solidFill>
+                  <a:schemeClr val="accent2"/>
+                </a:solidFill>
+              </a:rPr>
+              <a:t>はじめ：＿＿　→　いま：＿＿</a:t>
+            </a:r>
+            <a:endParaRPr lang="en-US" sz="1500" dirty="0"/>
+          </a:p>
+        </p:txBody>
+      </p:sp>
+      <p:sp>
+        <p:nvSpPr>
+          <p:cNvPr id="25" name="Slide Number Placeholder 0"/>
+          <p:cNvSpPr>
+            <a:spLocks noGrp="1"/>
+          </p:cNvSpPr>
+          <p:nvPr>
+            <p:ph type="sldNum" sz="quarter" idx="4294967295"/>
+          </p:nvPr>
+        </p:nvSpPr>
+        <p:spPr>
+          <a:xfrm>
+            <a:off x="8229600" y="4754880"/>
+            <a:ext cx="457200" cy="274320"/>
+          </a:xfrm>
+          <a:prstGeom prst="rect">
+            <a:avLst/>
+          </a:prstGeom>
+          <a:extLst>
+            <a:ext uri="{C572A759-6A51-4108-AA02-DFA0A04FC94B}">
+              <ma14:wrappingTextBoxFlag xmlns:ma14="http://schemas.microsoft.com/office/mac/drawingml/2011/main" val="0"/>
+            </a:ext>
+          </a:extLst>
+        </p:spPr>
+        <p:txBody>
+          <a:bodyPr/>
+          <a:lstStyle>
+            <a:lvl1pPr>
+              <a:defRPr sz="900">
+                <a:solidFill>
+                  <a:srgbClr val="B08A4E"/>
+                </a:solidFill>
+              </a:defRPr>
+            </a:lvl1pPr>
+          </a:lstStyle>
+          <a:p>
+            <a:pPr algn="r"/>
+            <a:fld id="{F7021451-1387-4CA6-816F-3879F97B5CBC}" type="slidenum">
+              <a:rPr b="0" lang="en-US"/>
+              <a:t>63</a:t>
+            </a:fld>
+            <a:endParaRPr lang="en-US"/>
+          </a:p>
+        </p:txBody>
+      </p:sp>
+    </p:spTree>
+  </p:cSld>
+  <p:clrMapOvr>
+    <a:masterClrMapping/>
+  </p:clrMapOvr>
+</p:sld>
+</file>
+
+<file path=ppt/slides/slide64.xml><?xml version="1.0" encoding="utf-8"?>
+<p:sld xmlns:a="http://schemas.openxmlformats.org/drawingml/2006/main" xmlns:r="http://schemas.openxmlformats.org/officeDocument/2006/relationships" xmlns:p="http://schemas.openxmlformats.org/presentationml/2006/main">
+  <p:cSld name="Slide 64">
+    <p:spTree>
+      <p:nvGrpSpPr>
+        <p:cNvPr id="1" name=""/>
+        <p:cNvGrpSpPr/>
+        <p:nvPr/>
+      </p:nvGrpSpPr>
+      <p:grpSpPr>
+        <a:xfrm>
+          <a:off x="0" y="0"/>
+          <a:ext cx="0" cy="0"/>
+          <a:chOff x="0" y="0"/>
+          <a:chExt cx="0" cy="0"/>
+        </a:xfrm>
+      </p:grpSpPr>
+      <p:sp>
+        <p:nvSpPr>
+          <p:cNvPr id="2" name="frame"/>
+          <p:cNvSpPr/>
+          <p:nvPr/>
+        </p:nvSpPr>
+        <p:spPr>
+          <a:xfrm>
+            <a:off x="228600" y="137160"/>
+            <a:ext cx="8686800" cy="4526280"/>
+          </a:xfrm>
+          <a:prstGeom prst="rect">
+            <a:avLst/>
+          </a:prstGeom>
+          <a:ln w="12700">
+            <a:solidFill>
+              <a:srgbClr val="B08A4E"/>
+            </a:solidFill>
+            <a:prstDash val="solid"/>
+          </a:ln>
+        </p:spPr>
+        <p:txBody>
+          <a:bodyPr/>
+          <a:p/>
+        </p:txBody>
+      </p:sp>
+      <p:sp>
+        <p:nvSpPr>
+          <p:cNvPr id="3" name="qlabel"/>
+          <p:cNvSpPr txBox="1"/>
+          <p:nvPr/>
+        </p:nvSpPr>
+        <p:spPr>
+          <a:xfrm>
+            <a:off x="457200" y="320040"/>
+            <a:ext cx="8229600" cy="365760"/>
+          </a:xfrm>
+          <a:prstGeom prst="rect">
+            <a:avLst/>
+          </a:prstGeom>
+          <a:noFill/>
+          <a:ln/>
+        </p:spPr>
+        <p:txBody>
+          <a:bodyPr wrap="square" lIns="0" tIns="0" rIns="0" bIns="0" rtlCol="0" anchor="t"/>
+          <a:lstStyle/>
+          <a:p>
+            <a:pPr algn="ctr" indent="0" marL="0">
+              <a:buNone/>
+            </a:pPr>
+            <a:r>
+              <a:rPr lang="en-US" sz="1300" b="1" dirty="0">
+                <a:solidFill>
+                  <a:schemeClr val="accent2"/>
+                </a:solidFill>
+              </a:rPr>
+              <a:t>ふり返り</a:t>
+            </a:r>
+            <a:endParaRPr lang="en-US" sz="1300" dirty="0"/>
+          </a:p>
+        </p:txBody>
+      </p:sp>
+      <p:sp>
+        <p:nvSpPr>
+          <p:cNvPr id="4" name="Text 0"/>
+          <p:cNvSpPr/>
+          <p:nvPr>
+            <p:ph idx="100" type="title" hasCustomPrompt="1"/>
+          </p:nvPr>
+        </p:nvSpPr>
+        <p:spPr>
+          <a:xfrm>
+            <a:off x="914400" y="1554480"/>
+            <a:ext cx="7315200" cy="1554480"/>
+          </a:xfrm>
+          <a:prstGeom prst="rect">
+            <a:avLst/>
+          </a:prstGeom>
+          <a:noFill/>
+          <a:ln/>
+        </p:spPr>
+        <p:txBody>
+          <a:bodyPr wrap="square" rtlCol="0" anchor="ctr"/>
+          <a:lstStyle/>
+          <a:p>
+            <a:pPr algn="ctr" indent="0" marL="0">
+              <a:buNone/>
+            </a:pPr>
+            <a:r>
+              <a:rPr lang="en-US" sz="3200" b="1" dirty="0">
+                <a:solidFill>
+                  <a:schemeClr val="tx2"/>
+                </a:solidFill>
+                <a:latin typeface="Yu Mincho" pitchFamily="34" charset="0"/>
+                <a:ea typeface="Yu Mincho" pitchFamily="34" charset="-122"/>
+                <a:cs typeface="Yu Mincho" pitchFamily="34" charset="-120"/>
+              </a:rPr>
+              <a:t>今日、いちばん</a:t>
+            </a:r>
+            <a:endParaRPr lang="en-US" sz="3200" dirty="0"/>
+          </a:p>
+          <a:p>
+            <a:pPr algn="ctr" indent="0" marL="0">
+              <a:buNone/>
+            </a:pPr>
+            <a:r>
+              <a:rPr lang="en-US" sz="3200" b="1" dirty="0">
+                <a:solidFill>
+                  <a:schemeClr val="tx2"/>
+                </a:solidFill>
+                <a:latin typeface="Yu Mincho" pitchFamily="34" charset="0"/>
+                <a:ea typeface="Yu Mincho" pitchFamily="34" charset="-122"/>
+                <a:cs typeface="Yu Mincho" pitchFamily="34" charset="-120"/>
+              </a:rPr>
+              <a:t>変わったと感じることは</a:t>
+            </a:r>
+            <a:endParaRPr lang="en-US" sz="3200" dirty="0"/>
+          </a:p>
+          <a:p>
+            <a:pPr algn="ctr" indent="0" marL="0">
+              <a:buNone/>
+            </a:pPr>
+            <a:r>
+              <a:rPr lang="en-US" sz="3200" b="1" dirty="0">
+                <a:solidFill>
+                  <a:schemeClr val="tx2"/>
+                </a:solidFill>
+                <a:latin typeface="Yu Mincho" pitchFamily="34" charset="0"/>
+                <a:ea typeface="Yu Mincho" pitchFamily="34" charset="-122"/>
+                <a:cs typeface="Yu Mincho" pitchFamily="34" charset="-120"/>
+              </a:rPr>
+              <a:t>何ですか？</a:t>
+            </a:r>
+            <a:endParaRPr lang="en-US" sz="3200" dirty="0"/>
+          </a:p>
+        </p:txBody>
+      </p:sp>
+      <p:sp>
+        <p:nvSpPr>
+          <p:cNvPr id="5" name="Text 0"/>
+          <p:cNvSpPr/>
+          <p:nvPr>
+            <p:ph idx="101" type="body" hasCustomPrompt="1"/>
+          </p:nvPr>
+        </p:nvSpPr>
+        <p:spPr>
+          <a:xfrm>
+            <a:off x="914400" y="3200400"/>
+            <a:ext cx="7315200" cy="731520"/>
+          </a:xfrm>
+          <a:prstGeom prst="rect">
+            <a:avLst/>
+          </a:prstGeom>
+          <a:noFill/>
+          <a:ln/>
+        </p:spPr>
+        <p:txBody>
+          <a:bodyPr wrap="square" rtlCol="0" anchor="t"/>
+          <a:lstStyle/>
+          <a:p>
+            <a:pPr algn="ctr" indent="0" marL="0">
+              <a:buNone/>
+            </a:pPr>
+            <a:r>
+              <a:rPr lang="en-US" sz="1500" dirty="0">
+                <a:solidFill>
+                  <a:schemeClr val="accent2"/>
+                </a:solidFill>
+              </a:rPr>
+              <a:t>それが、今日持ち帰るものです</a:t>
+            </a:r>
+            <a:endParaRPr lang="en-US" sz="1500" dirty="0"/>
+          </a:p>
+        </p:txBody>
+      </p:sp>
+      <p:sp>
+        <p:nvSpPr>
+          <p:cNvPr id="25" name="Slide Number Placeholder 0"/>
+          <p:cNvSpPr>
+            <a:spLocks noGrp="1"/>
+          </p:cNvSpPr>
+          <p:nvPr>
+            <p:ph type="sldNum" sz="quarter" idx="4294967295"/>
+          </p:nvPr>
+        </p:nvSpPr>
+        <p:spPr>
+          <a:xfrm>
+            <a:off x="8229600" y="4754880"/>
+            <a:ext cx="457200" cy="274320"/>
+          </a:xfrm>
+          <a:prstGeom prst="rect">
+            <a:avLst/>
+          </a:prstGeom>
+          <a:extLst>
+            <a:ext uri="{C572A759-6A51-4108-AA02-DFA0A04FC94B}">
+              <ma14:wrappingTextBoxFlag xmlns:ma14="http://schemas.microsoft.com/office/mac/drawingml/2011/main" val="0"/>
+            </a:ext>
+          </a:extLst>
+        </p:spPr>
+        <p:txBody>
+          <a:bodyPr/>
+          <a:lstStyle>
+            <a:lvl1pPr>
+              <a:defRPr sz="900">
+                <a:solidFill>
+                  <a:srgbClr val="B08A4E"/>
+                </a:solidFill>
+              </a:defRPr>
+            </a:lvl1pPr>
+          </a:lstStyle>
+          <a:p>
+            <a:pPr algn="r"/>
+            <a:fld id="{F7021451-1387-4CA6-816F-3879F97B5CBC}" type="slidenum">
+              <a:rPr b="0" lang="en-US"/>
+              <a:t>64</a:t>
+            </a:fld>
+            <a:endParaRPr lang="en-US"/>
+          </a:p>
+        </p:txBody>
+      </p:sp>
+    </p:spTree>
+  </p:cSld>
+  <p:clrMapOvr>
+    <a:masterClrMapping/>
+  </p:clrMapOvr>
+</p:sld>
+</file>
+
+<file path=ppt/slides/slide65.xml><?xml version="1.0" encoding="utf-8"?>
+<p:sld xmlns:a="http://schemas.openxmlformats.org/drawingml/2006/main" xmlns:r="http://schemas.openxmlformats.org/officeDocument/2006/relationships" xmlns:p="http://schemas.openxmlformats.org/presentationml/2006/main">
+  <p:cSld name="Slide 65">
+    <p:spTree>
+      <p:nvGrpSpPr>
+        <p:cNvPr id="1" name=""/>
+        <p:cNvGrpSpPr/>
+        <p:nvPr/>
+      </p:nvGrpSpPr>
+      <p:grpSpPr>
+        <a:xfrm>
+          <a:off x="0" y="0"/>
+          <a:ext cx="0" cy="0"/>
+          <a:chOff x="0" y="0"/>
+          <a:chExt cx="0" cy="0"/>
+        </a:xfrm>
+      </p:grpSpPr>
+      <p:sp>
+        <p:nvSpPr>
+          <p:cNvPr id="2" name="frame"/>
+          <p:cNvSpPr/>
+          <p:nvPr/>
+        </p:nvSpPr>
+        <p:spPr>
+          <a:xfrm>
+            <a:off x="228600" y="137160"/>
+            <a:ext cx="8686800" cy="4526280"/>
+          </a:xfrm>
+          <a:prstGeom prst="rect">
+            <a:avLst/>
+          </a:prstGeom>
+          <a:ln w="12700">
+            <a:solidFill>
+              <a:srgbClr val="B08A4E"/>
+            </a:solidFill>
+            <a:prstDash val="solid"/>
+          </a:ln>
+        </p:spPr>
+        <p:txBody>
+          <a:bodyPr/>
+          <a:p/>
+        </p:txBody>
+      </p:sp>
+      <p:sp>
+        <p:nvSpPr>
+          <p:cNvPr id="3" name="qlabel"/>
+          <p:cNvSpPr txBox="1"/>
+          <p:nvPr/>
+        </p:nvSpPr>
+        <p:spPr>
+          <a:xfrm>
+            <a:off x="457200" y="320040"/>
+            <a:ext cx="8229600" cy="365760"/>
+          </a:xfrm>
+          <a:prstGeom prst="rect">
+            <a:avLst/>
+          </a:prstGeom>
+          <a:noFill/>
+          <a:ln/>
+        </p:spPr>
+        <p:txBody>
+          <a:bodyPr wrap="square" lIns="0" tIns="0" rIns="0" bIns="0" rtlCol="0" anchor="t"/>
+          <a:lstStyle/>
+          <a:p>
+            <a:pPr algn="ctr" indent="0" marL="0">
+              <a:buNone/>
+            </a:pPr>
+            <a:r>
+              <a:rPr lang="en-US" sz="1300" b="1" dirty="0">
+                <a:solidFill>
+                  <a:schemeClr val="accent2"/>
+                </a:solidFill>
+              </a:rPr>
+              <a:t>これから</a:t>
+            </a:r>
+            <a:endParaRPr lang="en-US" sz="1300" dirty="0"/>
+          </a:p>
+        </p:txBody>
+      </p:sp>
+      <p:sp>
+        <p:nvSpPr>
+          <p:cNvPr id="4" name="Text 0"/>
+          <p:cNvSpPr/>
+          <p:nvPr>
+            <p:ph idx="100" type="title" hasCustomPrompt="1"/>
+          </p:nvPr>
+        </p:nvSpPr>
+        <p:spPr>
+          <a:xfrm>
+            <a:off x="914400" y="1554480"/>
+            <a:ext cx="7315200" cy="1554480"/>
+          </a:xfrm>
+          <a:prstGeom prst="rect">
+            <a:avLst/>
+          </a:prstGeom>
+          <a:noFill/>
+          <a:ln/>
+        </p:spPr>
+        <p:txBody>
+          <a:bodyPr wrap="square" rtlCol="0" anchor="ctr"/>
+          <a:lstStyle/>
+          <a:p>
+            <a:pPr algn="ctr" indent="0" marL="0">
+              <a:buNone/>
+            </a:pPr>
+            <a:r>
+              <a:rPr lang="en-US" sz="3200" b="1" dirty="0">
+                <a:solidFill>
+                  <a:schemeClr val="tx2"/>
+                </a:solidFill>
+                <a:latin typeface="Yu Mincho" pitchFamily="34" charset="0"/>
+                <a:ea typeface="Yu Mincho" pitchFamily="34" charset="-122"/>
+                <a:cs typeface="Yu Mincho" pitchFamily="34" charset="-120"/>
+              </a:rPr>
+              <a:t>次に同じ感情が出てきたら、</a:t>
+            </a:r>
+            <a:endParaRPr lang="en-US" sz="3200" dirty="0"/>
+          </a:p>
+          <a:p>
+            <a:pPr algn="ctr" indent="0" marL="0">
+              <a:buNone/>
+            </a:pPr>
+            <a:r>
+              <a:rPr lang="en-US" sz="3200" b="1" dirty="0">
+                <a:solidFill>
+                  <a:schemeClr val="tx2"/>
+                </a:solidFill>
+                <a:latin typeface="Yu Mincho" pitchFamily="34" charset="0"/>
+                <a:ea typeface="Yu Mincho" pitchFamily="34" charset="-122"/>
+                <a:cs typeface="Yu Mincho" pitchFamily="34" charset="-120"/>
+              </a:rPr>
+              <a:t>自分にどんな言葉を</a:t>
+            </a:r>
+            <a:endParaRPr lang="en-US" sz="3200" dirty="0"/>
+          </a:p>
+          <a:p>
+            <a:pPr algn="ctr" indent="0" marL="0">
+              <a:buNone/>
+            </a:pPr>
+            <a:r>
+              <a:rPr lang="en-US" sz="3200" b="1" dirty="0">
+                <a:solidFill>
+                  <a:schemeClr val="tx2"/>
+                </a:solidFill>
+                <a:latin typeface="Yu Mincho" pitchFamily="34" charset="0"/>
+                <a:ea typeface="Yu Mincho" pitchFamily="34" charset="-122"/>
+                <a:cs typeface="Yu Mincho" pitchFamily="34" charset="-120"/>
+              </a:rPr>
+              <a:t>かけてあげたいですか？</a:t>
+            </a:r>
+            <a:endParaRPr lang="en-US" sz="3200" dirty="0"/>
+          </a:p>
+        </p:txBody>
+      </p:sp>
+      <p:sp>
+        <p:nvSpPr>
+          <p:cNvPr id="5" name="Text 0"/>
+          <p:cNvSpPr/>
+          <p:nvPr>
+            <p:ph idx="101" type="body" hasCustomPrompt="1"/>
+          </p:nvPr>
+        </p:nvSpPr>
+        <p:spPr>
+          <a:xfrm>
+            <a:off x="914400" y="3200400"/>
+            <a:ext cx="7315200" cy="731520"/>
+          </a:xfrm>
+          <a:prstGeom prst="rect">
+            <a:avLst/>
+          </a:prstGeom>
+          <a:noFill/>
+          <a:ln/>
+        </p:spPr>
+        <p:txBody>
+          <a:bodyPr wrap="square" rtlCol="0" anchor="t"/>
+          <a:lstStyle/>
+          <a:p>
+            <a:pPr algn="ctr" indent="0" marL="0">
+              <a:buNone/>
+            </a:pPr>
+            <a:r>
+              <a:rPr lang="en-US" sz="1500" dirty="0">
+                <a:solidFill>
+                  <a:schemeClr val="accent2"/>
+                </a:solidFill>
+              </a:rPr>
+              <a:t>気づいたら、責めずに見つめる。そして、今の自分で選び直す</a:t>
+            </a:r>
+            <a:endParaRPr lang="en-US" sz="1500" dirty="0"/>
+          </a:p>
+        </p:txBody>
+      </p:sp>
+      <p:sp>
+        <p:nvSpPr>
+          <p:cNvPr id="25" name="Slide Number Placeholder 0"/>
+          <p:cNvSpPr>
+            <a:spLocks noGrp="1"/>
+          </p:cNvSpPr>
+          <p:nvPr>
+            <p:ph type="sldNum" sz="quarter" idx="4294967295"/>
+          </p:nvPr>
+        </p:nvSpPr>
+        <p:spPr>
+          <a:xfrm>
+            <a:off x="8229600" y="4754880"/>
+            <a:ext cx="457200" cy="274320"/>
+          </a:xfrm>
+          <a:prstGeom prst="rect">
+            <a:avLst/>
+          </a:prstGeom>
+          <a:extLst>
+            <a:ext uri="{C572A759-6A51-4108-AA02-DFA0A04FC94B}">
+              <ma14:wrappingTextBoxFlag xmlns:ma14="http://schemas.microsoft.com/office/mac/drawingml/2011/main" val="0"/>
+            </a:ext>
+          </a:extLst>
+        </p:spPr>
+        <p:txBody>
+          <a:bodyPr/>
+          <a:lstStyle>
+            <a:lvl1pPr>
+              <a:defRPr sz="900">
+                <a:solidFill>
+                  <a:srgbClr val="B08A4E"/>
+                </a:solidFill>
+              </a:defRPr>
+            </a:lvl1pPr>
+          </a:lstStyle>
+          <a:p>
+            <a:pPr algn="r"/>
+            <a:fld id="{F7021451-1387-4CA6-816F-3879F97B5CBC}" type="slidenum">
+              <a:rPr b="0" lang="en-US"/>
+              <a:t>65</a:t>
+            </a:fld>
+            <a:endParaRPr lang="en-US"/>
+          </a:p>
+        </p:txBody>
+      </p:sp>
+    </p:spTree>
+  </p:cSld>
+  <p:clrMapOvr>
+    <a:masterClrMapping/>
+  </p:clrMapOvr>
+</p:sld>
+</file>
+
+<file path=ppt/slides/slide66.xml><?xml version="1.0" encoding="utf-8"?>
+<p:sld xmlns:a="http://schemas.openxmlformats.org/drawingml/2006/main" xmlns:r="http://schemas.openxmlformats.org/officeDocument/2006/relationships" xmlns:p="http://schemas.openxmlformats.org/presentationml/2006/main">
+  <p:cSld name="Slide 66">
+    <p:spTree>
+      <p:nvGrpSpPr>
+        <p:cNvPr id="1" name=""/>
+        <p:cNvGrpSpPr/>
+        <p:nvPr/>
+      </p:nvGrpSpPr>
+      <p:grpSpPr>
+        <a:xfrm>
+          <a:off x="0" y="0"/>
+          <a:ext cx="0" cy="0"/>
+          <a:chOff x="0" y="0"/>
+          <a:chExt cx="0" cy="0"/>
+        </a:xfrm>
+      </p:grpSpPr>
+      <p:sp>
+        <p:nvSpPr>
+          <p:cNvPr id="2" name="magic_main"/>
+          <p:cNvSpPr txBox="1"/>
+          <p:nvPr/>
+        </p:nvSpPr>
+        <p:spPr>
+          <a:xfrm>
+            <a:off x="548640" y="1005840"/>
+            <a:ext cx="8046720" cy="2103120"/>
+          </a:xfrm>
+          <a:prstGeom prst="rect">
+            <a:avLst/>
+          </a:prstGeom>
+          <a:noFill/>
+          <a:ln/>
+        </p:spPr>
+        <p:txBody>
+          <a:bodyPr wrap="square" lIns="1016" tIns="1016" rIns="1016" bIns="1016" rtlCol="0" anchor="ctr"/>
+          <a:lstStyle/>
+          <a:p>
+            <a:pPr algn="ctr" indent="0" marL="0">
+              <a:buNone/>
+            </a:pPr>
+            <a:r>
+              <a:rPr lang="en-US" sz="3400" b="1" dirty="0">
+                <a:solidFill>
+                  <a:schemeClr val="tx2"/>
+                </a:solidFill>
+                <a:latin typeface="Yu Mincho" pitchFamily="34" charset="0"/>
+                <a:ea typeface="Yu Mincho" pitchFamily="34" charset="-122"/>
+                <a:cs typeface="Yu Mincho" pitchFamily="34" charset="-120"/>
+              </a:rPr>
+              <a:t>根深いものは、</a:t>
+            </a:r>
+            <a:endParaRPr lang="en-US" sz="3400" dirty="0"/>
+          </a:p>
+          <a:p>
+            <a:pPr algn="ctr" indent="0" marL="0">
+              <a:buNone/>
+            </a:pPr>
+            <a:r>
+              <a:rPr lang="en-US" sz="3400" b="1" dirty="0">
+                <a:solidFill>
+                  <a:schemeClr val="tx2"/>
+                </a:solidFill>
+                <a:latin typeface="Yu Mincho" pitchFamily="34" charset="0"/>
+                <a:ea typeface="Yu Mincho" pitchFamily="34" charset="-122"/>
+                <a:cs typeface="Yu Mincho" pitchFamily="34" charset="-120"/>
+              </a:rPr>
+              <a:t>何度も何度も</a:t>
+            </a:r>
+            <a:endParaRPr lang="en-US" sz="3400" dirty="0"/>
+          </a:p>
+          <a:p>
+            <a:pPr algn="ctr" indent="0" marL="0">
+              <a:buNone/>
+            </a:pPr>
+            <a:r>
+              <a:rPr lang="en-US" sz="3400" b="1" dirty="0">
+                <a:solidFill>
+                  <a:schemeClr val="tx2"/>
+                </a:solidFill>
+                <a:latin typeface="Yu Mincho" pitchFamily="34" charset="0"/>
+                <a:ea typeface="Yu Mincho" pitchFamily="34" charset="-122"/>
+                <a:cs typeface="Yu Mincho" pitchFamily="34" charset="-120"/>
+              </a:rPr>
+              <a:t>自分に魔法をかけて、とっていく</a:t>
+            </a:r>
+            <a:endParaRPr lang="en-US" sz="3400" dirty="0"/>
+          </a:p>
+        </p:txBody>
+      </p:sp>
+      <p:sp>
+        <p:nvSpPr>
+          <p:cNvPr id="3" name="magic_sub"/>
+          <p:cNvSpPr txBox="1"/>
+          <p:nvPr/>
+        </p:nvSpPr>
+        <p:spPr>
+          <a:xfrm>
+            <a:off x="731520" y="3246120"/>
+            <a:ext cx="7680960" cy="548640"/>
+          </a:xfrm>
+          <a:prstGeom prst="rect">
+            <a:avLst/>
+          </a:prstGeom>
+          <a:noFill/>
+          <a:ln/>
+        </p:spPr>
+        <p:txBody>
+          <a:bodyPr wrap="square" lIns="1016" tIns="1016" rIns="1016" bIns="1016" rtlCol="0" anchor="ctr"/>
+          <a:lstStyle/>
+          <a:p>
+            <a:pPr algn="ctr" indent="0" marL="0">
+              <a:buNone/>
+            </a:pPr>
+            <a:r>
+              <a:rPr lang="en-US" sz="1800" b="1" dirty="0">
+                <a:solidFill>
+                  <a:schemeClr val="tx2"/>
+                </a:solidFill>
+              </a:rPr>
+              <a:t>あなたが自分にかける言葉が、魔法になります</a:t>
+            </a:r>
+            <a:endParaRPr lang="en-US" sz="1800" dirty="0"/>
+          </a:p>
+        </p:txBody>
+      </p:sp>
+    </p:spTree>
+  </p:cSld>
+  <p:clrMapOvr>
+    <a:masterClrMapping/>
+  </p:clrMapOvr>
+</p:sld>
+</file>
+
+<file path=ppt/slides/slide67.xml><?xml version="1.0" encoding="utf-8"?>
+<p:sld xmlns:a="http://schemas.openxmlformats.org/drawingml/2006/main" xmlns:r="http://schemas.openxmlformats.org/officeDocument/2006/relationships" xmlns:p="http://schemas.openxmlformats.org/presentationml/2006/main">
+  <p:cSld name="Slide 67">
     <p:spTree>
       <p:nvGrpSpPr>
         <p:cNvPr id="1" name=""/>
@@ -23352,9 +27856,9 @@
 </p:sld>
 </file>
 
-<file path=ppt/slides/slide54.xml><?xml version="1.0" encoding="utf-8"?>
+<file path=ppt/slides/slide68.xml><?xml version="1.0" encoding="utf-8"?>
 <p:sld xmlns:a="http://schemas.openxmlformats.org/drawingml/2006/main" xmlns:r="http://schemas.openxmlformats.org/officeDocument/2006/relationships" xmlns:p="http://schemas.openxmlformats.org/presentationml/2006/main">
-  <p:cSld name="Slide 54">
+  <p:cSld name="Slide 68">
     <p:spTree>
       <p:nvGrpSpPr>
         <p:cNvPr id="1" name=""/>
@@ -23483,217 +27987,6 @@
               <a:t>海音（かのん）〜心体の調律〜　髙橋 由香</a:t>
             </a:r>
             <a:endParaRPr lang="en-US" sz="1600" dirty="0"/>
-          </a:p>
-        </p:txBody>
-      </p:sp>
-    </p:spTree>
-  </p:cSld>
-  <p:clrMapOvr>
-    <a:masterClrMapping/>
-  </p:clrMapOvr>
-</p:sld>
-</file>
-
-<file path=ppt/slides/slide6.xml><?xml version="1.0" encoding="utf-8"?>
-<p:sld xmlns:a="http://schemas.openxmlformats.org/drawingml/2006/main" xmlns:r="http://schemas.openxmlformats.org/officeDocument/2006/relationships" xmlns:p="http://schemas.openxmlformats.org/presentationml/2006/main">
-  <p:cSld name="Slide 6">
-    <p:spTree>
-      <p:nvGrpSpPr>
-        <p:cNvPr id="1" name=""/>
-        <p:cNvGrpSpPr/>
-        <p:nvPr/>
-      </p:nvGrpSpPr>
-      <p:grpSpPr>
-        <a:xfrm>
-          <a:off x="0" y="0"/>
-          <a:ext cx="0" cy="0"/>
-          <a:chOff x="0" y="0"/>
-          <a:chExt cx="0" cy="0"/>
-        </a:xfrm>
-      </p:grpSpPr>
-      <p:sp>
-        <p:nvSpPr>
-          <p:cNvPr id="2" name="frame"/>
-          <p:cNvSpPr/>
-          <p:nvPr/>
-        </p:nvSpPr>
-        <p:spPr>
-          <a:xfrm>
-            <a:off x="228600" y="137160"/>
-            <a:ext cx="8686800" cy="4526280"/>
-          </a:xfrm>
-          <a:prstGeom prst="rect">
-            <a:avLst/>
-          </a:prstGeom>
-          <a:ln w="12700">
-            <a:solidFill>
-              <a:srgbClr val="B08A4E"/>
-            </a:solidFill>
-            <a:prstDash val="solid"/>
-          </a:ln>
-        </p:spPr>
-        <p:txBody>
-          <a:bodyPr/>
-          <a:p/>
-        </p:txBody>
-      </p:sp>
-      <p:sp>
-        <p:nvSpPr>
-          <p:cNvPr id="3" name="qlabel"/>
-          <p:cNvSpPr txBox="1"/>
-          <p:nvPr/>
-        </p:nvSpPr>
-        <p:spPr>
-          <a:xfrm>
-            <a:off x="457200" y="320040"/>
-            <a:ext cx="8229600" cy="365760"/>
-          </a:xfrm>
-          <a:prstGeom prst="rect">
-            <a:avLst/>
-          </a:prstGeom>
-          <a:noFill/>
-          <a:ln/>
-        </p:spPr>
-        <p:txBody>
-          <a:bodyPr wrap="square" lIns="0" tIns="0" rIns="0" bIns="0" rtlCol="0" anchor="t"/>
-          <a:lstStyle/>
-          <a:p>
-            <a:pPr algn="ctr" indent="0" marL="0">
-              <a:buNone/>
-            </a:pPr>
-            <a:r>
-              <a:rPr lang="en-US" sz="1300" b="1" dirty="0">
-                <a:solidFill>
-                  <a:schemeClr val="accent2"/>
-                </a:solidFill>
-              </a:rPr>
-              <a:t>どのような事でお悩みですか？</a:t>
-            </a:r>
-            <a:endParaRPr lang="en-US" sz="1300" dirty="0"/>
-          </a:p>
-        </p:txBody>
-      </p:sp>
-      <p:sp>
-        <p:nvSpPr>
-          <p:cNvPr id="4" name="Text 0"/>
-          <p:cNvSpPr/>
-          <p:nvPr>
-            <p:ph idx="100" type="title" hasCustomPrompt="1"/>
-          </p:nvPr>
-        </p:nvSpPr>
-        <p:spPr>
-          <a:xfrm>
-            <a:off x="914400" y="1554480"/>
-            <a:ext cx="7315200" cy="1554480"/>
-          </a:xfrm>
-          <a:prstGeom prst="rect">
-            <a:avLst/>
-          </a:prstGeom>
-          <a:noFill/>
-          <a:ln/>
-        </p:spPr>
-        <p:txBody>
-          <a:bodyPr wrap="square" rtlCol="0" anchor="ctr"/>
-          <a:lstStyle/>
-          <a:p>
-            <a:pPr algn="ctr" indent="0" marL="0">
-              <a:buNone/>
-            </a:pPr>
-            <a:r>
-              <a:rPr lang="en-US" sz="3200" b="1" dirty="0">
-                <a:solidFill>
-                  <a:schemeClr val="tx2"/>
-                </a:solidFill>
-                <a:latin typeface="Yu Mincho" pitchFamily="34" charset="0"/>
-                <a:ea typeface="Yu Mincho" pitchFamily="34" charset="-122"/>
-                <a:cs typeface="Yu Mincho" pitchFamily="34" charset="-120"/>
-              </a:rPr>
-              <a:t>それは、いつからですか？</a:t>
-            </a:r>
-            <a:endParaRPr lang="en-US" sz="3200" dirty="0"/>
-          </a:p>
-        </p:txBody>
-      </p:sp>
-      <p:sp>
-        <p:nvSpPr>
-          <p:cNvPr id="5" name="Text 0"/>
-          <p:cNvSpPr/>
-          <p:nvPr>
-            <p:ph idx="101" type="body" hasCustomPrompt="1"/>
-          </p:nvPr>
-        </p:nvSpPr>
-        <p:spPr>
-          <a:xfrm>
-            <a:off x="914400" y="3200400"/>
-            <a:ext cx="7315200" cy="731520"/>
-          </a:xfrm>
-          <a:prstGeom prst="rect">
-            <a:avLst/>
-          </a:prstGeom>
-          <a:noFill/>
-          <a:ln/>
-        </p:spPr>
-        <p:txBody>
-          <a:bodyPr wrap="square" rtlCol="0" anchor="t"/>
-          <a:lstStyle/>
-          <a:p>
-            <a:pPr algn="ctr" indent="0" marL="0">
-              <a:buNone/>
-            </a:pPr>
-            <a:r>
-              <a:rPr lang="en-US" sz="1500" dirty="0">
-                <a:solidFill>
-                  <a:schemeClr val="accent2"/>
-                </a:solidFill>
-              </a:rPr>
-              <a:t>どのくらいの期間、続いていますか？</a:t>
-            </a:r>
-            <a:endParaRPr lang="en-US" sz="1500" dirty="0"/>
-          </a:p>
-        </p:txBody>
-      </p:sp>
-      <p:sp>
-        <p:nvSpPr>
-          <p:cNvPr id="25" name="Slide Number Placeholder 0"/>
-          <p:cNvSpPr>
-            <a:spLocks noGrp="1"/>
-          </p:cNvSpPr>
-          <p:nvPr>
-            <p:ph type="sldNum" sz="quarter" idx="4294967295"/>
-          </p:nvPr>
-        </p:nvSpPr>
-        <p:spPr>
-          <a:xfrm>
-            <a:off x="8229600" y="4754880"/>
-            <a:ext cx="457200" cy="274320"/>
-          </a:xfrm>
-          <a:prstGeom prst="rect">
-            <a:avLst/>
-          </a:prstGeom>
-          <a:extLst>
-            <a:ext uri="{C572A759-6A51-4108-AA02-DFA0A04FC94B}">
-              <ma14:wrappingTextBoxFlag xmlns:ma14="http://schemas.microsoft.com/office/mac/drawingml/2011/main" val="0"/>
-            </a:ext>
-          </a:extLst>
-        </p:spPr>
-        <p:txBody>
-          <a:bodyPr/>
-          <a:lstStyle>
-            <a:lvl1pPr>
-              <a:defRPr sz="900">
-                <a:solidFill>
-                  <a:srgbClr val="B08A4E"/>
-                </a:solidFill>
-              </a:defRPr>
-            </a:lvl1pPr>
-          </a:lstStyle>
-          <a:p>
-            <a:pPr algn="r"/>
-            <a:fld id="{F7021451-1387-4CA6-816F-3879F97B5CBC}" type="slidenum">
-              <a:rPr b="0" lang="en-US"/>
-              <a:t>6</a:t>
-            </a:fld>
-            <a:endParaRPr lang="en-US"/>
           </a:p>
         </p:txBody>
       </p:sp>
